--- a/RURA_followup_mtg.pptx
+++ b/RURA_followup_mtg.pptx
@@ -3115,8 +3115,8 @@
         </p:nvSpPr>
         <p:spPr>
           <a:xfrm>
-            <a:off x="9601200" y="274320"/>
-            <a:ext cx="2286000" cy="457200"/>
+            <a:off x="9418320" y="182880"/>
+            <a:ext cx="2560320" cy="457200"/>
           </a:xfrm>
           <a:prstGeom prst="rect">
             <a:avLst/>
@@ -3131,22 +3131,13 @@
           <a:p>
             <a:pPr algn="r"/>
             <a:r>
-              <a:rPr sz="1800" b="1">
-                <a:solidFill>
-                  <a:srgbClr val="E60012"/>
+              <a:rPr sz="2000" b="1">
+                <a:solidFill>
+                  <a:srgbClr val="C81E1E"/>
                 </a:solidFill>
                 <a:latin typeface="Arial"/>
               </a:rPr>
-              <a:t>Re</a:t>
-            </a:r>
-            <a:r>
-              <a:rPr sz="1800" b="1">
-                <a:solidFill>
-                  <a:srgbClr val="E60012"/>
-                </a:solidFill>
-                <a:latin typeface="Arial"/>
-              </a:rPr>
-              <a:t> RENAISSANCE</a:t>
+              <a:t>RENAISSANCE</a:t>
             </a:r>
           </a:p>
         </p:txBody>
@@ -3159,14 +3150,14 @@
         </p:nvSpPr>
         <p:spPr>
           <a:xfrm>
-            <a:off x="731520" y="2560320"/>
-            <a:ext cx="10698480" cy="2011680"/>
+            <a:off x="0" y="2286000"/>
+            <a:ext cx="12191695" cy="2560320"/>
           </a:xfrm>
           <a:prstGeom prst="rect">
             <a:avLst/>
           </a:prstGeom>
           <a:solidFill>
-            <a:srgbClr val="D9D9D9"/>
+            <a:srgbClr val="F0F0F0"/>
           </a:solidFill>
           <a:ln>
             <a:noFill/>
@@ -3202,8 +3193,8 @@
         </p:nvSpPr>
         <p:spPr>
           <a:xfrm>
-            <a:off x="914400" y="2743200"/>
-            <a:ext cx="10332720" cy="1645920"/>
+            <a:off x="457200" y="2468880"/>
+            <a:ext cx="11247120" cy="1828800"/>
           </a:xfrm>
           <a:prstGeom prst="rect">
             <a:avLst/>
@@ -3217,7 +3208,7 @@
           <a:lstStyle/>
           <a:p>
             <a:pPr algn="ctr">
-              <a:defRPr sz="3600" b="1">
+              <a:defRPr sz="4400" b="1">
                 <a:solidFill>
                   <a:srgbClr val="000000"/>
                 </a:solidFill>
@@ -3242,8 +3233,8 @@
         </p:nvSpPr>
         <p:spPr>
           <a:xfrm>
-            <a:off x="914400" y="4114800"/>
-            <a:ext cx="10332720" cy="548640"/>
+            <a:off x="457200" y="5029200"/>
+            <a:ext cx="11247120" cy="731520"/>
           </a:xfrm>
           <a:prstGeom prst="rect">
             <a:avLst/>
@@ -3257,9 +3248,9 @@
           <a:lstStyle/>
           <a:p>
             <a:pPr algn="ctr">
-              <a:defRPr sz="2000">
-                <a:solidFill>
-                  <a:srgbClr val="404040"/>
+              <a:defRPr sz="2400">
+                <a:solidFill>
+                  <a:srgbClr val="505050"/>
                 </a:solidFill>
                 <a:latin typeface="Meiryo"/>
               </a:defRPr>
@@ -3296,8 +3287,8 @@
         </p:nvSpPr>
         <p:spPr>
           <a:xfrm>
-            <a:off x="9601200" y="274320"/>
-            <a:ext cx="2286000" cy="457200"/>
+            <a:off x="9418320" y="182880"/>
+            <a:ext cx="2560320" cy="457200"/>
           </a:xfrm>
           <a:prstGeom prst="rect">
             <a:avLst/>
@@ -3312,42 +3303,33 @@
           <a:p>
             <a:pPr algn="r"/>
             <a:r>
-              <a:rPr sz="1800" b="1">
-                <a:solidFill>
-                  <a:srgbClr val="E60012"/>
+              <a:rPr sz="2000" b="1">
+                <a:solidFill>
+                  <a:srgbClr val="C81E1E"/>
                 </a:solidFill>
                 <a:latin typeface="Arial"/>
               </a:rPr>
-              <a:t>Re</a:t>
-            </a:r>
-            <a:r>
-              <a:rPr sz="1800" b="1">
-                <a:solidFill>
-                  <a:srgbClr val="E60012"/>
-                </a:solidFill>
-                <a:latin typeface="Arial"/>
-              </a:rPr>
-              <a:t> RENAISSANCE</a:t>
-            </a:r>
-          </a:p>
-        </p:txBody>
-      </p:sp>
-      <p:sp>
-        <p:nvSpPr>
-          <p:cNvPr id="3" name="Rectangle 2"/>
+              <a:t>RENAISSANCE</a:t>
+            </a:r>
+          </a:p>
+        </p:txBody>
+      </p:sp>
+      <p:sp>
+        <p:nvSpPr>
+          <p:cNvPr id="3" name="Oval 2"/>
           <p:cNvSpPr/>
           <p:nvPr/>
         </p:nvSpPr>
         <p:spPr>
           <a:xfrm>
-            <a:off x="1371600" y="2743200"/>
-            <a:ext cx="9418320" cy="1371600"/>
-          </a:xfrm>
-          <a:prstGeom prst="rect">
+            <a:off x="1371600" y="2011680"/>
+            <a:ext cx="2286000" cy="2286000"/>
+          </a:xfrm>
+          <a:prstGeom prst="ellipse">
             <a:avLst/>
           </a:prstGeom>
           <a:solidFill>
-            <a:srgbClr val="D9D9D9"/>
+            <a:srgbClr val="C81E1E"/>
           </a:solidFill>
           <a:ln>
             <a:noFill/>
@@ -3383,8 +3365,8 @@
         </p:nvSpPr>
         <p:spPr>
           <a:xfrm>
-            <a:off x="1371600" y="2880360"/>
-            <a:ext cx="9418320" cy="1097280"/>
+            <a:off x="1371600" y="2286000"/>
+            <a:ext cx="2286000" cy="1828800"/>
           </a:xfrm>
           <a:prstGeom prst="rect">
             <a:avLst/>
@@ -3398,7 +3380,43 @@
           <a:lstStyle/>
           <a:p>
             <a:pPr algn="ctr">
-              <a:defRPr sz="3200" b="1">
+              <a:defRPr sz="7200" b="1">
+                <a:solidFill>
+                  <a:srgbClr val="FFFFFF"/>
+                </a:solidFill>
+                <a:latin typeface="Arial"/>
+              </a:defRPr>
+            </a:pPr>
+            <a:r>
+              <a:t>2</a:t>
+            </a:r>
+          </a:p>
+        </p:txBody>
+      </p:sp>
+      <p:sp>
+        <p:nvSpPr>
+          <p:cNvPr id="5" name="TextBox 4"/>
+          <p:cNvSpPr txBox="1"/>
+          <p:nvPr/>
+        </p:nvSpPr>
+        <p:spPr>
+          <a:xfrm>
+            <a:off x="4114800" y="2560320"/>
+            <a:ext cx="7315200" cy="1645920"/>
+          </a:xfrm>
+          <a:prstGeom prst="rect">
+            <a:avLst/>
+          </a:prstGeom>
+          <a:noFill/>
+        </p:spPr>
+        <p:txBody>
+          <a:bodyPr wrap="square">
+            <a:spAutoFit/>
+          </a:bodyPr>
+          <a:lstStyle/>
+          <a:p>
+            <a:pPr>
+              <a:defRPr sz="4000" b="1">
                 <a:solidFill>
                   <a:srgbClr val="000000"/>
                 </a:solidFill>
@@ -3406,7 +3424,7 @@
               </a:defRPr>
             </a:pPr>
             <a:r>
-              <a:t>【2】標準オペレーション</a:t>
+              <a:t>標準オペレーション</a:t>
             </a:r>
           </a:p>
         </p:txBody>
@@ -3437,8 +3455,8 @@
         </p:nvSpPr>
         <p:spPr>
           <a:xfrm>
-            <a:off x="9601200" y="274320"/>
-            <a:ext cx="2286000" cy="457200"/>
+            <a:off x="9418320" y="182880"/>
+            <a:ext cx="2560320" cy="457200"/>
           </a:xfrm>
           <a:prstGeom prst="rect">
             <a:avLst/>
@@ -3453,78 +3471,33 @@
           <a:p>
             <a:pPr algn="r"/>
             <a:r>
-              <a:rPr sz="1800" b="1">
-                <a:solidFill>
-                  <a:srgbClr val="E60012"/>
+              <a:rPr sz="2000" b="1">
+                <a:solidFill>
+                  <a:srgbClr val="C81E1E"/>
                 </a:solidFill>
                 <a:latin typeface="Arial"/>
               </a:rPr>
-              <a:t>Re</a:t>
-            </a:r>
-            <a:r>
-              <a:rPr sz="1800" b="1">
-                <a:solidFill>
-                  <a:srgbClr val="E60012"/>
-                </a:solidFill>
-                <a:latin typeface="Arial"/>
-              </a:rPr>
-              <a:t> RENAISSANCE</a:t>
-            </a:r>
-          </a:p>
-        </p:txBody>
-      </p:sp>
-      <p:sp>
-        <p:nvSpPr>
-          <p:cNvPr id="3" name="TextBox 2"/>
-          <p:cNvSpPr txBox="1"/>
-          <p:nvPr/>
-        </p:nvSpPr>
-        <p:spPr>
-          <a:xfrm>
-            <a:off x="457200" y="457200"/>
-            <a:ext cx="9144000" cy="640080"/>
-          </a:xfrm>
-          <a:prstGeom prst="rect">
-            <a:avLst/>
-          </a:prstGeom>
-          <a:noFill/>
-        </p:spPr>
-        <p:txBody>
-          <a:bodyPr wrap="none">
-            <a:spAutoFit/>
-          </a:bodyPr>
-          <a:lstStyle/>
-          <a:p>
-            <a:pPr>
-              <a:defRPr sz="2800" b="1">
-                <a:solidFill>
-                  <a:srgbClr val="000000"/>
-                </a:solidFill>
-                <a:latin typeface="Meiryo"/>
-              </a:defRPr>
-            </a:pPr>
-            <a:r>
-              <a:t>【2】標準オペレーション</a:t>
-            </a:r>
-          </a:p>
-        </p:txBody>
-      </p:sp>
-      <p:sp>
-        <p:nvSpPr>
-          <p:cNvPr id="4" name="Rectangle 3"/>
+              <a:t>RENAISSANCE</a:t>
+            </a:r>
+          </a:p>
+        </p:txBody>
+      </p:sp>
+      <p:sp>
+        <p:nvSpPr>
+          <p:cNvPr id="3" name="Rectangle 2"/>
           <p:cNvSpPr/>
           <p:nvPr/>
         </p:nvSpPr>
         <p:spPr>
           <a:xfrm>
-            <a:off x="457200" y="1051560"/>
-            <a:ext cx="11247120" cy="38100"/>
+            <a:off x="0" y="685800"/>
+            <a:ext cx="12191695" cy="50800"/>
           </a:xfrm>
           <a:prstGeom prst="rect">
             <a:avLst/>
           </a:prstGeom>
           <a:solidFill>
-            <a:srgbClr val="E60012"/>
+            <a:srgbClr val="C81E1E"/>
           </a:solidFill>
           <a:ln>
             <a:noFill/>
@@ -3554,47 +3527,145 @@
       </p:sp>
       <p:sp>
         <p:nvSpPr>
-          <p:cNvPr id="5" name="TextBox 4"/>
-          <p:cNvSpPr txBox="1"/>
-          <p:nvPr/>
-        </p:nvSpPr>
-        <p:spPr>
-          <a:xfrm>
-            <a:off x="640080" y="1371600"/>
-            <a:ext cx="10972800" cy="5029200"/>
-          </a:xfrm>
-          <a:prstGeom prst="rect">
-            <a:avLst/>
-          </a:prstGeom>
-          <a:noFill/>
-        </p:spPr>
-        <p:txBody>
-          <a:bodyPr wrap="square">
+          <p:cNvPr id="4" name="TextBox 3"/>
+          <p:cNvSpPr txBox="1"/>
+          <p:nvPr/>
+        </p:nvSpPr>
+        <p:spPr>
+          <a:xfrm>
+            <a:off x="457200" y="137160"/>
+            <a:ext cx="8686800" cy="548640"/>
+          </a:xfrm>
+          <a:prstGeom prst="rect">
+            <a:avLst/>
+          </a:prstGeom>
+          <a:noFill/>
+        </p:spPr>
+        <p:txBody>
+          <a:bodyPr wrap="none">
             <a:spAutoFit/>
           </a:bodyPr>
           <a:lstStyle/>
           <a:p>
             <a:pPr>
-              <a:spcBef>
-                <a:spcPts val="0"/>
-              </a:spcBef>
-              <a:defRPr sz="2000" b="1">
-                <a:solidFill>
-                  <a:srgbClr val="E60012"/>
+              <a:defRPr sz="3200" b="1">
+                <a:solidFill>
+                  <a:srgbClr val="C81E1E"/>
                 </a:solidFill>
                 <a:latin typeface="Meiryo"/>
               </a:defRPr>
             </a:pPr>
             <a:r>
-              <a:t>■ テーマ</a:t>
-            </a:r>
-          </a:p>
+              <a:t>【2】標準オペレーション</a:t>
+            </a:r>
+          </a:p>
+        </p:txBody>
+      </p:sp>
+      <p:sp>
+        <p:nvSpPr>
+          <p:cNvPr id="5" name="Rounded Rectangle 4"/>
+          <p:cNvSpPr/>
+          <p:nvPr/>
+        </p:nvSpPr>
+        <p:spPr>
+          <a:xfrm>
+            <a:off x="457200" y="1005840"/>
+            <a:ext cx="11247120" cy="1188720"/>
+          </a:xfrm>
+          <a:prstGeom prst="roundRect">
+            <a:avLst/>
+          </a:prstGeom>
+          <a:solidFill>
+            <a:srgbClr val="F0F0F0"/>
+          </a:solidFill>
+          <a:ln>
+            <a:solidFill>
+              <a:srgbClr val="C8C8C8"/>
+            </a:solidFill>
+          </a:ln>
+        </p:spPr>
+        <p:style>
+          <a:lnRef idx="1">
+            <a:schemeClr val="accent1"/>
+          </a:lnRef>
+          <a:fillRef idx="3">
+            <a:schemeClr val="accent1"/>
+          </a:fillRef>
+          <a:effectRef idx="2">
+            <a:schemeClr val="accent1"/>
+          </a:effectRef>
+          <a:fontRef idx="minor">
+            <a:schemeClr val="lt1"/>
+          </a:fontRef>
+        </p:style>
+        <p:txBody>
+          <a:bodyPr rtlCol="0" anchor="ctr"/>
+          <a:lstStyle/>
+          <a:p>
+            <a:pPr algn="ctr"/>
+          </a:p>
+        </p:txBody>
+      </p:sp>
+      <p:sp>
+        <p:nvSpPr>
+          <p:cNvPr id="6" name="TextBox 5"/>
+          <p:cNvSpPr txBox="1"/>
+          <p:nvPr/>
+        </p:nvSpPr>
+        <p:spPr>
+          <a:xfrm>
+            <a:off x="731520" y="1143000"/>
+            <a:ext cx="10515600" cy="457200"/>
+          </a:xfrm>
+          <a:prstGeom prst="rect">
+            <a:avLst/>
+          </a:prstGeom>
+          <a:noFill/>
+        </p:spPr>
+        <p:txBody>
+          <a:bodyPr wrap="none">
+            <a:spAutoFit/>
+          </a:bodyPr>
+          <a:lstStyle/>
           <a:p>
             <a:pPr>
-              <a:spcBef>
-                <a:spcPts val="400"/>
-              </a:spcBef>
-              <a:defRPr sz="1800">
+              <a:defRPr sz="2200" b="1">
+                <a:solidFill>
+                  <a:srgbClr val="C81E1E"/>
+                </a:solidFill>
+                <a:latin typeface="Meiryo"/>
+              </a:defRPr>
+            </a:pPr>
+            <a:r>
+              <a:t>テーマ</a:t>
+            </a:r>
+          </a:p>
+        </p:txBody>
+      </p:sp>
+      <p:sp>
+        <p:nvSpPr>
+          <p:cNvPr id="7" name="TextBox 6"/>
+          <p:cNvSpPr txBox="1"/>
+          <p:nvPr/>
+        </p:nvSpPr>
+        <p:spPr>
+          <a:xfrm>
+            <a:off x="731520" y="1554480"/>
+            <a:ext cx="10515600" cy="548640"/>
+          </a:xfrm>
+          <a:prstGeom prst="rect">
+            <a:avLst/>
+          </a:prstGeom>
+          <a:noFill/>
+        </p:spPr>
+        <p:txBody>
+          <a:bodyPr wrap="none">
+            <a:spAutoFit/>
+          </a:bodyPr>
+          <a:lstStyle/>
+          <a:p>
+            <a:pPr>
+              <a:defRPr sz="2000">
                 <a:solidFill>
                   <a:srgbClr val="000000"/>
                 </a:solidFill>
@@ -3602,31 +3673,116 @@
               </a:defRPr>
             </a:pPr>
             <a:r>
-              <a:t>  早急に対応が必要な実務タスクと期限の指示</a:t>
-            </a:r>
-          </a:p>
+              <a:t>早急に対応が必要な実務タスクと期限の指示</a:t>
+            </a:r>
+          </a:p>
+        </p:txBody>
+      </p:sp>
+      <p:sp>
+        <p:nvSpPr>
+          <p:cNvPr id="8" name="Rounded Rectangle 7"/>
+          <p:cNvSpPr/>
+          <p:nvPr/>
+        </p:nvSpPr>
+        <p:spPr>
+          <a:xfrm>
+            <a:off x="457200" y="2377440"/>
+            <a:ext cx="11247120" cy="1188720"/>
+          </a:xfrm>
+          <a:prstGeom prst="roundRect">
+            <a:avLst/>
+          </a:prstGeom>
+          <a:solidFill>
+            <a:srgbClr val="FFE6E6"/>
+          </a:solidFill>
+          <a:ln>
+            <a:solidFill>
+              <a:srgbClr val="C81E1E"/>
+            </a:solidFill>
+          </a:ln>
+        </p:spPr>
+        <p:style>
+          <a:lnRef idx="1">
+            <a:schemeClr val="accent1"/>
+          </a:lnRef>
+          <a:fillRef idx="3">
+            <a:schemeClr val="accent1"/>
+          </a:fillRef>
+          <a:effectRef idx="2">
+            <a:schemeClr val="accent1"/>
+          </a:effectRef>
+          <a:fontRef idx="minor">
+            <a:schemeClr val="lt1"/>
+          </a:fontRef>
+        </p:style>
+        <p:txBody>
+          <a:bodyPr rtlCol="0" anchor="ctr"/>
+          <a:lstStyle/>
+          <a:p>
+            <a:pPr algn="ctr"/>
+          </a:p>
+        </p:txBody>
+      </p:sp>
+      <p:sp>
+        <p:nvSpPr>
+          <p:cNvPr id="9" name="TextBox 8"/>
+          <p:cNvSpPr txBox="1"/>
+          <p:nvPr/>
+        </p:nvSpPr>
+        <p:spPr>
+          <a:xfrm>
+            <a:off x="731520" y="2514600"/>
+            <a:ext cx="10515600" cy="457200"/>
+          </a:xfrm>
+          <a:prstGeom prst="rect">
+            <a:avLst/>
+          </a:prstGeom>
+          <a:noFill/>
+        </p:spPr>
+        <p:txBody>
+          <a:bodyPr wrap="none">
+            <a:spAutoFit/>
+          </a:bodyPr>
+          <a:lstStyle/>
           <a:p>
             <a:pPr>
-              <a:spcBef>
-                <a:spcPts val="1600"/>
-              </a:spcBef>
-              <a:defRPr sz="2000" b="1">
-                <a:solidFill>
-                  <a:srgbClr val="E60012"/>
+              <a:defRPr sz="2200" b="1">
+                <a:solidFill>
+                  <a:srgbClr val="C81E1E"/>
                 </a:solidFill>
                 <a:latin typeface="Meiryo"/>
               </a:defRPr>
             </a:pPr>
             <a:r>
-              <a:t>■ 重要度</a:t>
-            </a:r>
-          </a:p>
+              <a:t>重要度</a:t>
+            </a:r>
+          </a:p>
+        </p:txBody>
+      </p:sp>
+      <p:sp>
+        <p:nvSpPr>
+          <p:cNvPr id="10" name="TextBox 9"/>
+          <p:cNvSpPr txBox="1"/>
+          <p:nvPr/>
+        </p:nvSpPr>
+        <p:spPr>
+          <a:xfrm>
+            <a:off x="731520" y="2926080"/>
+            <a:ext cx="10515600" cy="548640"/>
+          </a:xfrm>
+          <a:prstGeom prst="rect">
+            <a:avLst/>
+          </a:prstGeom>
+          <a:noFill/>
+        </p:spPr>
+        <p:txBody>
+          <a:bodyPr wrap="none">
+            <a:spAutoFit/>
+          </a:bodyPr>
+          <a:lstStyle/>
           <a:p>
             <a:pPr>
-              <a:spcBef>
-                <a:spcPts val="400"/>
-              </a:spcBef>
-              <a:defRPr sz="1800">
+              <a:defRPr sz="2000">
                 <a:solidFill>
                   <a:srgbClr val="000000"/>
                 </a:solidFill>
@@ -3634,7 +3790,7 @@
               </a:defRPr>
             </a:pPr>
             <a:r>
-              <a:t>  必須（Must）項目の確認</a:t>
+              <a:t>必須（Must）項目の確認</a:t>
             </a:r>
           </a:p>
         </p:txBody>
@@ -3665,8 +3821,8 @@
         </p:nvSpPr>
         <p:spPr>
           <a:xfrm>
-            <a:off x="9601200" y="274320"/>
-            <a:ext cx="2286000" cy="457200"/>
+            <a:off x="9418320" y="182880"/>
+            <a:ext cx="2560320" cy="457200"/>
           </a:xfrm>
           <a:prstGeom prst="rect">
             <a:avLst/>
@@ -3681,78 +3837,33 @@
           <a:p>
             <a:pPr algn="r"/>
             <a:r>
-              <a:rPr sz="1800" b="1">
-                <a:solidFill>
-                  <a:srgbClr val="E60012"/>
+              <a:rPr sz="2000" b="1">
+                <a:solidFill>
+                  <a:srgbClr val="C81E1E"/>
                 </a:solidFill>
                 <a:latin typeface="Arial"/>
               </a:rPr>
-              <a:t>Re</a:t>
-            </a:r>
-            <a:r>
-              <a:rPr sz="1800" b="1">
-                <a:solidFill>
-                  <a:srgbClr val="E60012"/>
-                </a:solidFill>
-                <a:latin typeface="Arial"/>
-              </a:rPr>
-              <a:t> RENAISSANCE</a:t>
-            </a:r>
-          </a:p>
-        </p:txBody>
-      </p:sp>
-      <p:sp>
-        <p:nvSpPr>
-          <p:cNvPr id="3" name="TextBox 2"/>
-          <p:cNvSpPr txBox="1"/>
-          <p:nvPr/>
-        </p:nvSpPr>
-        <p:spPr>
-          <a:xfrm>
-            <a:off x="457200" y="457200"/>
-            <a:ext cx="9144000" cy="640080"/>
-          </a:xfrm>
-          <a:prstGeom prst="rect">
-            <a:avLst/>
-          </a:prstGeom>
-          <a:noFill/>
-        </p:spPr>
-        <p:txBody>
-          <a:bodyPr wrap="none">
-            <a:spAutoFit/>
-          </a:bodyPr>
-          <a:lstStyle/>
-          <a:p>
-            <a:pPr>
-              <a:defRPr sz="2800" b="1">
-                <a:solidFill>
-                  <a:srgbClr val="000000"/>
-                </a:solidFill>
-                <a:latin typeface="Meiryo"/>
-              </a:defRPr>
-            </a:pPr>
-            <a:r>
-              <a:t>2-1. スクール人数メンテナンス</a:t>
-            </a:r>
-          </a:p>
-        </p:txBody>
-      </p:sp>
-      <p:sp>
-        <p:nvSpPr>
-          <p:cNvPr id="4" name="Rectangle 3"/>
+              <a:t>RENAISSANCE</a:t>
+            </a:r>
+          </a:p>
+        </p:txBody>
+      </p:sp>
+      <p:sp>
+        <p:nvSpPr>
+          <p:cNvPr id="3" name="Rectangle 2"/>
           <p:cNvSpPr/>
           <p:nvPr/>
         </p:nvSpPr>
         <p:spPr>
           <a:xfrm>
-            <a:off x="457200" y="1051560"/>
-            <a:ext cx="11247120" cy="38100"/>
+            <a:off x="0" y="685800"/>
+            <a:ext cx="12191695" cy="50800"/>
           </a:xfrm>
           <a:prstGeom prst="rect">
             <a:avLst/>
           </a:prstGeom>
           <a:solidFill>
-            <a:srgbClr val="E60012"/>
+            <a:srgbClr val="C81E1E"/>
           </a:solidFill>
           <a:ln>
             <a:noFill/>
@@ -3782,14 +3893,93 @@
       </p:sp>
       <p:sp>
         <p:nvSpPr>
-          <p:cNvPr id="5" name="TextBox 4"/>
-          <p:cNvSpPr txBox="1"/>
-          <p:nvPr/>
-        </p:nvSpPr>
-        <p:spPr>
-          <a:xfrm>
-            <a:off x="640080" y="1371600"/>
-            <a:ext cx="10972800" cy="5029200"/>
+          <p:cNvPr id="4" name="TextBox 3"/>
+          <p:cNvSpPr txBox="1"/>
+          <p:nvPr/>
+        </p:nvSpPr>
+        <p:spPr>
+          <a:xfrm>
+            <a:off x="457200" y="137160"/>
+            <a:ext cx="8686800" cy="548640"/>
+          </a:xfrm>
+          <a:prstGeom prst="rect">
+            <a:avLst/>
+          </a:prstGeom>
+          <a:noFill/>
+        </p:spPr>
+        <p:txBody>
+          <a:bodyPr wrap="none">
+            <a:spAutoFit/>
+          </a:bodyPr>
+          <a:lstStyle/>
+          <a:p>
+            <a:pPr>
+              <a:defRPr sz="3200" b="1">
+                <a:solidFill>
+                  <a:srgbClr val="C81E1E"/>
+                </a:solidFill>
+                <a:latin typeface="Meiryo"/>
+              </a:defRPr>
+            </a:pPr>
+            <a:r>
+              <a:t>2-1. スクール人数メンテナンス</a:t>
+            </a:r>
+          </a:p>
+        </p:txBody>
+      </p:sp>
+      <p:sp>
+        <p:nvSpPr>
+          <p:cNvPr id="5" name="Rounded Rectangle 4"/>
+          <p:cNvSpPr/>
+          <p:nvPr/>
+        </p:nvSpPr>
+        <p:spPr>
+          <a:xfrm>
+            <a:off x="914400" y="1371600"/>
+            <a:ext cx="10332720" cy="2011680"/>
+          </a:xfrm>
+          <a:prstGeom prst="roundRect">
+            <a:avLst/>
+          </a:prstGeom>
+          <a:solidFill>
+            <a:srgbClr val="C81E1E"/>
+          </a:solidFill>
+          <a:ln>
+            <a:noFill/>
+          </a:ln>
+        </p:spPr>
+        <p:style>
+          <a:lnRef idx="1">
+            <a:schemeClr val="accent1"/>
+          </a:lnRef>
+          <a:fillRef idx="3">
+            <a:schemeClr val="accent1"/>
+          </a:fillRef>
+          <a:effectRef idx="2">
+            <a:schemeClr val="accent1"/>
+          </a:effectRef>
+          <a:fontRef idx="minor">
+            <a:schemeClr val="lt1"/>
+          </a:fontRef>
+        </p:style>
+        <p:txBody>
+          <a:bodyPr rtlCol="0" anchor="ctr"/>
+          <a:lstStyle/>
+          <a:p>
+            <a:pPr algn="ctr"/>
+          </a:p>
+        </p:txBody>
+      </p:sp>
+      <p:sp>
+        <p:nvSpPr>
+          <p:cNvPr id="6" name="TextBox 5"/>
+          <p:cNvSpPr txBox="1"/>
+          <p:nvPr/>
+        </p:nvSpPr>
+        <p:spPr>
+          <a:xfrm>
+            <a:off x="1188720" y="1828800"/>
+            <a:ext cx="9784080" cy="1371600"/>
           </a:xfrm>
           <a:prstGeom prst="rect">
             <a:avLst/>
@@ -3802,99 +3992,88 @@
           </a:bodyPr>
           <a:lstStyle/>
           <a:p>
+            <a:pPr algn="ctr">
+              <a:defRPr sz="2800" b="1">
+                <a:solidFill>
+                  <a:srgbClr val="FFFFFF"/>
+                </a:solidFill>
+                <a:latin typeface="Meiryo"/>
+              </a:defRPr>
+            </a:pPr>
+            <a:r>
+              <a:t>【必達期限】1月末までに「3月クラス」のメンテナンスを完了</a:t>
+            </a:r>
+          </a:p>
+        </p:txBody>
+      </p:sp>
+      <p:sp>
+        <p:nvSpPr>
+          <p:cNvPr id="7" name="TextBox 6"/>
+          <p:cNvSpPr txBox="1"/>
+          <p:nvPr/>
+        </p:nvSpPr>
+        <p:spPr>
+          <a:xfrm>
+            <a:off x="1371600" y="3657600"/>
+            <a:ext cx="9418320" cy="640080"/>
+          </a:xfrm>
+          <a:prstGeom prst="rect">
+            <a:avLst/>
+          </a:prstGeom>
+          <a:noFill/>
+        </p:spPr>
+        <p:txBody>
+          <a:bodyPr wrap="none">
+            <a:spAutoFit/>
+          </a:bodyPr>
+          <a:lstStyle/>
+          <a:p>
             <a:pPr>
-              <a:spcBef>
-                <a:spcPts val="0"/>
-              </a:spcBef>
-              <a:defRPr sz="2000" b="1">
-                <a:solidFill>
-                  <a:srgbClr val="E60012"/>
+              <a:defRPr sz="2200">
+                <a:solidFill>
+                  <a:srgbClr val="505050"/>
                 </a:solidFill>
                 <a:latin typeface="Meiryo"/>
               </a:defRPr>
             </a:pPr>
             <a:r>
-              <a:t>■ 対象範囲拡大</a:t>
-            </a:r>
-          </a:p>
+              <a:t>✓ 対象範囲拡大：テニス・トライネーションも含めて実施を徹底</a:t>
+            </a:r>
+          </a:p>
+        </p:txBody>
+      </p:sp>
+      <p:sp>
+        <p:nvSpPr>
+          <p:cNvPr id="8" name="TextBox 7"/>
+          <p:cNvSpPr txBox="1"/>
+          <p:nvPr/>
+        </p:nvSpPr>
+        <p:spPr>
+          <a:xfrm>
+            <a:off x="1371600" y="4389120"/>
+            <a:ext cx="9418320" cy="640080"/>
+          </a:xfrm>
+          <a:prstGeom prst="rect">
+            <a:avLst/>
+          </a:prstGeom>
+          <a:noFill/>
+        </p:spPr>
+        <p:txBody>
+          <a:bodyPr wrap="none">
+            <a:spAutoFit/>
+          </a:bodyPr>
+          <a:lstStyle/>
           <a:p>
             <a:pPr>
-              <a:spcBef>
-                <a:spcPts val="400"/>
-              </a:spcBef>
-              <a:defRPr sz="1800">
-                <a:solidFill>
-                  <a:srgbClr val="000000"/>
+              <a:defRPr sz="2200">
+                <a:solidFill>
+                  <a:srgbClr val="505050"/>
                 </a:solidFill>
                 <a:latin typeface="Meiryo"/>
               </a:defRPr>
             </a:pPr>
             <a:r>
-              <a:t>  テニス・トライネーションも含めて実施を徹底</a:t>
-            </a:r>
-          </a:p>
-          <a:p>
-            <a:pPr>
-              <a:spcBef>
-                <a:spcPts val="1600"/>
-              </a:spcBef>
-              <a:defRPr sz="2000" b="1">
-                <a:solidFill>
-                  <a:srgbClr val="E60012"/>
-                </a:solidFill>
-                <a:latin typeface="Meiryo"/>
-              </a:defRPr>
-            </a:pPr>
-            <a:r>
-              <a:t>■ 現状の課題</a:t>
-            </a:r>
-          </a:p>
-          <a:p>
-            <a:pPr>
-              <a:spcBef>
-                <a:spcPts val="400"/>
-              </a:spcBef>
-              <a:defRPr sz="1800">
-                <a:solidFill>
-                  <a:srgbClr val="000000"/>
-                </a:solidFill>
-                <a:latin typeface="Meiryo"/>
-              </a:defRPr>
-            </a:pPr>
-            <a:r>
-              <a:t>  1月10日時点で未完了のクラブあり（該当クラブへの注意喚起）</a:t>
-            </a:r>
-          </a:p>
-          <a:p>
-            <a:pPr>
-              <a:spcBef>
-                <a:spcPts val="1600"/>
-              </a:spcBef>
-              <a:defRPr sz="2000" b="1">
-                <a:solidFill>
-                  <a:srgbClr val="E60012"/>
-                </a:solidFill>
-                <a:latin typeface="Meiryo"/>
-              </a:defRPr>
-            </a:pPr>
-            <a:r>
-              <a:t>■ 必達期限</a:t>
-            </a:r>
-          </a:p>
-          <a:p>
-            <a:pPr>
-              <a:spcBef>
-                <a:spcPts val="400"/>
-              </a:spcBef>
-              <a:defRPr sz="1800">
-                <a:solidFill>
-                  <a:srgbClr val="000000"/>
-                </a:solidFill>
-                <a:latin typeface="Meiryo"/>
-              </a:defRPr>
-            </a:pPr>
-            <a:r>
-              <a:t>  【重要】1月末までに「3月クラス」のメンテナンスを完了させること</a:t>
+              <a:t>✓ 現状の課題：1月10日時点で未完了のクラブあり</a:t>
             </a:r>
           </a:p>
         </p:txBody>
@@ -3925,8 +4104,8 @@
         </p:nvSpPr>
         <p:spPr>
           <a:xfrm>
-            <a:off x="9601200" y="274320"/>
-            <a:ext cx="2286000" cy="457200"/>
+            <a:off x="9418320" y="182880"/>
+            <a:ext cx="2560320" cy="457200"/>
           </a:xfrm>
           <a:prstGeom prst="rect">
             <a:avLst/>
@@ -3941,78 +4120,33 @@
           <a:p>
             <a:pPr algn="r"/>
             <a:r>
-              <a:rPr sz="1800" b="1">
-                <a:solidFill>
-                  <a:srgbClr val="E60012"/>
+              <a:rPr sz="2000" b="1">
+                <a:solidFill>
+                  <a:srgbClr val="C81E1E"/>
                 </a:solidFill>
                 <a:latin typeface="Arial"/>
               </a:rPr>
-              <a:t>Re</a:t>
-            </a:r>
-            <a:r>
-              <a:rPr sz="1800" b="1">
-                <a:solidFill>
-                  <a:srgbClr val="E60012"/>
-                </a:solidFill>
-                <a:latin typeface="Arial"/>
-              </a:rPr>
-              <a:t> RENAISSANCE</a:t>
-            </a:r>
-          </a:p>
-        </p:txBody>
-      </p:sp>
-      <p:sp>
-        <p:nvSpPr>
-          <p:cNvPr id="3" name="TextBox 2"/>
-          <p:cNvSpPr txBox="1"/>
-          <p:nvPr/>
-        </p:nvSpPr>
-        <p:spPr>
-          <a:xfrm>
-            <a:off x="457200" y="457200"/>
-            <a:ext cx="9144000" cy="640080"/>
-          </a:xfrm>
-          <a:prstGeom prst="rect">
-            <a:avLst/>
-          </a:prstGeom>
-          <a:noFill/>
-        </p:spPr>
-        <p:txBody>
-          <a:bodyPr wrap="none">
-            <a:spAutoFit/>
-          </a:bodyPr>
-          <a:lstStyle/>
-          <a:p>
-            <a:pPr>
-              <a:defRPr sz="2800" b="1">
-                <a:solidFill>
-                  <a:srgbClr val="000000"/>
-                </a:solidFill>
-                <a:latin typeface="Meiryo"/>
-              </a:defRPr>
-            </a:pPr>
-            <a:r>
-              <a:t>2-2. テニスの運用ルール</a:t>
-            </a:r>
-          </a:p>
-        </p:txBody>
-      </p:sp>
-      <p:sp>
-        <p:nvSpPr>
-          <p:cNvPr id="4" name="Rectangle 3"/>
+              <a:t>RENAISSANCE</a:t>
+            </a:r>
+          </a:p>
+        </p:txBody>
+      </p:sp>
+      <p:sp>
+        <p:nvSpPr>
+          <p:cNvPr id="3" name="Rectangle 2"/>
           <p:cNvSpPr/>
           <p:nvPr/>
         </p:nvSpPr>
         <p:spPr>
           <a:xfrm>
-            <a:off x="457200" y="1051560"/>
-            <a:ext cx="11247120" cy="38100"/>
+            <a:off x="0" y="685800"/>
+            <a:ext cx="12191695" cy="50800"/>
           </a:xfrm>
           <a:prstGeom prst="rect">
             <a:avLst/>
           </a:prstGeom>
           <a:solidFill>
-            <a:srgbClr val="E60012"/>
+            <a:srgbClr val="C81E1E"/>
           </a:solidFill>
           <a:ln>
             <a:noFill/>
@@ -4042,47 +4176,145 @@
       </p:sp>
       <p:sp>
         <p:nvSpPr>
-          <p:cNvPr id="5" name="TextBox 4"/>
-          <p:cNvSpPr txBox="1"/>
-          <p:nvPr/>
-        </p:nvSpPr>
-        <p:spPr>
-          <a:xfrm>
-            <a:off x="640080" y="1371600"/>
-            <a:ext cx="10972800" cy="5029200"/>
-          </a:xfrm>
-          <a:prstGeom prst="rect">
-            <a:avLst/>
-          </a:prstGeom>
-          <a:noFill/>
-        </p:spPr>
-        <p:txBody>
-          <a:bodyPr wrap="square">
+          <p:cNvPr id="4" name="TextBox 3"/>
+          <p:cNvSpPr txBox="1"/>
+          <p:nvPr/>
+        </p:nvSpPr>
+        <p:spPr>
+          <a:xfrm>
+            <a:off x="457200" y="137160"/>
+            <a:ext cx="8686800" cy="548640"/>
+          </a:xfrm>
+          <a:prstGeom prst="rect">
+            <a:avLst/>
+          </a:prstGeom>
+          <a:noFill/>
+        </p:spPr>
+        <p:txBody>
+          <a:bodyPr wrap="none">
             <a:spAutoFit/>
           </a:bodyPr>
           <a:lstStyle/>
           <a:p>
             <a:pPr>
-              <a:spcBef>
-                <a:spcPts val="0"/>
-              </a:spcBef>
-              <a:defRPr sz="2000" b="1">
-                <a:solidFill>
-                  <a:srgbClr val="E60012"/>
+              <a:defRPr sz="3200" b="1">
+                <a:solidFill>
+                  <a:srgbClr val="C81E1E"/>
                 </a:solidFill>
                 <a:latin typeface="Meiryo"/>
               </a:defRPr>
             </a:pPr>
             <a:r>
-              <a:t>■ ルール</a:t>
-            </a:r>
-          </a:p>
+              <a:t>2-2. テニスの運用ルール</a:t>
+            </a:r>
+          </a:p>
+        </p:txBody>
+      </p:sp>
+      <p:sp>
+        <p:nvSpPr>
+          <p:cNvPr id="5" name="Rounded Rectangle 4"/>
+          <p:cNvSpPr/>
+          <p:nvPr/>
+        </p:nvSpPr>
+        <p:spPr>
+          <a:xfrm>
+            <a:off x="457200" y="1005840"/>
+            <a:ext cx="11247120" cy="1188720"/>
+          </a:xfrm>
+          <a:prstGeom prst="roundRect">
+            <a:avLst/>
+          </a:prstGeom>
+          <a:solidFill>
+            <a:srgbClr val="FFE6E6"/>
+          </a:solidFill>
+          <a:ln>
+            <a:solidFill>
+              <a:srgbClr val="C81E1E"/>
+            </a:solidFill>
+          </a:ln>
+        </p:spPr>
+        <p:style>
+          <a:lnRef idx="1">
+            <a:schemeClr val="accent1"/>
+          </a:lnRef>
+          <a:fillRef idx="3">
+            <a:schemeClr val="accent1"/>
+          </a:fillRef>
+          <a:effectRef idx="2">
+            <a:schemeClr val="accent1"/>
+          </a:effectRef>
+          <a:fontRef idx="minor">
+            <a:schemeClr val="lt1"/>
+          </a:fontRef>
+        </p:style>
+        <p:txBody>
+          <a:bodyPr rtlCol="0" anchor="ctr"/>
+          <a:lstStyle/>
+          <a:p>
+            <a:pPr algn="ctr"/>
+          </a:p>
+        </p:txBody>
+      </p:sp>
+      <p:sp>
+        <p:nvSpPr>
+          <p:cNvPr id="6" name="TextBox 5"/>
+          <p:cNvSpPr txBox="1"/>
+          <p:nvPr/>
+        </p:nvSpPr>
+        <p:spPr>
+          <a:xfrm>
+            <a:off x="731520" y="1143000"/>
+            <a:ext cx="10515600" cy="457200"/>
+          </a:xfrm>
+          <a:prstGeom prst="rect">
+            <a:avLst/>
+          </a:prstGeom>
+          <a:noFill/>
+        </p:spPr>
+        <p:txBody>
+          <a:bodyPr wrap="none">
+            <a:spAutoFit/>
+          </a:bodyPr>
+          <a:lstStyle/>
           <a:p>
             <a:pPr>
-              <a:spcBef>
-                <a:spcPts val="400"/>
-              </a:spcBef>
-              <a:defRPr sz="1800">
+              <a:defRPr sz="2200" b="1">
+                <a:solidFill>
+                  <a:srgbClr val="C81E1E"/>
+                </a:solidFill>
+                <a:latin typeface="Meiryo"/>
+              </a:defRPr>
+            </a:pPr>
+            <a:r>
+              <a:t>ルール</a:t>
+            </a:r>
+          </a:p>
+        </p:txBody>
+      </p:sp>
+      <p:sp>
+        <p:nvSpPr>
+          <p:cNvPr id="7" name="TextBox 6"/>
+          <p:cNvSpPr txBox="1"/>
+          <p:nvPr/>
+        </p:nvSpPr>
+        <p:spPr>
+          <a:xfrm>
+            <a:off x="731520" y="1554480"/>
+            <a:ext cx="10515600" cy="548640"/>
+          </a:xfrm>
+          <a:prstGeom prst="rect">
+            <a:avLst/>
+          </a:prstGeom>
+          <a:noFill/>
+        </p:spPr>
+        <p:txBody>
+          <a:bodyPr wrap="none">
+            <a:spAutoFit/>
+          </a:bodyPr>
+          <a:lstStyle/>
+          <a:p>
+            <a:pPr>
+              <a:defRPr sz="2000">
                 <a:solidFill>
                   <a:srgbClr val="000000"/>
                 </a:solidFill>
@@ -4090,31 +4322,116 @@
               </a:defRPr>
             </a:pPr>
             <a:r>
-              <a:t>  プランニングシートの持参必須</a:t>
-            </a:r>
-          </a:p>
+              <a:t>プランニングシートの持参必須</a:t>
+            </a:r>
+          </a:p>
+        </p:txBody>
+      </p:sp>
+      <p:sp>
+        <p:nvSpPr>
+          <p:cNvPr id="8" name="Rounded Rectangle 7"/>
+          <p:cNvSpPr/>
+          <p:nvPr/>
+        </p:nvSpPr>
+        <p:spPr>
+          <a:xfrm>
+            <a:off x="457200" y="2377440"/>
+            <a:ext cx="11247120" cy="1188720"/>
+          </a:xfrm>
+          <a:prstGeom prst="roundRect">
+            <a:avLst/>
+          </a:prstGeom>
+          <a:solidFill>
+            <a:srgbClr val="F0F0F0"/>
+          </a:solidFill>
+          <a:ln>
+            <a:solidFill>
+              <a:srgbClr val="C8C8C8"/>
+            </a:solidFill>
+          </a:ln>
+        </p:spPr>
+        <p:style>
+          <a:lnRef idx="1">
+            <a:schemeClr val="accent1"/>
+          </a:lnRef>
+          <a:fillRef idx="3">
+            <a:schemeClr val="accent1"/>
+          </a:fillRef>
+          <a:effectRef idx="2">
+            <a:schemeClr val="accent1"/>
+          </a:effectRef>
+          <a:fontRef idx="minor">
+            <a:schemeClr val="lt1"/>
+          </a:fontRef>
+        </p:style>
+        <p:txBody>
+          <a:bodyPr rtlCol="0" anchor="ctr"/>
+          <a:lstStyle/>
+          <a:p>
+            <a:pPr algn="ctr"/>
+          </a:p>
+        </p:txBody>
+      </p:sp>
+      <p:sp>
+        <p:nvSpPr>
+          <p:cNvPr id="9" name="TextBox 8"/>
+          <p:cNvSpPr txBox="1"/>
+          <p:nvPr/>
+        </p:nvSpPr>
+        <p:spPr>
+          <a:xfrm>
+            <a:off x="731520" y="2514600"/>
+            <a:ext cx="10515600" cy="457200"/>
+          </a:xfrm>
+          <a:prstGeom prst="rect">
+            <a:avLst/>
+          </a:prstGeom>
+          <a:noFill/>
+        </p:spPr>
+        <p:txBody>
+          <a:bodyPr wrap="none">
+            <a:spAutoFit/>
+          </a:bodyPr>
+          <a:lstStyle/>
           <a:p>
             <a:pPr>
-              <a:spcBef>
-                <a:spcPts val="1600"/>
-              </a:spcBef>
-              <a:defRPr sz="2000" b="1">
-                <a:solidFill>
-                  <a:srgbClr val="E60012"/>
+              <a:defRPr sz="2200" b="1">
+                <a:solidFill>
+                  <a:srgbClr val="C81E1E"/>
                 </a:solidFill>
                 <a:latin typeface="Meiryo"/>
               </a:defRPr>
             </a:pPr>
             <a:r>
-              <a:t>■ 詳細</a:t>
-            </a:r>
-          </a:p>
+              <a:t>詳細</a:t>
+            </a:r>
+          </a:p>
+        </p:txBody>
+      </p:sp>
+      <p:sp>
+        <p:nvSpPr>
+          <p:cNvPr id="10" name="TextBox 9"/>
+          <p:cNvSpPr txBox="1"/>
+          <p:nvPr/>
+        </p:nvSpPr>
+        <p:spPr>
+          <a:xfrm>
+            <a:off x="731520" y="2926080"/>
+            <a:ext cx="10515600" cy="548640"/>
+          </a:xfrm>
+          <a:prstGeom prst="rect">
+            <a:avLst/>
+          </a:prstGeom>
+          <a:noFill/>
+        </p:spPr>
+        <p:txBody>
+          <a:bodyPr wrap="none">
+            <a:spAutoFit/>
+          </a:bodyPr>
+          <a:lstStyle/>
           <a:p>
             <a:pPr>
-              <a:spcBef>
-                <a:spcPts val="400"/>
-              </a:spcBef>
-              <a:defRPr sz="1800">
+              <a:defRPr sz="2000">
                 <a:solidFill>
                   <a:srgbClr val="000000"/>
                 </a:solidFill>
@@ -4122,7 +4439,7 @@
               </a:defRPr>
             </a:pPr>
             <a:r>
-              <a:t>  進級の有無に関わらず、必ず持参が必要となります</a:t>
+              <a:t>進級の有無に関わらず、必ず持参が必要となります</a:t>
             </a:r>
           </a:p>
         </p:txBody>
@@ -4153,8 +4470,8 @@
         </p:nvSpPr>
         <p:spPr>
           <a:xfrm>
-            <a:off x="9601200" y="274320"/>
-            <a:ext cx="2286000" cy="457200"/>
+            <a:off x="9418320" y="182880"/>
+            <a:ext cx="2560320" cy="457200"/>
           </a:xfrm>
           <a:prstGeom prst="rect">
             <a:avLst/>
@@ -4169,42 +4486,33 @@
           <a:p>
             <a:pPr algn="r"/>
             <a:r>
-              <a:rPr sz="1800" b="1">
-                <a:solidFill>
-                  <a:srgbClr val="E60012"/>
+              <a:rPr sz="2000" b="1">
+                <a:solidFill>
+                  <a:srgbClr val="C81E1E"/>
                 </a:solidFill>
                 <a:latin typeface="Arial"/>
               </a:rPr>
-              <a:t>Re</a:t>
-            </a:r>
-            <a:r>
-              <a:rPr sz="1800" b="1">
-                <a:solidFill>
-                  <a:srgbClr val="E60012"/>
-                </a:solidFill>
-                <a:latin typeface="Arial"/>
-              </a:rPr>
-              <a:t> RENAISSANCE</a:t>
-            </a:r>
-          </a:p>
-        </p:txBody>
-      </p:sp>
-      <p:sp>
-        <p:nvSpPr>
-          <p:cNvPr id="3" name="Rectangle 2"/>
+              <a:t>RENAISSANCE</a:t>
+            </a:r>
+          </a:p>
+        </p:txBody>
+      </p:sp>
+      <p:sp>
+        <p:nvSpPr>
+          <p:cNvPr id="3" name="Oval 2"/>
           <p:cNvSpPr/>
           <p:nvPr/>
         </p:nvSpPr>
         <p:spPr>
           <a:xfrm>
-            <a:off x="1371600" y="2743200"/>
-            <a:ext cx="9418320" cy="1371600"/>
-          </a:xfrm>
-          <a:prstGeom prst="rect">
+            <a:off x="1371600" y="2011680"/>
+            <a:ext cx="2286000" cy="2286000"/>
+          </a:xfrm>
+          <a:prstGeom prst="ellipse">
             <a:avLst/>
           </a:prstGeom>
           <a:solidFill>
-            <a:srgbClr val="D9D9D9"/>
+            <a:srgbClr val="C81E1E"/>
           </a:solidFill>
           <a:ln>
             <a:noFill/>
@@ -4240,8 +4548,8 @@
         </p:nvSpPr>
         <p:spPr>
           <a:xfrm>
-            <a:off x="1371600" y="2880360"/>
-            <a:ext cx="9418320" cy="1097280"/>
+            <a:off x="1371600" y="2286000"/>
+            <a:ext cx="2286000" cy="1828800"/>
           </a:xfrm>
           <a:prstGeom prst="rect">
             <a:avLst/>
@@ -4255,7 +4563,43 @@
           <a:lstStyle/>
           <a:p>
             <a:pPr algn="ctr">
-              <a:defRPr sz="3200" b="1">
+              <a:defRPr sz="7200" b="1">
+                <a:solidFill>
+                  <a:srgbClr val="FFFFFF"/>
+                </a:solidFill>
+                <a:latin typeface="Arial"/>
+              </a:defRPr>
+            </a:pPr>
+            <a:r>
+              <a:t>3</a:t>
+            </a:r>
+          </a:p>
+        </p:txBody>
+      </p:sp>
+      <p:sp>
+        <p:nvSpPr>
+          <p:cNvPr id="5" name="TextBox 4"/>
+          <p:cNvSpPr txBox="1"/>
+          <p:nvPr/>
+        </p:nvSpPr>
+        <p:spPr>
+          <a:xfrm>
+            <a:off x="4114800" y="2560320"/>
+            <a:ext cx="7315200" cy="1645920"/>
+          </a:xfrm>
+          <a:prstGeom prst="rect">
+            <a:avLst/>
+          </a:prstGeom>
+          <a:noFill/>
+        </p:spPr>
+        <p:txBody>
+          <a:bodyPr wrap="square">
+            <a:spAutoFit/>
+          </a:bodyPr>
+          <a:lstStyle/>
+          <a:p>
+            <a:pPr>
+              <a:defRPr sz="4000" b="1">
                 <a:solidFill>
                   <a:srgbClr val="000000"/>
                 </a:solidFill>
@@ -4263,7 +4607,7 @@
               </a:defRPr>
             </a:pPr>
             <a:r>
-              <a:t>【3】現場運用の確認事項</a:t>
+              <a:t>現場運用の確認事項</a:t>
             </a:r>
           </a:p>
         </p:txBody>
@@ -4294,8 +4638,8 @@
         </p:nvSpPr>
         <p:spPr>
           <a:xfrm>
-            <a:off x="9601200" y="274320"/>
-            <a:ext cx="2286000" cy="457200"/>
+            <a:off x="9418320" y="182880"/>
+            <a:ext cx="2560320" cy="457200"/>
           </a:xfrm>
           <a:prstGeom prst="rect">
             <a:avLst/>
@@ -4310,78 +4654,33 @@
           <a:p>
             <a:pPr algn="r"/>
             <a:r>
-              <a:rPr sz="1800" b="1">
-                <a:solidFill>
-                  <a:srgbClr val="E60012"/>
+              <a:rPr sz="2000" b="1">
+                <a:solidFill>
+                  <a:srgbClr val="C81E1E"/>
                 </a:solidFill>
                 <a:latin typeface="Arial"/>
               </a:rPr>
-              <a:t>Re</a:t>
-            </a:r>
-            <a:r>
-              <a:rPr sz="1800" b="1">
-                <a:solidFill>
-                  <a:srgbClr val="E60012"/>
-                </a:solidFill>
-                <a:latin typeface="Arial"/>
-              </a:rPr>
-              <a:t> RENAISSANCE</a:t>
-            </a:r>
-          </a:p>
-        </p:txBody>
-      </p:sp>
-      <p:sp>
-        <p:nvSpPr>
-          <p:cNvPr id="3" name="TextBox 2"/>
-          <p:cNvSpPr txBox="1"/>
-          <p:nvPr/>
-        </p:nvSpPr>
-        <p:spPr>
-          <a:xfrm>
-            <a:off x="457200" y="457200"/>
-            <a:ext cx="9144000" cy="640080"/>
-          </a:xfrm>
-          <a:prstGeom prst="rect">
-            <a:avLst/>
-          </a:prstGeom>
-          <a:noFill/>
-        </p:spPr>
-        <p:txBody>
-          <a:bodyPr wrap="none">
-            <a:spAutoFit/>
-          </a:bodyPr>
-          <a:lstStyle/>
-          <a:p>
-            <a:pPr>
-              <a:defRPr sz="2800" b="1">
-                <a:solidFill>
-                  <a:srgbClr val="000000"/>
-                </a:solidFill>
-                <a:latin typeface="Meiryo"/>
-              </a:defRPr>
-            </a:pPr>
-            <a:r>
-              <a:t>【3】現場運用の確認事項</a:t>
-            </a:r>
-          </a:p>
-        </p:txBody>
-      </p:sp>
-      <p:sp>
-        <p:nvSpPr>
-          <p:cNvPr id="4" name="Rectangle 3"/>
+              <a:t>RENAISSANCE</a:t>
+            </a:r>
+          </a:p>
+        </p:txBody>
+      </p:sp>
+      <p:sp>
+        <p:nvSpPr>
+          <p:cNvPr id="3" name="Rectangle 2"/>
           <p:cNvSpPr/>
           <p:nvPr/>
         </p:nvSpPr>
         <p:spPr>
           <a:xfrm>
-            <a:off x="457200" y="1051560"/>
-            <a:ext cx="11247120" cy="38100"/>
+            <a:off x="0" y="685800"/>
+            <a:ext cx="12191695" cy="50800"/>
           </a:xfrm>
           <a:prstGeom prst="rect">
             <a:avLst/>
           </a:prstGeom>
           <a:solidFill>
-            <a:srgbClr val="E60012"/>
+            <a:srgbClr val="C81E1E"/>
           </a:solidFill>
           <a:ln>
             <a:noFill/>
@@ -4411,47 +4710,145 @@
       </p:sp>
       <p:sp>
         <p:nvSpPr>
-          <p:cNvPr id="5" name="TextBox 4"/>
-          <p:cNvSpPr txBox="1"/>
-          <p:nvPr/>
-        </p:nvSpPr>
-        <p:spPr>
-          <a:xfrm>
-            <a:off x="640080" y="1371600"/>
-            <a:ext cx="10972800" cy="5029200"/>
-          </a:xfrm>
-          <a:prstGeom prst="rect">
-            <a:avLst/>
-          </a:prstGeom>
-          <a:noFill/>
-        </p:spPr>
-        <p:txBody>
-          <a:bodyPr wrap="square">
+          <p:cNvPr id="4" name="TextBox 3"/>
+          <p:cNvSpPr txBox="1"/>
+          <p:nvPr/>
+        </p:nvSpPr>
+        <p:spPr>
+          <a:xfrm>
+            <a:off x="457200" y="137160"/>
+            <a:ext cx="8686800" cy="548640"/>
+          </a:xfrm>
+          <a:prstGeom prst="rect">
+            <a:avLst/>
+          </a:prstGeom>
+          <a:noFill/>
+        </p:spPr>
+        <p:txBody>
+          <a:bodyPr wrap="none">
             <a:spAutoFit/>
           </a:bodyPr>
           <a:lstStyle/>
           <a:p>
             <a:pPr>
-              <a:spcBef>
-                <a:spcPts val="0"/>
-              </a:spcBef>
-              <a:defRPr sz="2000" b="1">
-                <a:solidFill>
-                  <a:srgbClr val="E60012"/>
+              <a:defRPr sz="3200" b="1">
+                <a:solidFill>
+                  <a:srgbClr val="C81E1E"/>
                 </a:solidFill>
                 <a:latin typeface="Meiryo"/>
               </a:defRPr>
             </a:pPr>
             <a:r>
-              <a:t>■ テーマ</a:t>
-            </a:r>
-          </a:p>
+              <a:t>【3】現場運用の確認事項</a:t>
+            </a:r>
+          </a:p>
+        </p:txBody>
+      </p:sp>
+      <p:sp>
+        <p:nvSpPr>
+          <p:cNvPr id="5" name="Rounded Rectangle 4"/>
+          <p:cNvSpPr/>
+          <p:nvPr/>
+        </p:nvSpPr>
+        <p:spPr>
+          <a:xfrm>
+            <a:off x="457200" y="1005840"/>
+            <a:ext cx="11247120" cy="1188720"/>
+          </a:xfrm>
+          <a:prstGeom prst="roundRect">
+            <a:avLst/>
+          </a:prstGeom>
+          <a:solidFill>
+            <a:srgbClr val="F0F0F0"/>
+          </a:solidFill>
+          <a:ln>
+            <a:solidFill>
+              <a:srgbClr val="C8C8C8"/>
+            </a:solidFill>
+          </a:ln>
+        </p:spPr>
+        <p:style>
+          <a:lnRef idx="1">
+            <a:schemeClr val="accent1"/>
+          </a:lnRef>
+          <a:fillRef idx="3">
+            <a:schemeClr val="accent1"/>
+          </a:fillRef>
+          <a:effectRef idx="2">
+            <a:schemeClr val="accent1"/>
+          </a:effectRef>
+          <a:fontRef idx="minor">
+            <a:schemeClr val="lt1"/>
+          </a:fontRef>
+        </p:style>
+        <p:txBody>
+          <a:bodyPr rtlCol="0" anchor="ctr"/>
+          <a:lstStyle/>
+          <a:p>
+            <a:pPr algn="ctr"/>
+          </a:p>
+        </p:txBody>
+      </p:sp>
+      <p:sp>
+        <p:nvSpPr>
+          <p:cNvPr id="6" name="TextBox 5"/>
+          <p:cNvSpPr txBox="1"/>
+          <p:nvPr/>
+        </p:nvSpPr>
+        <p:spPr>
+          <a:xfrm>
+            <a:off x="731520" y="1143000"/>
+            <a:ext cx="10515600" cy="457200"/>
+          </a:xfrm>
+          <a:prstGeom prst="rect">
+            <a:avLst/>
+          </a:prstGeom>
+          <a:noFill/>
+        </p:spPr>
+        <p:txBody>
+          <a:bodyPr wrap="none">
+            <a:spAutoFit/>
+          </a:bodyPr>
+          <a:lstStyle/>
           <a:p>
             <a:pPr>
-              <a:spcBef>
-                <a:spcPts val="400"/>
-              </a:spcBef>
-              <a:defRPr sz="1800">
+              <a:defRPr sz="2200" b="1">
+                <a:solidFill>
+                  <a:srgbClr val="C81E1E"/>
+                </a:solidFill>
+                <a:latin typeface="Meiryo"/>
+              </a:defRPr>
+            </a:pPr>
+            <a:r>
+              <a:t>テーマ</a:t>
+            </a:r>
+          </a:p>
+        </p:txBody>
+      </p:sp>
+      <p:sp>
+        <p:nvSpPr>
+          <p:cNvPr id="7" name="TextBox 6"/>
+          <p:cNvSpPr txBox="1"/>
+          <p:nvPr/>
+        </p:nvSpPr>
+        <p:spPr>
+          <a:xfrm>
+            <a:off x="731520" y="1554480"/>
+            <a:ext cx="10515600" cy="548640"/>
+          </a:xfrm>
+          <a:prstGeom prst="rect">
+            <a:avLst/>
+          </a:prstGeom>
+          <a:noFill/>
+        </p:spPr>
+        <p:txBody>
+          <a:bodyPr wrap="none">
+            <a:spAutoFit/>
+          </a:bodyPr>
+          <a:lstStyle/>
+          <a:p>
+            <a:pPr>
+              <a:defRPr sz="2000">
                 <a:solidFill>
                   <a:srgbClr val="000000"/>
                 </a:solidFill>
@@ -4459,7 +4856,7 @@
               </a:defRPr>
             </a:pPr>
             <a:r>
-              <a:t>  運用開始後におろそかになりがちな情報のキャッチアップとデータ収集の是正</a:t>
+              <a:t>運用開始後におろそかになりがちな情報のキャッチアップとデータ収集の是正</a:t>
             </a:r>
           </a:p>
         </p:txBody>
@@ -4490,8 +4887,8 @@
         </p:nvSpPr>
         <p:spPr>
           <a:xfrm>
-            <a:off x="9601200" y="274320"/>
-            <a:ext cx="2286000" cy="457200"/>
+            <a:off x="9418320" y="182880"/>
+            <a:ext cx="2560320" cy="457200"/>
           </a:xfrm>
           <a:prstGeom prst="rect">
             <a:avLst/>
@@ -4506,78 +4903,33 @@
           <a:p>
             <a:pPr algn="r"/>
             <a:r>
-              <a:rPr sz="1800" b="1">
-                <a:solidFill>
-                  <a:srgbClr val="E60012"/>
+              <a:rPr sz="2000" b="1">
+                <a:solidFill>
+                  <a:srgbClr val="C81E1E"/>
                 </a:solidFill>
                 <a:latin typeface="Arial"/>
               </a:rPr>
-              <a:t>Re</a:t>
-            </a:r>
-            <a:r>
-              <a:rPr sz="1800" b="1">
-                <a:solidFill>
-                  <a:srgbClr val="E60012"/>
-                </a:solidFill>
-                <a:latin typeface="Arial"/>
-              </a:rPr>
-              <a:t> RENAISSANCE</a:t>
-            </a:r>
-          </a:p>
-        </p:txBody>
-      </p:sp>
-      <p:sp>
-        <p:nvSpPr>
-          <p:cNvPr id="3" name="TextBox 2"/>
-          <p:cNvSpPr txBox="1"/>
-          <p:nvPr/>
-        </p:nvSpPr>
-        <p:spPr>
-          <a:xfrm>
-            <a:off x="457200" y="457200"/>
-            <a:ext cx="9144000" cy="640080"/>
-          </a:xfrm>
-          <a:prstGeom prst="rect">
-            <a:avLst/>
-          </a:prstGeom>
-          <a:noFill/>
-        </p:spPr>
-        <p:txBody>
-          <a:bodyPr wrap="none">
-            <a:spAutoFit/>
-          </a:bodyPr>
-          <a:lstStyle/>
-          <a:p>
-            <a:pPr>
-              <a:defRPr sz="2800" b="1">
-                <a:solidFill>
-                  <a:srgbClr val="000000"/>
-                </a:solidFill>
-                <a:latin typeface="Meiryo"/>
-              </a:defRPr>
-            </a:pPr>
-            <a:r>
-              <a:t>3-1. 情報連携と機器設定</a:t>
-            </a:r>
-          </a:p>
-        </p:txBody>
-      </p:sp>
-      <p:sp>
-        <p:nvSpPr>
-          <p:cNvPr id="4" name="Rectangle 3"/>
+              <a:t>RENAISSANCE</a:t>
+            </a:r>
+          </a:p>
+        </p:txBody>
+      </p:sp>
+      <p:sp>
+        <p:nvSpPr>
+          <p:cNvPr id="3" name="Rectangle 2"/>
           <p:cNvSpPr/>
           <p:nvPr/>
         </p:nvSpPr>
         <p:spPr>
           <a:xfrm>
-            <a:off x="457200" y="1051560"/>
-            <a:ext cx="11247120" cy="38100"/>
+            <a:off x="0" y="685800"/>
+            <a:ext cx="12191695" cy="50800"/>
           </a:xfrm>
           <a:prstGeom prst="rect">
             <a:avLst/>
           </a:prstGeom>
           <a:solidFill>
-            <a:srgbClr val="E60012"/>
+            <a:srgbClr val="C81E1E"/>
           </a:solidFill>
           <a:ln>
             <a:noFill/>
@@ -4607,47 +4959,145 @@
       </p:sp>
       <p:sp>
         <p:nvSpPr>
-          <p:cNvPr id="5" name="TextBox 4"/>
-          <p:cNvSpPr txBox="1"/>
-          <p:nvPr/>
-        </p:nvSpPr>
-        <p:spPr>
-          <a:xfrm>
-            <a:off x="640080" y="1371600"/>
-            <a:ext cx="10972800" cy="5029200"/>
-          </a:xfrm>
-          <a:prstGeom prst="rect">
-            <a:avLst/>
-          </a:prstGeom>
-          <a:noFill/>
-        </p:spPr>
-        <p:txBody>
-          <a:bodyPr wrap="square">
+          <p:cNvPr id="4" name="TextBox 3"/>
+          <p:cNvSpPr txBox="1"/>
+          <p:nvPr/>
+        </p:nvSpPr>
+        <p:spPr>
+          <a:xfrm>
+            <a:off x="457200" y="137160"/>
+            <a:ext cx="8686800" cy="548640"/>
+          </a:xfrm>
+          <a:prstGeom prst="rect">
+            <a:avLst/>
+          </a:prstGeom>
+          <a:noFill/>
+        </p:spPr>
+        <p:txBody>
+          <a:bodyPr wrap="none">
             <a:spAutoFit/>
           </a:bodyPr>
           <a:lstStyle/>
           <a:p>
             <a:pPr>
-              <a:spcBef>
-                <a:spcPts val="0"/>
-              </a:spcBef>
-              <a:defRPr sz="2000" b="1">
-                <a:solidFill>
-                  <a:srgbClr val="E60012"/>
+              <a:defRPr sz="3200" b="1">
+                <a:solidFill>
+                  <a:srgbClr val="C81E1E"/>
                 </a:solidFill>
                 <a:latin typeface="Meiryo"/>
               </a:defRPr>
             </a:pPr>
             <a:r>
-              <a:t>■ 共有メモの確認</a:t>
-            </a:r>
-          </a:p>
+              <a:t>3-1. 情報連携と機器設定</a:t>
+            </a:r>
+          </a:p>
+        </p:txBody>
+      </p:sp>
+      <p:sp>
+        <p:nvSpPr>
+          <p:cNvPr id="5" name="Rounded Rectangle 4"/>
+          <p:cNvSpPr/>
+          <p:nvPr/>
+        </p:nvSpPr>
+        <p:spPr>
+          <a:xfrm>
+            <a:off x="457200" y="1005840"/>
+            <a:ext cx="5486400" cy="5303520"/>
+          </a:xfrm>
+          <a:prstGeom prst="roundRect">
+            <a:avLst/>
+          </a:prstGeom>
+          <a:solidFill>
+            <a:srgbClr val="F0F0F0"/>
+          </a:solidFill>
+          <a:ln>
+            <a:solidFill>
+              <a:srgbClr val="C8C8C8"/>
+            </a:solidFill>
+          </a:ln>
+        </p:spPr>
+        <p:style>
+          <a:lnRef idx="1">
+            <a:schemeClr val="accent1"/>
+          </a:lnRef>
+          <a:fillRef idx="3">
+            <a:schemeClr val="accent1"/>
+          </a:fillRef>
+          <a:effectRef idx="2">
+            <a:schemeClr val="accent1"/>
+          </a:effectRef>
+          <a:fontRef idx="minor">
+            <a:schemeClr val="lt1"/>
+          </a:fontRef>
+        </p:style>
+        <p:txBody>
+          <a:bodyPr rtlCol="0" anchor="ctr"/>
+          <a:lstStyle/>
+          <a:p>
+            <a:pPr algn="ctr"/>
+          </a:p>
+        </p:txBody>
+      </p:sp>
+      <p:sp>
+        <p:nvSpPr>
+          <p:cNvPr id="6" name="TextBox 5"/>
+          <p:cNvSpPr txBox="1"/>
+          <p:nvPr/>
+        </p:nvSpPr>
+        <p:spPr>
+          <a:xfrm>
+            <a:off x="731520" y="1188720"/>
+            <a:ext cx="4937760" cy="457200"/>
+          </a:xfrm>
+          <a:prstGeom prst="rect">
+            <a:avLst/>
+          </a:prstGeom>
+          <a:noFill/>
+        </p:spPr>
+        <p:txBody>
+          <a:bodyPr wrap="none">
+            <a:spAutoFit/>
+          </a:bodyPr>
+          <a:lstStyle/>
           <a:p>
             <a:pPr>
-              <a:spcBef>
-                <a:spcPts val="400"/>
-              </a:spcBef>
-              <a:defRPr sz="1800">
+              <a:defRPr sz="2400" b="1">
+                <a:solidFill>
+                  <a:srgbClr val="C81E1E"/>
+                </a:solidFill>
+                <a:latin typeface="Meiryo"/>
+              </a:defRPr>
+            </a:pPr>
+            <a:r>
+              <a:t>共有メモの確認</a:t>
+            </a:r>
+          </a:p>
+        </p:txBody>
+      </p:sp>
+      <p:sp>
+        <p:nvSpPr>
+          <p:cNvPr id="7" name="TextBox 6"/>
+          <p:cNvSpPr txBox="1"/>
+          <p:nvPr/>
+        </p:nvSpPr>
+        <p:spPr>
+          <a:xfrm>
+            <a:off x="731520" y="1828800"/>
+            <a:ext cx="4937760" cy="548640"/>
+          </a:xfrm>
+          <a:prstGeom prst="rect">
+            <a:avLst/>
+          </a:prstGeom>
+          <a:noFill/>
+        </p:spPr>
+        <p:txBody>
+          <a:bodyPr wrap="none">
+            <a:spAutoFit/>
+          </a:bodyPr>
+          <a:lstStyle/>
+          <a:p>
+            <a:pPr>
+              <a:defRPr sz="2000">
                 <a:solidFill>
                   <a:srgbClr val="000000"/>
                 </a:solidFill>
@@ -4655,31 +5105,152 @@
               </a:defRPr>
             </a:pPr>
             <a:r>
-              <a:t>  1勤務1回の確認を徹底（情報連携ミスの防止）</a:t>
-            </a:r>
-          </a:p>
+              <a:t>• 1勤務1回の確認を徹底</a:t>
+            </a:r>
+          </a:p>
+        </p:txBody>
+      </p:sp>
+      <p:sp>
+        <p:nvSpPr>
+          <p:cNvPr id="8" name="TextBox 7"/>
+          <p:cNvSpPr txBox="1"/>
+          <p:nvPr/>
+        </p:nvSpPr>
+        <p:spPr>
+          <a:xfrm>
+            <a:off x="731520" y="2468880"/>
+            <a:ext cx="4937760" cy="548640"/>
+          </a:xfrm>
+          <a:prstGeom prst="rect">
+            <a:avLst/>
+          </a:prstGeom>
+          <a:noFill/>
+        </p:spPr>
+        <p:txBody>
+          <a:bodyPr wrap="none">
+            <a:spAutoFit/>
+          </a:bodyPr>
+          <a:lstStyle/>
           <a:p>
             <a:pPr>
-              <a:spcBef>
-                <a:spcPts val="1600"/>
-              </a:spcBef>
-              <a:defRPr sz="2000" b="1">
-                <a:solidFill>
-                  <a:srgbClr val="E60012"/>
+              <a:defRPr sz="2000">
+                <a:solidFill>
+                  <a:srgbClr val="000000"/>
                 </a:solidFill>
                 <a:latin typeface="Meiryo"/>
               </a:defRPr>
             </a:pPr>
             <a:r>
-              <a:t>■ ネックスピーカー設定</a:t>
-            </a:r>
-          </a:p>
+              <a:t>• 情報連携ミスの防止</a:t>
+            </a:r>
+          </a:p>
+        </p:txBody>
+      </p:sp>
+      <p:sp>
+        <p:nvSpPr>
+          <p:cNvPr id="9" name="Rounded Rectangle 8"/>
+          <p:cNvSpPr/>
+          <p:nvPr/>
+        </p:nvSpPr>
+        <p:spPr>
+          <a:xfrm>
+            <a:off x="6217920" y="1005840"/>
+            <a:ext cx="5486400" cy="5303520"/>
+          </a:xfrm>
+          <a:prstGeom prst="roundRect">
+            <a:avLst/>
+          </a:prstGeom>
+          <a:solidFill>
+            <a:srgbClr val="E6F0FA"/>
+          </a:solidFill>
+          <a:ln>
+            <a:solidFill>
+              <a:srgbClr val="2962A4"/>
+            </a:solidFill>
+          </a:ln>
+        </p:spPr>
+        <p:style>
+          <a:lnRef idx="1">
+            <a:schemeClr val="accent1"/>
+          </a:lnRef>
+          <a:fillRef idx="3">
+            <a:schemeClr val="accent1"/>
+          </a:fillRef>
+          <a:effectRef idx="2">
+            <a:schemeClr val="accent1"/>
+          </a:effectRef>
+          <a:fontRef idx="minor">
+            <a:schemeClr val="lt1"/>
+          </a:fontRef>
+        </p:style>
+        <p:txBody>
+          <a:bodyPr rtlCol="0" anchor="ctr"/>
+          <a:lstStyle/>
+          <a:p>
+            <a:pPr algn="ctr"/>
+          </a:p>
+        </p:txBody>
+      </p:sp>
+      <p:sp>
+        <p:nvSpPr>
+          <p:cNvPr id="10" name="TextBox 9"/>
+          <p:cNvSpPr txBox="1"/>
+          <p:nvPr/>
+        </p:nvSpPr>
+        <p:spPr>
+          <a:xfrm>
+            <a:off x="6492240" y="1188720"/>
+            <a:ext cx="4937760" cy="457200"/>
+          </a:xfrm>
+          <a:prstGeom prst="rect">
+            <a:avLst/>
+          </a:prstGeom>
+          <a:noFill/>
+        </p:spPr>
+        <p:txBody>
+          <a:bodyPr wrap="none">
+            <a:spAutoFit/>
+          </a:bodyPr>
+          <a:lstStyle/>
           <a:p>
             <a:pPr>
-              <a:spcBef>
-                <a:spcPts val="400"/>
-              </a:spcBef>
-              <a:defRPr sz="1800">
+              <a:defRPr sz="2400" b="1">
+                <a:solidFill>
+                  <a:srgbClr val="2962A4"/>
+                </a:solidFill>
+                <a:latin typeface="Meiryo"/>
+              </a:defRPr>
+            </a:pPr>
+            <a:r>
+              <a:t>ネックスピーカー設定</a:t>
+            </a:r>
+          </a:p>
+        </p:txBody>
+      </p:sp>
+      <p:sp>
+        <p:nvSpPr>
+          <p:cNvPr id="11" name="TextBox 10"/>
+          <p:cNvSpPr txBox="1"/>
+          <p:nvPr/>
+        </p:nvSpPr>
+        <p:spPr>
+          <a:xfrm>
+            <a:off x="6492240" y="1828800"/>
+            <a:ext cx="4937760" cy="548640"/>
+          </a:xfrm>
+          <a:prstGeom prst="rect">
+            <a:avLst/>
+          </a:prstGeom>
+          <a:noFill/>
+        </p:spPr>
+        <p:txBody>
+          <a:bodyPr wrap="none">
+            <a:spAutoFit/>
+          </a:bodyPr>
+          <a:lstStyle/>
+          <a:p>
+            <a:pPr>
+              <a:defRPr sz="2000">
                 <a:solidFill>
                   <a:srgbClr val="000000"/>
                 </a:solidFill>
@@ -4687,44 +5258,35 @@
               </a:defRPr>
             </a:pPr>
             <a:r>
-              <a:t>  </a:t>
-            </a:r>
-          </a:p>
+              <a:t>• 必ず「有線接続」で使用</a:t>
+            </a:r>
+          </a:p>
+        </p:txBody>
+      </p:sp>
+      <p:sp>
+        <p:nvSpPr>
+          <p:cNvPr id="12" name="TextBox 11"/>
+          <p:cNvSpPr txBox="1"/>
+          <p:nvPr/>
+        </p:nvSpPr>
+        <p:spPr>
+          <a:xfrm>
+            <a:off x="6492240" y="2468880"/>
+            <a:ext cx="4937760" cy="548640"/>
+          </a:xfrm>
+          <a:prstGeom prst="rect">
+            <a:avLst/>
+          </a:prstGeom>
+          <a:noFill/>
+        </p:spPr>
+        <p:txBody>
+          <a:bodyPr wrap="none">
+            <a:spAutoFit/>
+          </a:bodyPr>
+          <a:lstStyle/>
           <a:p>
             <a:pPr>
-              <a:spcBef>
-                <a:spcPts val="1200"/>
-              </a:spcBef>
-              <a:defRPr sz="2000" b="1">
-                <a:solidFill>
-                  <a:srgbClr val="000000"/>
-                </a:solidFill>
-                <a:latin typeface="Meiryo"/>
-              </a:defRPr>
-            </a:pPr>
-          </a:p>
-          <a:p>
-            <a:pPr lvl="1">
-              <a:spcBef>
-                <a:spcPts val="600"/>
-              </a:spcBef>
-              <a:defRPr sz="1800">
-                <a:solidFill>
-                  <a:srgbClr val="000000"/>
-                </a:solidFill>
-                <a:latin typeface="Meiryo"/>
-              </a:defRPr>
-            </a:pPr>
-            <a:r>
-              <a:t>• 必ず「有線接続」で使用すること</a:t>
-            </a:r>
-          </a:p>
-          <a:p>
-            <a:pPr lvl="1">
-              <a:spcBef>
-                <a:spcPts val="600"/>
-              </a:spcBef>
-              <a:defRPr sz="1800">
+              <a:defRPr sz="2000">
                 <a:solidFill>
                   <a:srgbClr val="000000"/>
                 </a:solidFill>
@@ -4763,8 +5325,8 @@
         </p:nvSpPr>
         <p:spPr>
           <a:xfrm>
-            <a:off x="9601200" y="274320"/>
-            <a:ext cx="2286000" cy="457200"/>
+            <a:off x="9418320" y="182880"/>
+            <a:ext cx="2560320" cy="457200"/>
           </a:xfrm>
           <a:prstGeom prst="rect">
             <a:avLst/>
@@ -4779,78 +5341,33 @@
           <a:p>
             <a:pPr algn="r"/>
             <a:r>
-              <a:rPr sz="1800" b="1">
-                <a:solidFill>
-                  <a:srgbClr val="E60012"/>
+              <a:rPr sz="2000" b="1">
+                <a:solidFill>
+                  <a:srgbClr val="C81E1E"/>
                 </a:solidFill>
                 <a:latin typeface="Arial"/>
               </a:rPr>
-              <a:t>Re</a:t>
-            </a:r>
-            <a:r>
-              <a:rPr sz="1800" b="1">
-                <a:solidFill>
-                  <a:srgbClr val="E60012"/>
-                </a:solidFill>
-                <a:latin typeface="Arial"/>
-              </a:rPr>
-              <a:t> RENAISSANCE</a:t>
-            </a:r>
-          </a:p>
-        </p:txBody>
-      </p:sp>
-      <p:sp>
-        <p:nvSpPr>
-          <p:cNvPr id="3" name="TextBox 2"/>
-          <p:cNvSpPr txBox="1"/>
-          <p:nvPr/>
-        </p:nvSpPr>
-        <p:spPr>
-          <a:xfrm>
-            <a:off x="457200" y="457200"/>
-            <a:ext cx="9144000" cy="640080"/>
-          </a:xfrm>
-          <a:prstGeom prst="rect">
-            <a:avLst/>
-          </a:prstGeom>
-          <a:noFill/>
-        </p:spPr>
-        <p:txBody>
-          <a:bodyPr wrap="none">
-            <a:spAutoFit/>
-          </a:bodyPr>
-          <a:lstStyle/>
-          <a:p>
-            <a:pPr>
-              <a:defRPr sz="2800" b="1">
-                <a:solidFill>
-                  <a:srgbClr val="000000"/>
-                </a:solidFill>
-                <a:latin typeface="Meiryo"/>
-              </a:defRPr>
-            </a:pPr>
-            <a:r>
-              <a:t>3-2. データ集約・その他</a:t>
-            </a:r>
-          </a:p>
-        </p:txBody>
-      </p:sp>
-      <p:sp>
-        <p:nvSpPr>
-          <p:cNvPr id="4" name="Rectangle 3"/>
+              <a:t>RENAISSANCE</a:t>
+            </a:r>
+          </a:p>
+        </p:txBody>
+      </p:sp>
+      <p:sp>
+        <p:nvSpPr>
+          <p:cNvPr id="3" name="Rectangle 2"/>
           <p:cNvSpPr/>
           <p:nvPr/>
         </p:nvSpPr>
         <p:spPr>
           <a:xfrm>
-            <a:off x="457200" y="1051560"/>
-            <a:ext cx="11247120" cy="38100"/>
+            <a:off x="0" y="685800"/>
+            <a:ext cx="12191695" cy="50800"/>
           </a:xfrm>
           <a:prstGeom prst="rect">
             <a:avLst/>
           </a:prstGeom>
           <a:solidFill>
-            <a:srgbClr val="E60012"/>
+            <a:srgbClr val="C81E1E"/>
           </a:solidFill>
           <a:ln>
             <a:noFill/>
@@ -4880,47 +5397,107 @@
       </p:sp>
       <p:sp>
         <p:nvSpPr>
-          <p:cNvPr id="5" name="TextBox 4"/>
-          <p:cNvSpPr txBox="1"/>
-          <p:nvPr/>
-        </p:nvSpPr>
-        <p:spPr>
-          <a:xfrm>
-            <a:off x="640080" y="1371600"/>
-            <a:ext cx="10972800" cy="5029200"/>
-          </a:xfrm>
-          <a:prstGeom prst="rect">
-            <a:avLst/>
-          </a:prstGeom>
-          <a:noFill/>
-        </p:spPr>
-        <p:txBody>
-          <a:bodyPr wrap="square">
+          <p:cNvPr id="4" name="TextBox 3"/>
+          <p:cNvSpPr txBox="1"/>
+          <p:nvPr/>
+        </p:nvSpPr>
+        <p:spPr>
+          <a:xfrm>
+            <a:off x="457200" y="137160"/>
+            <a:ext cx="8686800" cy="548640"/>
+          </a:xfrm>
+          <a:prstGeom prst="rect">
+            <a:avLst/>
+          </a:prstGeom>
+          <a:noFill/>
+        </p:spPr>
+        <p:txBody>
+          <a:bodyPr wrap="none">
             <a:spAutoFit/>
           </a:bodyPr>
           <a:lstStyle/>
           <a:p>
             <a:pPr>
-              <a:spcBef>
-                <a:spcPts val="0"/>
-              </a:spcBef>
-              <a:defRPr sz="2000" b="1">
-                <a:solidFill>
-                  <a:srgbClr val="E60012"/>
+              <a:defRPr sz="3200" b="1">
+                <a:solidFill>
+                  <a:srgbClr val="C81E1E"/>
                 </a:solidFill>
                 <a:latin typeface="Meiryo"/>
               </a:defRPr>
             </a:pPr>
             <a:r>
-              <a:t>■ 退会理由の集約</a:t>
-            </a:r>
-          </a:p>
+              <a:t>3-2. データ集約・その他</a:t>
+            </a:r>
+          </a:p>
+        </p:txBody>
+      </p:sp>
+      <p:sp>
+        <p:nvSpPr>
+          <p:cNvPr id="5" name="Rectangle 4"/>
+          <p:cNvSpPr/>
+          <p:nvPr/>
+        </p:nvSpPr>
+        <p:spPr>
+          <a:xfrm>
+            <a:off x="640080" y="1280160"/>
+            <a:ext cx="182880" cy="182880"/>
+          </a:xfrm>
+          <a:prstGeom prst="rect">
+            <a:avLst/>
+          </a:prstGeom>
+          <a:solidFill>
+            <a:srgbClr val="C81E1E"/>
+          </a:solidFill>
+          <a:ln>
+            <a:noFill/>
+          </a:ln>
+        </p:spPr>
+        <p:style>
+          <a:lnRef idx="1">
+            <a:schemeClr val="accent1"/>
+          </a:lnRef>
+          <a:fillRef idx="3">
+            <a:schemeClr val="accent1"/>
+          </a:fillRef>
+          <a:effectRef idx="2">
+            <a:schemeClr val="accent1"/>
+          </a:effectRef>
+          <a:fontRef idx="minor">
+            <a:schemeClr val="lt1"/>
+          </a:fontRef>
+        </p:style>
+        <p:txBody>
+          <a:bodyPr rtlCol="0" anchor="ctr"/>
+          <a:lstStyle/>
+          <a:p>
+            <a:pPr algn="ctr"/>
+          </a:p>
+        </p:txBody>
+      </p:sp>
+      <p:sp>
+        <p:nvSpPr>
+          <p:cNvPr id="6" name="TextBox 5"/>
+          <p:cNvSpPr txBox="1"/>
+          <p:nvPr/>
+        </p:nvSpPr>
+        <p:spPr>
+          <a:xfrm>
+            <a:off x="1005840" y="1143000"/>
+            <a:ext cx="10058400" cy="548640"/>
+          </a:xfrm>
+          <a:prstGeom prst="rect">
+            <a:avLst/>
+          </a:prstGeom>
+          <a:noFill/>
+        </p:spPr>
+        <p:txBody>
+          <a:bodyPr wrap="none">
+            <a:spAutoFit/>
+          </a:bodyPr>
+          <a:lstStyle/>
           <a:p>
             <a:pPr>
-              <a:spcBef>
-                <a:spcPts val="400"/>
-              </a:spcBef>
-              <a:defRPr sz="1800">
+              <a:defRPr sz="2400">
                 <a:solidFill>
                   <a:srgbClr val="000000"/>
                 </a:solidFill>
@@ -4928,39 +5505,86 @@
               </a:defRPr>
             </a:pPr>
             <a:r>
-              <a:t>  正しい集約方法ができているか再確認</a:t>
-            </a:r>
-          </a:p>
+              <a:t>退会理由の集約：正しい集約方法ができているか再確認</a:t>
+            </a:r>
+          </a:p>
+        </p:txBody>
+      </p:sp>
+      <p:sp>
+        <p:nvSpPr>
+          <p:cNvPr id="7" name="Rectangle 6"/>
+          <p:cNvSpPr/>
+          <p:nvPr/>
+        </p:nvSpPr>
+        <p:spPr>
+          <a:xfrm>
+            <a:off x="640080" y="2194560"/>
+            <a:ext cx="182880" cy="182880"/>
+          </a:xfrm>
+          <a:prstGeom prst="rect">
+            <a:avLst/>
+          </a:prstGeom>
+          <a:solidFill>
+            <a:srgbClr val="C81E1E"/>
+          </a:solidFill>
+          <a:ln>
+            <a:noFill/>
+          </a:ln>
+        </p:spPr>
+        <p:style>
+          <a:lnRef idx="1">
+            <a:schemeClr val="accent1"/>
+          </a:lnRef>
+          <a:fillRef idx="3">
+            <a:schemeClr val="accent1"/>
+          </a:fillRef>
+          <a:effectRef idx="2">
+            <a:schemeClr val="accent1"/>
+          </a:effectRef>
+          <a:fontRef idx="minor">
+            <a:schemeClr val="lt1"/>
+          </a:fontRef>
+        </p:style>
+        <p:txBody>
+          <a:bodyPr rtlCol="0" anchor="ctr"/>
+          <a:lstStyle/>
+          <a:p>
+            <a:pPr algn="ctr"/>
+          </a:p>
+        </p:txBody>
+      </p:sp>
+      <p:sp>
+        <p:nvSpPr>
+          <p:cNvPr id="8" name="TextBox 7"/>
+          <p:cNvSpPr txBox="1"/>
+          <p:nvPr/>
+        </p:nvSpPr>
+        <p:spPr>
+          <a:xfrm>
+            <a:off x="1005840" y="2057400"/>
+            <a:ext cx="10058400" cy="548640"/>
+          </a:xfrm>
+          <a:prstGeom prst="rect">
+            <a:avLst/>
+          </a:prstGeom>
+          <a:noFill/>
+        </p:spPr>
+        <p:txBody>
+          <a:bodyPr wrap="none">
+            <a:spAutoFit/>
+          </a:bodyPr>
+          <a:lstStyle/>
           <a:p>
             <a:pPr>
-              <a:spcBef>
-                <a:spcPts val="1600"/>
-              </a:spcBef>
-              <a:defRPr sz="2000" b="1">
-                <a:solidFill>
-                  <a:srgbClr val="E60012"/>
+              <a:defRPr sz="2400">
+                <a:solidFill>
+                  <a:srgbClr val="000000"/>
                 </a:solidFill>
                 <a:latin typeface="Meiryo"/>
               </a:defRPr>
             </a:pPr>
             <a:r>
-              <a:t>■ 掲示板登録</a:t>
-            </a:r>
-          </a:p>
-          <a:p>
-            <a:pPr>
-              <a:spcBef>
-                <a:spcPts val="400"/>
-              </a:spcBef>
-              <a:defRPr sz="1800">
-                <a:solidFill>
-                  <a:srgbClr val="000000"/>
-                </a:solidFill>
-                <a:latin typeface="Meiryo"/>
-              </a:defRPr>
-            </a:pPr>
-            <a:r>
-              <a:t>  登録漏れがないか確認</a:t>
+              <a:t>掲示板登録：登録漏れがないか確認</a:t>
             </a:r>
           </a:p>
         </p:txBody>
@@ -4991,8 +5615,8 @@
         </p:nvSpPr>
         <p:spPr>
           <a:xfrm>
-            <a:off x="9601200" y="274320"/>
-            <a:ext cx="2286000" cy="457200"/>
+            <a:off x="9418320" y="182880"/>
+            <a:ext cx="2560320" cy="457200"/>
           </a:xfrm>
           <a:prstGeom prst="rect">
             <a:avLst/>
@@ -5007,78 +5631,33 @@
           <a:p>
             <a:pPr algn="r"/>
             <a:r>
-              <a:rPr sz="1800" b="1">
-                <a:solidFill>
-                  <a:srgbClr val="E60012"/>
+              <a:rPr sz="2000" b="1">
+                <a:solidFill>
+                  <a:srgbClr val="C81E1E"/>
                 </a:solidFill>
                 <a:latin typeface="Arial"/>
               </a:rPr>
-              <a:t>Re</a:t>
-            </a:r>
-            <a:r>
-              <a:rPr sz="1800" b="1">
-                <a:solidFill>
-                  <a:srgbClr val="E60012"/>
-                </a:solidFill>
-                <a:latin typeface="Arial"/>
-              </a:rPr>
-              <a:t> RENAISSANCE</a:t>
-            </a:r>
-          </a:p>
-        </p:txBody>
-      </p:sp>
-      <p:sp>
-        <p:nvSpPr>
-          <p:cNvPr id="3" name="TextBox 2"/>
-          <p:cNvSpPr txBox="1"/>
-          <p:nvPr/>
-        </p:nvSpPr>
-        <p:spPr>
-          <a:xfrm>
-            <a:off x="457200" y="457200"/>
-            <a:ext cx="9144000" cy="640080"/>
-          </a:xfrm>
-          <a:prstGeom prst="rect">
-            <a:avLst/>
-          </a:prstGeom>
-          <a:noFill/>
-        </p:spPr>
-        <p:txBody>
-          <a:bodyPr wrap="none">
-            <a:spAutoFit/>
-          </a:bodyPr>
-          <a:lstStyle/>
-          <a:p>
-            <a:pPr>
-              <a:defRPr sz="2800" b="1">
-                <a:solidFill>
-                  <a:srgbClr val="000000"/>
-                </a:solidFill>
-                <a:latin typeface="Meiryo"/>
-              </a:defRPr>
-            </a:pPr>
-            <a:r>
-              <a:t>【4】帳票格納ルールの標準化</a:t>
-            </a:r>
-          </a:p>
-        </p:txBody>
-      </p:sp>
-      <p:sp>
-        <p:nvSpPr>
-          <p:cNvPr id="4" name="Rectangle 3"/>
+              <a:t>RENAISSANCE</a:t>
+            </a:r>
+          </a:p>
+        </p:txBody>
+      </p:sp>
+      <p:sp>
+        <p:nvSpPr>
+          <p:cNvPr id="3" name="Rectangle 2"/>
           <p:cNvSpPr/>
           <p:nvPr/>
         </p:nvSpPr>
         <p:spPr>
           <a:xfrm>
-            <a:off x="457200" y="1051560"/>
-            <a:ext cx="11247120" cy="38100"/>
+            <a:off x="0" y="685800"/>
+            <a:ext cx="12191695" cy="50800"/>
           </a:xfrm>
           <a:prstGeom prst="rect">
             <a:avLst/>
           </a:prstGeom>
           <a:solidFill>
-            <a:srgbClr val="E60012"/>
+            <a:srgbClr val="C81E1E"/>
           </a:solidFill>
           <a:ln>
             <a:noFill/>
@@ -5108,14 +5687,93 @@
       </p:sp>
       <p:sp>
         <p:nvSpPr>
-          <p:cNvPr id="5" name="TextBox 4"/>
-          <p:cNvSpPr txBox="1"/>
-          <p:nvPr/>
-        </p:nvSpPr>
-        <p:spPr>
-          <a:xfrm>
-            <a:off x="640080" y="1371600"/>
-            <a:ext cx="10972800" cy="5029200"/>
+          <p:cNvPr id="4" name="TextBox 3"/>
+          <p:cNvSpPr txBox="1"/>
+          <p:nvPr/>
+        </p:nvSpPr>
+        <p:spPr>
+          <a:xfrm>
+            <a:off x="457200" y="137160"/>
+            <a:ext cx="8686800" cy="548640"/>
+          </a:xfrm>
+          <a:prstGeom prst="rect">
+            <a:avLst/>
+          </a:prstGeom>
+          <a:noFill/>
+        </p:spPr>
+        <p:txBody>
+          <a:bodyPr wrap="none">
+            <a:spAutoFit/>
+          </a:bodyPr>
+          <a:lstStyle/>
+          <a:p>
+            <a:pPr>
+              <a:defRPr sz="3200" b="1">
+                <a:solidFill>
+                  <a:srgbClr val="C81E1E"/>
+                </a:solidFill>
+                <a:latin typeface="Meiryo"/>
+              </a:defRPr>
+            </a:pPr>
+            <a:r>
+              <a:t>【4】帳票格納ルールの標準化</a:t>
+            </a:r>
+          </a:p>
+        </p:txBody>
+      </p:sp>
+      <p:sp>
+        <p:nvSpPr>
+          <p:cNvPr id="5" name="Rounded Rectangle 4"/>
+          <p:cNvSpPr/>
+          <p:nvPr/>
+        </p:nvSpPr>
+        <p:spPr>
+          <a:xfrm>
+            <a:off x="914400" y="1371600"/>
+            <a:ext cx="10332720" cy="2011680"/>
+          </a:xfrm>
+          <a:prstGeom prst="roundRect">
+            <a:avLst/>
+          </a:prstGeom>
+          <a:solidFill>
+            <a:srgbClr val="C81E1E"/>
+          </a:solidFill>
+          <a:ln>
+            <a:noFill/>
+          </a:ln>
+        </p:spPr>
+        <p:style>
+          <a:lnRef idx="1">
+            <a:schemeClr val="accent1"/>
+          </a:lnRef>
+          <a:fillRef idx="3">
+            <a:schemeClr val="accent1"/>
+          </a:fillRef>
+          <a:effectRef idx="2">
+            <a:schemeClr val="accent1"/>
+          </a:effectRef>
+          <a:fontRef idx="minor">
+            <a:schemeClr val="lt1"/>
+          </a:fontRef>
+        </p:style>
+        <p:txBody>
+          <a:bodyPr rtlCol="0" anchor="ctr"/>
+          <a:lstStyle/>
+          <a:p>
+            <a:pPr algn="ctr"/>
+          </a:p>
+        </p:txBody>
+      </p:sp>
+      <p:sp>
+        <p:nvSpPr>
+          <p:cNvPr id="6" name="TextBox 5"/>
+          <p:cNvSpPr txBox="1"/>
+          <p:nvPr/>
+        </p:nvSpPr>
+        <p:spPr>
+          <a:xfrm>
+            <a:off x="1188720" y="1828800"/>
+            <a:ext cx="9784080" cy="1371600"/>
           </a:xfrm>
           <a:prstGeom prst="rect">
             <a:avLst/>
@@ -5128,99 +5786,88 @@
           </a:bodyPr>
           <a:lstStyle/>
           <a:p>
+            <a:pPr algn="ctr">
+              <a:defRPr sz="2800" b="1">
+                <a:solidFill>
+                  <a:srgbClr val="FFFFFF"/>
+                </a:solidFill>
+                <a:latin typeface="Meiryo"/>
+              </a:defRPr>
+            </a:pPr>
+            <a:r>
+              <a:t>【格納スケジュール】毎月15日格納の徹底</a:t>
+            </a:r>
+          </a:p>
+        </p:txBody>
+      </p:sp>
+      <p:sp>
+        <p:nvSpPr>
+          <p:cNvPr id="7" name="TextBox 6"/>
+          <p:cNvSpPr txBox="1"/>
+          <p:nvPr/>
+        </p:nvSpPr>
+        <p:spPr>
+          <a:xfrm>
+            <a:off x="1371600" y="3657600"/>
+            <a:ext cx="9418320" cy="640080"/>
+          </a:xfrm>
+          <a:prstGeom prst="rect">
+            <a:avLst/>
+          </a:prstGeom>
+          <a:noFill/>
+        </p:spPr>
+        <p:txBody>
+          <a:bodyPr wrap="none">
+            <a:spAutoFit/>
+          </a:bodyPr>
+          <a:lstStyle/>
+          <a:p>
             <a:pPr>
-              <a:spcBef>
-                <a:spcPts val="0"/>
-              </a:spcBef>
-              <a:defRPr sz="2000" b="1">
-                <a:solidFill>
-                  <a:srgbClr val="E60012"/>
+              <a:defRPr sz="2200">
+                <a:solidFill>
+                  <a:srgbClr val="505050"/>
                 </a:solidFill>
                 <a:latin typeface="Meiryo"/>
               </a:defRPr>
             </a:pPr>
             <a:r>
-              <a:t>■ 目的</a:t>
-            </a:r>
-          </a:p>
+              <a:t>✓ 目的：事務管理コストを下げるための統一ルール運用</a:t>
+            </a:r>
+          </a:p>
+        </p:txBody>
+      </p:sp>
+      <p:sp>
+        <p:nvSpPr>
+          <p:cNvPr id="8" name="TextBox 7"/>
+          <p:cNvSpPr txBox="1"/>
+          <p:nvPr/>
+        </p:nvSpPr>
+        <p:spPr>
+          <a:xfrm>
+            <a:off x="1371600" y="4389120"/>
+            <a:ext cx="9418320" cy="640080"/>
+          </a:xfrm>
+          <a:prstGeom prst="rect">
+            <a:avLst/>
+          </a:prstGeom>
+          <a:noFill/>
+        </p:spPr>
+        <p:txBody>
+          <a:bodyPr wrap="none">
+            <a:spAutoFit/>
+          </a:bodyPr>
+          <a:lstStyle/>
           <a:p>
             <a:pPr>
-              <a:spcBef>
-                <a:spcPts val="400"/>
-              </a:spcBef>
-              <a:defRPr sz="1800">
-                <a:solidFill>
-                  <a:srgbClr val="000000"/>
+              <a:defRPr sz="2200">
+                <a:solidFill>
+                  <a:srgbClr val="505050"/>
                 </a:solidFill>
                 <a:latin typeface="Meiryo"/>
               </a:defRPr>
             </a:pPr>
             <a:r>
-              <a:t>  事務管理コストを下げるための統一ルール運用</a:t>
-            </a:r>
-          </a:p>
-          <a:p>
-            <a:pPr>
-              <a:spcBef>
-                <a:spcPts val="1600"/>
-              </a:spcBef>
-              <a:defRPr sz="2000" b="1">
-                <a:solidFill>
-                  <a:srgbClr val="E60012"/>
-                </a:solidFill>
-                <a:latin typeface="Meiryo"/>
-              </a:defRPr>
-            </a:pPr>
-            <a:r>
-              <a:t>■ 格納スケジュール</a:t>
-            </a:r>
-          </a:p>
-          <a:p>
-            <a:pPr>
-              <a:spcBef>
-                <a:spcPts val="400"/>
-              </a:spcBef>
-              <a:defRPr sz="1800">
-                <a:solidFill>
-                  <a:srgbClr val="000000"/>
-                </a:solidFill>
-                <a:latin typeface="Meiryo"/>
-              </a:defRPr>
-            </a:pPr>
-            <a:r>
-              <a:t>  【重要】毎月15日格納の徹底</a:t>
-            </a:r>
-          </a:p>
-          <a:p>
-            <a:pPr>
-              <a:spcBef>
-                <a:spcPts val="1600"/>
-              </a:spcBef>
-              <a:defRPr sz="2000" b="1">
-                <a:solidFill>
-                  <a:srgbClr val="E60012"/>
-                </a:solidFill>
-                <a:latin typeface="Meiryo"/>
-              </a:defRPr>
-            </a:pPr>
-            <a:r>
-              <a:t>■ 運用ルール</a:t>
-            </a:r>
-          </a:p>
-          <a:p>
-            <a:pPr>
-              <a:spcBef>
-                <a:spcPts val="400"/>
-              </a:spcBef>
-              <a:defRPr sz="1800">
-                <a:solidFill>
-                  <a:srgbClr val="000000"/>
-                </a:solidFill>
-                <a:latin typeface="Meiryo"/>
-              </a:defRPr>
-            </a:pPr>
-            <a:r>
-              <a:t>  追加格納や修正が発生した場合の手順について</a:t>
+              <a:t>✓ 追加格納や修正が発生した場合の手順を確認</a:t>
             </a:r>
           </a:p>
         </p:txBody>
@@ -5251,8 +5898,8 @@
         </p:nvSpPr>
         <p:spPr>
           <a:xfrm>
-            <a:off x="9601200" y="274320"/>
-            <a:ext cx="2286000" cy="457200"/>
+            <a:off x="9418320" y="182880"/>
+            <a:ext cx="2560320" cy="457200"/>
           </a:xfrm>
           <a:prstGeom prst="rect">
             <a:avLst/>
@@ -5267,78 +5914,33 @@
           <a:p>
             <a:pPr algn="r"/>
             <a:r>
-              <a:rPr sz="1800" b="1">
-                <a:solidFill>
-                  <a:srgbClr val="E60012"/>
+              <a:rPr sz="2000" b="1">
+                <a:solidFill>
+                  <a:srgbClr val="C81E1E"/>
                 </a:solidFill>
                 <a:latin typeface="Arial"/>
               </a:rPr>
-              <a:t>Re</a:t>
-            </a:r>
-            <a:r>
-              <a:rPr sz="1800" b="1">
-                <a:solidFill>
-                  <a:srgbClr val="E60012"/>
-                </a:solidFill>
-                <a:latin typeface="Arial"/>
-              </a:rPr>
-              <a:t> RENAISSANCE</a:t>
-            </a:r>
-          </a:p>
-        </p:txBody>
-      </p:sp>
-      <p:sp>
-        <p:nvSpPr>
-          <p:cNvPr id="3" name="TextBox 2"/>
-          <p:cNvSpPr txBox="1"/>
-          <p:nvPr/>
-        </p:nvSpPr>
-        <p:spPr>
-          <a:xfrm>
-            <a:off x="457200" y="457200"/>
-            <a:ext cx="9144000" cy="640080"/>
-          </a:xfrm>
-          <a:prstGeom prst="rect">
-            <a:avLst/>
-          </a:prstGeom>
-          <a:noFill/>
-        </p:spPr>
-        <p:txBody>
-          <a:bodyPr wrap="none">
-            <a:spAutoFit/>
-          </a:bodyPr>
-          <a:lstStyle/>
-          <a:p>
-            <a:pPr>
-              <a:defRPr sz="2800" b="1">
-                <a:solidFill>
-                  <a:srgbClr val="000000"/>
-                </a:solidFill>
-                <a:latin typeface="Meiryo"/>
-              </a:defRPr>
-            </a:pPr>
-            <a:r>
-              <a:t>【5】クラブの声を聴く会・質疑応答</a:t>
-            </a:r>
-          </a:p>
-        </p:txBody>
-      </p:sp>
-      <p:sp>
-        <p:nvSpPr>
-          <p:cNvPr id="4" name="Rectangle 3"/>
+              <a:t>RENAISSANCE</a:t>
+            </a:r>
+          </a:p>
+        </p:txBody>
+      </p:sp>
+      <p:sp>
+        <p:nvSpPr>
+          <p:cNvPr id="3" name="Rectangle 2"/>
           <p:cNvSpPr/>
           <p:nvPr/>
         </p:nvSpPr>
         <p:spPr>
           <a:xfrm>
-            <a:off x="457200" y="1051560"/>
-            <a:ext cx="11247120" cy="38100"/>
+            <a:off x="0" y="685800"/>
+            <a:ext cx="12191695" cy="50800"/>
           </a:xfrm>
           <a:prstGeom prst="rect">
             <a:avLst/>
           </a:prstGeom>
           <a:solidFill>
-            <a:srgbClr val="E60012"/>
+            <a:srgbClr val="C81E1E"/>
           </a:solidFill>
           <a:ln>
             <a:noFill/>
@@ -5368,47 +5970,107 @@
       </p:sp>
       <p:sp>
         <p:nvSpPr>
-          <p:cNvPr id="5" name="TextBox 4"/>
-          <p:cNvSpPr txBox="1"/>
-          <p:nvPr/>
-        </p:nvSpPr>
-        <p:spPr>
-          <a:xfrm>
-            <a:off x="640080" y="1371600"/>
-            <a:ext cx="10972800" cy="5029200"/>
-          </a:xfrm>
-          <a:prstGeom prst="rect">
-            <a:avLst/>
-          </a:prstGeom>
-          <a:noFill/>
-        </p:spPr>
-        <p:txBody>
-          <a:bodyPr wrap="square">
+          <p:cNvPr id="4" name="TextBox 3"/>
+          <p:cNvSpPr txBox="1"/>
+          <p:nvPr/>
+        </p:nvSpPr>
+        <p:spPr>
+          <a:xfrm>
+            <a:off x="457200" y="137160"/>
+            <a:ext cx="8686800" cy="548640"/>
+          </a:xfrm>
+          <a:prstGeom prst="rect">
+            <a:avLst/>
+          </a:prstGeom>
+          <a:noFill/>
+        </p:spPr>
+        <p:txBody>
+          <a:bodyPr wrap="none">
             <a:spAutoFit/>
           </a:bodyPr>
           <a:lstStyle/>
           <a:p>
             <a:pPr>
-              <a:spcBef>
-                <a:spcPts val="0"/>
-              </a:spcBef>
-              <a:defRPr sz="2000" b="1">
-                <a:solidFill>
-                  <a:srgbClr val="E60012"/>
+              <a:defRPr sz="3200" b="1">
+                <a:solidFill>
+                  <a:srgbClr val="C81E1E"/>
                 </a:solidFill>
                 <a:latin typeface="Meiryo"/>
               </a:defRPr>
             </a:pPr>
             <a:r>
-              <a:t>■ スタンス</a:t>
-            </a:r>
-          </a:p>
+              <a:t>【5】クラブの声を聴く会・質疑応答</a:t>
+            </a:r>
+          </a:p>
+        </p:txBody>
+      </p:sp>
+      <p:sp>
+        <p:nvSpPr>
+          <p:cNvPr id="5" name="Rectangle 4"/>
+          <p:cNvSpPr/>
+          <p:nvPr/>
+        </p:nvSpPr>
+        <p:spPr>
+          <a:xfrm>
+            <a:off x="640080" y="1280160"/>
+            <a:ext cx="182880" cy="182880"/>
+          </a:xfrm>
+          <a:prstGeom prst="rect">
+            <a:avLst/>
+          </a:prstGeom>
+          <a:solidFill>
+            <a:srgbClr val="C81E1E"/>
+          </a:solidFill>
+          <a:ln>
+            <a:noFill/>
+          </a:ln>
+        </p:spPr>
+        <p:style>
+          <a:lnRef idx="1">
+            <a:schemeClr val="accent1"/>
+          </a:lnRef>
+          <a:fillRef idx="3">
+            <a:schemeClr val="accent1"/>
+          </a:fillRef>
+          <a:effectRef idx="2">
+            <a:schemeClr val="accent1"/>
+          </a:effectRef>
+          <a:fontRef idx="minor">
+            <a:schemeClr val="lt1"/>
+          </a:fontRef>
+        </p:style>
+        <p:txBody>
+          <a:bodyPr rtlCol="0" anchor="ctr"/>
+          <a:lstStyle/>
+          <a:p>
+            <a:pPr algn="ctr"/>
+          </a:p>
+        </p:txBody>
+      </p:sp>
+      <p:sp>
+        <p:nvSpPr>
+          <p:cNvPr id="6" name="TextBox 5"/>
+          <p:cNvSpPr txBox="1"/>
+          <p:nvPr/>
+        </p:nvSpPr>
+        <p:spPr>
+          <a:xfrm>
+            <a:off x="1005840" y="1143000"/>
+            <a:ext cx="10058400" cy="548640"/>
+          </a:xfrm>
+          <a:prstGeom prst="rect">
+            <a:avLst/>
+          </a:prstGeom>
+          <a:noFill/>
+        </p:spPr>
+        <p:txBody>
+          <a:bodyPr wrap="none">
+            <a:spAutoFit/>
+          </a:bodyPr>
+          <a:lstStyle/>
           <a:p>
             <a:pPr>
-              <a:spcBef>
-                <a:spcPts val="400"/>
-              </a:spcBef>
-              <a:defRPr sz="1800">
+              <a:defRPr sz="2400">
                 <a:solidFill>
                   <a:srgbClr val="000000"/>
                 </a:solidFill>
@@ -5416,31 +6078,157 @@
               </a:defRPr>
             </a:pPr>
             <a:r>
-              <a:t>  共創的な課題解決</a:t>
-            </a:r>
-          </a:p>
+              <a:t>現場からの質問、要望</a:t>
+            </a:r>
+          </a:p>
+        </p:txBody>
+      </p:sp>
+      <p:sp>
+        <p:nvSpPr>
+          <p:cNvPr id="7" name="Rectangle 6"/>
+          <p:cNvSpPr/>
+          <p:nvPr/>
+        </p:nvSpPr>
+        <p:spPr>
+          <a:xfrm>
+            <a:off x="640080" y="2194560"/>
+            <a:ext cx="182880" cy="182880"/>
+          </a:xfrm>
+          <a:prstGeom prst="rect">
+            <a:avLst/>
+          </a:prstGeom>
+          <a:solidFill>
+            <a:srgbClr val="C81E1E"/>
+          </a:solidFill>
+          <a:ln>
+            <a:noFill/>
+          </a:ln>
+        </p:spPr>
+        <p:style>
+          <a:lnRef idx="1">
+            <a:schemeClr val="accent1"/>
+          </a:lnRef>
+          <a:fillRef idx="3">
+            <a:schemeClr val="accent1"/>
+          </a:fillRef>
+          <a:effectRef idx="2">
+            <a:schemeClr val="accent1"/>
+          </a:effectRef>
+          <a:fontRef idx="minor">
+            <a:schemeClr val="lt1"/>
+          </a:fontRef>
+        </p:style>
+        <p:txBody>
+          <a:bodyPr rtlCol="0" anchor="ctr"/>
+          <a:lstStyle/>
+          <a:p>
+            <a:pPr algn="ctr"/>
+          </a:p>
+        </p:txBody>
+      </p:sp>
+      <p:sp>
+        <p:nvSpPr>
+          <p:cNvPr id="8" name="TextBox 7"/>
+          <p:cNvSpPr txBox="1"/>
+          <p:nvPr/>
+        </p:nvSpPr>
+        <p:spPr>
+          <a:xfrm>
+            <a:off x="1005840" y="2057400"/>
+            <a:ext cx="10058400" cy="548640"/>
+          </a:xfrm>
+          <a:prstGeom prst="rect">
+            <a:avLst/>
+          </a:prstGeom>
+          <a:noFill/>
+        </p:spPr>
+        <p:txBody>
+          <a:bodyPr wrap="none">
+            <a:spAutoFit/>
+          </a:bodyPr>
+          <a:lstStyle/>
           <a:p>
             <a:pPr>
-              <a:spcBef>
-                <a:spcPts val="1600"/>
-              </a:spcBef>
-              <a:defRPr sz="2000" b="1">
-                <a:solidFill>
-                  <a:srgbClr val="E60012"/>
+              <a:defRPr sz="2400">
+                <a:solidFill>
+                  <a:srgbClr val="000000"/>
                 </a:solidFill>
                 <a:latin typeface="Meiryo"/>
               </a:defRPr>
             </a:pPr>
             <a:r>
-              <a:t>■ ヒアリング内容</a:t>
-            </a:r>
-          </a:p>
+              <a:t>発生しているトラブル事例</a:t>
+            </a:r>
+          </a:p>
+        </p:txBody>
+      </p:sp>
+      <p:sp>
+        <p:nvSpPr>
+          <p:cNvPr id="9" name="Rectangle 8"/>
+          <p:cNvSpPr/>
+          <p:nvPr/>
+        </p:nvSpPr>
+        <p:spPr>
+          <a:xfrm>
+            <a:off x="640080" y="3108960"/>
+            <a:ext cx="182880" cy="182880"/>
+          </a:xfrm>
+          <a:prstGeom prst="rect">
+            <a:avLst/>
+          </a:prstGeom>
+          <a:solidFill>
+            <a:srgbClr val="C81E1E"/>
+          </a:solidFill>
+          <a:ln>
+            <a:noFill/>
+          </a:ln>
+        </p:spPr>
+        <p:style>
+          <a:lnRef idx="1">
+            <a:schemeClr val="accent1"/>
+          </a:lnRef>
+          <a:fillRef idx="3">
+            <a:schemeClr val="accent1"/>
+          </a:fillRef>
+          <a:effectRef idx="2">
+            <a:schemeClr val="accent1"/>
+          </a:effectRef>
+          <a:fontRef idx="minor">
+            <a:schemeClr val="lt1"/>
+          </a:fontRef>
+        </p:style>
+        <p:txBody>
+          <a:bodyPr rtlCol="0" anchor="ctr"/>
+          <a:lstStyle/>
+          <a:p>
+            <a:pPr algn="ctr"/>
+          </a:p>
+        </p:txBody>
+      </p:sp>
+      <p:sp>
+        <p:nvSpPr>
+          <p:cNvPr id="10" name="TextBox 9"/>
+          <p:cNvSpPr txBox="1"/>
+          <p:nvPr/>
+        </p:nvSpPr>
+        <p:spPr>
+          <a:xfrm>
+            <a:off x="1005840" y="2971800"/>
+            <a:ext cx="10058400" cy="548640"/>
+          </a:xfrm>
+          <a:prstGeom prst="rect">
+            <a:avLst/>
+          </a:prstGeom>
+          <a:noFill/>
+        </p:spPr>
+        <p:txBody>
+          <a:bodyPr wrap="none">
+            <a:spAutoFit/>
+          </a:bodyPr>
+          <a:lstStyle/>
           <a:p>
             <a:pPr>
-              <a:spcBef>
-                <a:spcPts val="400"/>
-              </a:spcBef>
-              <a:defRPr sz="1800">
+              <a:defRPr sz="2400">
                 <a:solidFill>
                   <a:srgbClr val="000000"/>
                 </a:solidFill>
@@ -5448,68 +6236,7 @@
               </a:defRPr>
             </a:pPr>
             <a:r>
-              <a:t>  </a:t>
-            </a:r>
-          </a:p>
-          <a:p>
-            <a:pPr>
-              <a:spcBef>
-                <a:spcPts val="1200"/>
-              </a:spcBef>
-              <a:defRPr sz="2000" b="1">
-                <a:solidFill>
-                  <a:srgbClr val="000000"/>
-                </a:solidFill>
-                <a:latin typeface="Meiryo"/>
-              </a:defRPr>
-            </a:pPr>
-          </a:p>
-          <a:p>
-            <a:pPr lvl="1">
-              <a:spcBef>
-                <a:spcPts val="600"/>
-              </a:spcBef>
-              <a:defRPr sz="1800">
-                <a:solidFill>
-                  <a:srgbClr val="000000"/>
-                </a:solidFill>
-                <a:latin typeface="Meiryo"/>
-              </a:defRPr>
-            </a:pPr>
-            <a:r>
-              <a:t>• 現場からの質問、要望</a:t>
-            </a:r>
-          </a:p>
-          <a:p>
-            <a:pPr lvl="1">
-              <a:spcBef>
-                <a:spcPts val="600"/>
-              </a:spcBef>
-              <a:defRPr sz="1800">
-                <a:solidFill>
-                  <a:srgbClr val="000000"/>
-                </a:solidFill>
-                <a:latin typeface="Meiryo"/>
-              </a:defRPr>
-            </a:pPr>
-            <a:r>
-              <a:t>• 発生しているトラブル事例</a:t>
-            </a:r>
-          </a:p>
-          <a:p>
-            <a:pPr lvl="1">
-              <a:spcBef>
-                <a:spcPts val="600"/>
-              </a:spcBef>
-              <a:defRPr sz="1800">
-                <a:solidFill>
-                  <a:srgbClr val="000000"/>
-                </a:solidFill>
-                <a:latin typeface="Meiryo"/>
-              </a:defRPr>
-            </a:pPr>
-            <a:r>
-              <a:t>• 運用上の課題や改善提案</a:t>
+              <a:t>運用上の課題や改善提案</a:t>
             </a:r>
           </a:p>
         </p:txBody>
@@ -5540,8 +6267,8 @@
         </p:nvSpPr>
         <p:spPr>
           <a:xfrm>
-            <a:off x="9601200" y="274320"/>
-            <a:ext cx="2286000" cy="457200"/>
+            <a:off x="9418320" y="182880"/>
+            <a:ext cx="2560320" cy="457200"/>
           </a:xfrm>
           <a:prstGeom prst="rect">
             <a:avLst/>
@@ -5556,78 +6283,33 @@
           <a:p>
             <a:pPr algn="r"/>
             <a:r>
-              <a:rPr sz="1800" b="1">
-                <a:solidFill>
-                  <a:srgbClr val="E60012"/>
+              <a:rPr sz="2000" b="1">
+                <a:solidFill>
+                  <a:srgbClr val="C81E1E"/>
                 </a:solidFill>
                 <a:latin typeface="Arial"/>
               </a:rPr>
-              <a:t>Re</a:t>
-            </a:r>
-            <a:r>
-              <a:rPr sz="1800" b="1">
-                <a:solidFill>
-                  <a:srgbClr val="E60012"/>
-                </a:solidFill>
-                <a:latin typeface="Arial"/>
-              </a:rPr>
-              <a:t> RENAISSANCE</a:t>
-            </a:r>
-          </a:p>
-        </p:txBody>
-      </p:sp>
-      <p:sp>
-        <p:nvSpPr>
-          <p:cNvPr id="3" name="TextBox 2"/>
-          <p:cNvSpPr txBox="1"/>
-          <p:nvPr/>
-        </p:nvSpPr>
-        <p:spPr>
-          <a:xfrm>
-            <a:off x="457200" y="457200"/>
-            <a:ext cx="9144000" cy="640080"/>
-          </a:xfrm>
-          <a:prstGeom prst="rect">
-            <a:avLst/>
-          </a:prstGeom>
-          <a:noFill/>
-        </p:spPr>
-        <p:txBody>
-          <a:bodyPr wrap="none">
-            <a:spAutoFit/>
-          </a:bodyPr>
-          <a:lstStyle/>
-          <a:p>
-            <a:pPr>
-              <a:defRPr sz="2800" b="1">
-                <a:solidFill>
-                  <a:srgbClr val="000000"/>
-                </a:solidFill>
-                <a:latin typeface="Meiryo"/>
-              </a:defRPr>
-            </a:pPr>
-            <a:r>
-              <a:t>1. 本MTGの位置付け</a:t>
-            </a:r>
-          </a:p>
-        </p:txBody>
-      </p:sp>
-      <p:sp>
-        <p:nvSpPr>
-          <p:cNvPr id="4" name="Rectangle 3"/>
+              <a:t>RENAISSANCE</a:t>
+            </a:r>
+          </a:p>
+        </p:txBody>
+      </p:sp>
+      <p:sp>
+        <p:nvSpPr>
+          <p:cNvPr id="3" name="Rectangle 2"/>
           <p:cNvSpPr/>
           <p:nvPr/>
         </p:nvSpPr>
         <p:spPr>
           <a:xfrm>
-            <a:off x="457200" y="1051560"/>
-            <a:ext cx="11247120" cy="38100"/>
+            <a:off x="0" y="685800"/>
+            <a:ext cx="12191695" cy="50800"/>
           </a:xfrm>
           <a:prstGeom prst="rect">
             <a:avLst/>
           </a:prstGeom>
           <a:solidFill>
-            <a:srgbClr val="E60012"/>
+            <a:srgbClr val="C81E1E"/>
           </a:solidFill>
           <a:ln>
             <a:noFill/>
@@ -5657,47 +6339,145 @@
       </p:sp>
       <p:sp>
         <p:nvSpPr>
-          <p:cNvPr id="5" name="TextBox 4"/>
-          <p:cNvSpPr txBox="1"/>
-          <p:nvPr/>
-        </p:nvSpPr>
-        <p:spPr>
-          <a:xfrm>
-            <a:off x="640080" y="1371600"/>
-            <a:ext cx="10972800" cy="5029200"/>
-          </a:xfrm>
-          <a:prstGeom prst="rect">
-            <a:avLst/>
-          </a:prstGeom>
-          <a:noFill/>
-        </p:spPr>
-        <p:txBody>
-          <a:bodyPr wrap="square">
+          <p:cNvPr id="4" name="TextBox 3"/>
+          <p:cNvSpPr txBox="1"/>
+          <p:nvPr/>
+        </p:nvSpPr>
+        <p:spPr>
+          <a:xfrm>
+            <a:off x="457200" y="137160"/>
+            <a:ext cx="8686800" cy="548640"/>
+          </a:xfrm>
+          <a:prstGeom prst="rect">
+            <a:avLst/>
+          </a:prstGeom>
+          <a:noFill/>
+        </p:spPr>
+        <p:txBody>
+          <a:bodyPr wrap="none">
             <a:spAutoFit/>
           </a:bodyPr>
           <a:lstStyle/>
           <a:p>
             <a:pPr>
-              <a:spcBef>
-                <a:spcPts val="0"/>
-              </a:spcBef>
-              <a:defRPr sz="2000" b="1">
-                <a:solidFill>
-                  <a:srgbClr val="E60012"/>
+              <a:defRPr sz="3200" b="1">
+                <a:solidFill>
+                  <a:srgbClr val="C81E1E"/>
                 </a:solidFill>
                 <a:latin typeface="Meiryo"/>
               </a:defRPr>
             </a:pPr>
             <a:r>
-              <a:t>■ コンセプト</a:t>
-            </a:r>
-          </a:p>
+              <a:t>1. 本MTGの位置付け</a:t>
+            </a:r>
+          </a:p>
+        </p:txBody>
+      </p:sp>
+      <p:sp>
+        <p:nvSpPr>
+          <p:cNvPr id="5" name="Rounded Rectangle 4"/>
+          <p:cNvSpPr/>
+          <p:nvPr/>
+        </p:nvSpPr>
+        <p:spPr>
+          <a:xfrm>
+            <a:off x="457200" y="1005840"/>
+            <a:ext cx="11247120" cy="1188720"/>
+          </a:xfrm>
+          <a:prstGeom prst="roundRect">
+            <a:avLst/>
+          </a:prstGeom>
+          <a:solidFill>
+            <a:srgbClr val="F0F0F0"/>
+          </a:solidFill>
+          <a:ln>
+            <a:solidFill>
+              <a:srgbClr val="C8C8C8"/>
+            </a:solidFill>
+          </a:ln>
+        </p:spPr>
+        <p:style>
+          <a:lnRef idx="1">
+            <a:schemeClr val="accent1"/>
+          </a:lnRef>
+          <a:fillRef idx="3">
+            <a:schemeClr val="accent1"/>
+          </a:fillRef>
+          <a:effectRef idx="2">
+            <a:schemeClr val="accent1"/>
+          </a:effectRef>
+          <a:fontRef idx="minor">
+            <a:schemeClr val="lt1"/>
+          </a:fontRef>
+        </p:style>
+        <p:txBody>
+          <a:bodyPr rtlCol="0" anchor="ctr"/>
+          <a:lstStyle/>
+          <a:p>
+            <a:pPr algn="ctr"/>
+          </a:p>
+        </p:txBody>
+      </p:sp>
+      <p:sp>
+        <p:nvSpPr>
+          <p:cNvPr id="6" name="TextBox 5"/>
+          <p:cNvSpPr txBox="1"/>
+          <p:nvPr/>
+        </p:nvSpPr>
+        <p:spPr>
+          <a:xfrm>
+            <a:off x="731520" y="1143000"/>
+            <a:ext cx="10515600" cy="457200"/>
+          </a:xfrm>
+          <a:prstGeom prst="rect">
+            <a:avLst/>
+          </a:prstGeom>
+          <a:noFill/>
+        </p:spPr>
+        <p:txBody>
+          <a:bodyPr wrap="none">
+            <a:spAutoFit/>
+          </a:bodyPr>
+          <a:lstStyle/>
           <a:p>
             <a:pPr>
-              <a:spcBef>
-                <a:spcPts val="400"/>
-              </a:spcBef>
-              <a:defRPr sz="1800">
+              <a:defRPr sz="2200" b="1">
+                <a:solidFill>
+                  <a:srgbClr val="C81E1E"/>
+                </a:solidFill>
+                <a:latin typeface="Meiryo"/>
+              </a:defRPr>
+            </a:pPr>
+            <a:r>
+              <a:t>コンセプト</a:t>
+            </a:r>
+          </a:p>
+        </p:txBody>
+      </p:sp>
+      <p:sp>
+        <p:nvSpPr>
+          <p:cNvPr id="7" name="TextBox 6"/>
+          <p:cNvSpPr txBox="1"/>
+          <p:nvPr/>
+        </p:nvSpPr>
+        <p:spPr>
+          <a:xfrm>
+            <a:off x="731520" y="1554480"/>
+            <a:ext cx="10515600" cy="548640"/>
+          </a:xfrm>
+          <a:prstGeom prst="rect">
+            <a:avLst/>
+          </a:prstGeom>
+          <a:noFill/>
+        </p:spPr>
+        <p:txBody>
+          <a:bodyPr wrap="none">
+            <a:spAutoFit/>
+          </a:bodyPr>
+          <a:lstStyle/>
+          <a:p>
+            <a:pPr>
+              <a:defRPr sz="2000">
                 <a:solidFill>
                   <a:srgbClr val="000000"/>
                 </a:solidFill>
@@ -5705,31 +6485,116 @@
               </a:defRPr>
             </a:pPr>
             <a:r>
-              <a:t>  共創スタンスでの情報共有・意見交換の場</a:t>
-            </a:r>
-          </a:p>
+              <a:t>共創スタンスでの情報共有・意見交換の場</a:t>
+            </a:r>
+          </a:p>
+        </p:txBody>
+      </p:sp>
+      <p:sp>
+        <p:nvSpPr>
+          <p:cNvPr id="8" name="Rounded Rectangle 7"/>
+          <p:cNvSpPr/>
+          <p:nvPr/>
+        </p:nvSpPr>
+        <p:spPr>
+          <a:xfrm>
+            <a:off x="457200" y="2377440"/>
+            <a:ext cx="11247120" cy="1188720"/>
+          </a:xfrm>
+          <a:prstGeom prst="roundRect">
+            <a:avLst/>
+          </a:prstGeom>
+          <a:solidFill>
+            <a:srgbClr val="F0F0F0"/>
+          </a:solidFill>
+          <a:ln>
+            <a:solidFill>
+              <a:srgbClr val="C8C8C8"/>
+            </a:solidFill>
+          </a:ln>
+        </p:spPr>
+        <p:style>
+          <a:lnRef idx="1">
+            <a:schemeClr val="accent1"/>
+          </a:lnRef>
+          <a:fillRef idx="3">
+            <a:schemeClr val="accent1"/>
+          </a:fillRef>
+          <a:effectRef idx="2">
+            <a:schemeClr val="accent1"/>
+          </a:effectRef>
+          <a:fontRef idx="minor">
+            <a:schemeClr val="lt1"/>
+          </a:fontRef>
+        </p:style>
+        <p:txBody>
+          <a:bodyPr rtlCol="0" anchor="ctr"/>
+          <a:lstStyle/>
+          <a:p>
+            <a:pPr algn="ctr"/>
+          </a:p>
+        </p:txBody>
+      </p:sp>
+      <p:sp>
+        <p:nvSpPr>
+          <p:cNvPr id="9" name="TextBox 8"/>
+          <p:cNvSpPr txBox="1"/>
+          <p:nvPr/>
+        </p:nvSpPr>
+        <p:spPr>
+          <a:xfrm>
+            <a:off x="731520" y="2514600"/>
+            <a:ext cx="10515600" cy="457200"/>
+          </a:xfrm>
+          <a:prstGeom prst="rect">
+            <a:avLst/>
+          </a:prstGeom>
+          <a:noFill/>
+        </p:spPr>
+        <p:txBody>
+          <a:bodyPr wrap="none">
+            <a:spAutoFit/>
+          </a:bodyPr>
+          <a:lstStyle/>
           <a:p>
             <a:pPr>
-              <a:spcBef>
-                <a:spcPts val="1600"/>
-              </a:spcBef>
-              <a:defRPr sz="2000" b="1">
-                <a:solidFill>
-                  <a:srgbClr val="E60012"/>
+              <a:defRPr sz="2200" b="1">
+                <a:solidFill>
+                  <a:srgbClr val="C81E1E"/>
                 </a:solidFill>
                 <a:latin typeface="Meiryo"/>
               </a:defRPr>
             </a:pPr>
             <a:r>
-              <a:t>■ 主な目的①</a:t>
-            </a:r>
-          </a:p>
+              <a:t>目的① STEP0の細分化・確認</a:t>
+            </a:r>
+          </a:p>
+        </p:txBody>
+      </p:sp>
+      <p:sp>
+        <p:nvSpPr>
+          <p:cNvPr id="10" name="TextBox 9"/>
+          <p:cNvSpPr txBox="1"/>
+          <p:nvPr/>
+        </p:nvSpPr>
+        <p:spPr>
+          <a:xfrm>
+            <a:off x="731520" y="2926080"/>
+            <a:ext cx="10515600" cy="548640"/>
+          </a:xfrm>
+          <a:prstGeom prst="rect">
+            <a:avLst/>
+          </a:prstGeom>
+          <a:noFill/>
+        </p:spPr>
+        <p:txBody>
+          <a:bodyPr wrap="none">
+            <a:spAutoFit/>
+          </a:bodyPr>
+          <a:lstStyle/>
           <a:p>
             <a:pPr>
-              <a:spcBef>
-                <a:spcPts val="400"/>
-              </a:spcBef>
-              <a:defRPr sz="1800">
+              <a:defRPr sz="2000">
                 <a:solidFill>
                   <a:srgbClr val="000000"/>
                 </a:solidFill>
@@ -5737,31 +6602,116 @@
               </a:defRPr>
             </a:pPr>
             <a:r>
-              <a:t>  STEP0の細分化・確認：キックオフ時の内容を実運用レベルで再確認</a:t>
-            </a:r>
-          </a:p>
+              <a:t>キックオフ時の内容を実運用レベルで再確認</a:t>
+            </a:r>
+          </a:p>
+        </p:txBody>
+      </p:sp>
+      <p:sp>
+        <p:nvSpPr>
+          <p:cNvPr id="11" name="Rounded Rectangle 10"/>
+          <p:cNvSpPr/>
+          <p:nvPr/>
+        </p:nvSpPr>
+        <p:spPr>
+          <a:xfrm>
+            <a:off x="457200" y="3749039"/>
+            <a:ext cx="11247120" cy="1188720"/>
+          </a:xfrm>
+          <a:prstGeom prst="roundRect">
+            <a:avLst/>
+          </a:prstGeom>
+          <a:solidFill>
+            <a:srgbClr val="F0F0F0"/>
+          </a:solidFill>
+          <a:ln>
+            <a:solidFill>
+              <a:srgbClr val="C8C8C8"/>
+            </a:solidFill>
+          </a:ln>
+        </p:spPr>
+        <p:style>
+          <a:lnRef idx="1">
+            <a:schemeClr val="accent1"/>
+          </a:lnRef>
+          <a:fillRef idx="3">
+            <a:schemeClr val="accent1"/>
+          </a:fillRef>
+          <a:effectRef idx="2">
+            <a:schemeClr val="accent1"/>
+          </a:effectRef>
+          <a:fontRef idx="minor">
+            <a:schemeClr val="lt1"/>
+          </a:fontRef>
+        </p:style>
+        <p:txBody>
+          <a:bodyPr rtlCol="0" anchor="ctr"/>
+          <a:lstStyle/>
+          <a:p>
+            <a:pPr algn="ctr"/>
+          </a:p>
+        </p:txBody>
+      </p:sp>
+      <p:sp>
+        <p:nvSpPr>
+          <p:cNvPr id="12" name="TextBox 11"/>
+          <p:cNvSpPr txBox="1"/>
+          <p:nvPr/>
+        </p:nvSpPr>
+        <p:spPr>
+          <a:xfrm>
+            <a:off x="731520" y="3886200"/>
+            <a:ext cx="10515600" cy="457200"/>
+          </a:xfrm>
+          <a:prstGeom prst="rect">
+            <a:avLst/>
+          </a:prstGeom>
+          <a:noFill/>
+        </p:spPr>
+        <p:txBody>
+          <a:bodyPr wrap="none">
+            <a:spAutoFit/>
+          </a:bodyPr>
+          <a:lstStyle/>
           <a:p>
             <a:pPr>
-              <a:spcBef>
-                <a:spcPts val="1600"/>
-              </a:spcBef>
-              <a:defRPr sz="2000" b="1">
-                <a:solidFill>
-                  <a:srgbClr val="E60012"/>
+              <a:defRPr sz="2200" b="1">
+                <a:solidFill>
+                  <a:srgbClr val="C81E1E"/>
                 </a:solidFill>
                 <a:latin typeface="Meiryo"/>
               </a:defRPr>
             </a:pPr>
             <a:r>
-              <a:t>■ 主な目的②</a:t>
-            </a:r>
-          </a:p>
+              <a:t>目的②「クラブの声を聴く会」</a:t>
+            </a:r>
+          </a:p>
+        </p:txBody>
+      </p:sp>
+      <p:sp>
+        <p:nvSpPr>
+          <p:cNvPr id="13" name="TextBox 12"/>
+          <p:cNvSpPr txBox="1"/>
+          <p:nvPr/>
+        </p:nvSpPr>
+        <p:spPr>
+          <a:xfrm>
+            <a:off x="731520" y="4297679"/>
+            <a:ext cx="10515600" cy="548640"/>
+          </a:xfrm>
+          <a:prstGeom prst="rect">
+            <a:avLst/>
+          </a:prstGeom>
+          <a:noFill/>
+        </p:spPr>
+        <p:txBody>
+          <a:bodyPr wrap="none">
+            <a:spAutoFit/>
+          </a:bodyPr>
+          <a:lstStyle/>
           <a:p>
             <a:pPr>
-              <a:spcBef>
-                <a:spcPts val="400"/>
-              </a:spcBef>
-              <a:defRPr sz="1800">
+              <a:defRPr sz="2000">
                 <a:solidFill>
                   <a:srgbClr val="000000"/>
                 </a:solidFill>
@@ -5769,31 +6719,116 @@
               </a:defRPr>
             </a:pPr>
             <a:r>
-              <a:t>  「クラブの声を聴く会」：現場の課題や要望を吸い上げる</a:t>
-            </a:r>
-          </a:p>
+              <a:t>現場の課題や要望を吸い上げる</a:t>
+            </a:r>
+          </a:p>
+        </p:txBody>
+      </p:sp>
+      <p:sp>
+        <p:nvSpPr>
+          <p:cNvPr id="14" name="Rounded Rectangle 13"/>
+          <p:cNvSpPr/>
+          <p:nvPr/>
+        </p:nvSpPr>
+        <p:spPr>
+          <a:xfrm>
+            <a:off x="457200" y="5120640"/>
+            <a:ext cx="11247120" cy="1188720"/>
+          </a:xfrm>
+          <a:prstGeom prst="roundRect">
+            <a:avLst/>
+          </a:prstGeom>
+          <a:solidFill>
+            <a:srgbClr val="F0F0F0"/>
+          </a:solidFill>
+          <a:ln>
+            <a:solidFill>
+              <a:srgbClr val="C8C8C8"/>
+            </a:solidFill>
+          </a:ln>
+        </p:spPr>
+        <p:style>
+          <a:lnRef idx="1">
+            <a:schemeClr val="accent1"/>
+          </a:lnRef>
+          <a:fillRef idx="3">
+            <a:schemeClr val="accent1"/>
+          </a:fillRef>
+          <a:effectRef idx="2">
+            <a:schemeClr val="accent1"/>
+          </a:effectRef>
+          <a:fontRef idx="minor">
+            <a:schemeClr val="lt1"/>
+          </a:fontRef>
+        </p:style>
+        <p:txBody>
+          <a:bodyPr rtlCol="0" anchor="ctr"/>
+          <a:lstStyle/>
+          <a:p>
+            <a:pPr algn="ctr"/>
+          </a:p>
+        </p:txBody>
+      </p:sp>
+      <p:sp>
+        <p:nvSpPr>
+          <p:cNvPr id="15" name="TextBox 14"/>
+          <p:cNvSpPr txBox="1"/>
+          <p:nvPr/>
+        </p:nvSpPr>
+        <p:spPr>
+          <a:xfrm>
+            <a:off x="731520" y="5257800"/>
+            <a:ext cx="10515600" cy="457200"/>
+          </a:xfrm>
+          <a:prstGeom prst="rect">
+            <a:avLst/>
+          </a:prstGeom>
+          <a:noFill/>
+        </p:spPr>
+        <p:txBody>
+          <a:bodyPr wrap="none">
+            <a:spAutoFit/>
+          </a:bodyPr>
+          <a:lstStyle/>
           <a:p>
             <a:pPr>
-              <a:spcBef>
-                <a:spcPts val="1600"/>
-              </a:spcBef>
-              <a:defRPr sz="2000" b="1">
-                <a:solidFill>
-                  <a:srgbClr val="E60012"/>
+              <a:defRPr sz="2200" b="1">
+                <a:solidFill>
+                  <a:srgbClr val="C81E1E"/>
                 </a:solidFill>
                 <a:latin typeface="Meiryo"/>
               </a:defRPr>
             </a:pPr>
             <a:r>
-              <a:t>■ 主な目的③</a:t>
-            </a:r>
-          </a:p>
+              <a:t>目的③ 標準とフィードバック</a:t>
+            </a:r>
+          </a:p>
+        </p:txBody>
+      </p:sp>
+      <p:sp>
+        <p:nvSpPr>
+          <p:cNvPr id="16" name="TextBox 15"/>
+          <p:cNvSpPr txBox="1"/>
+          <p:nvPr/>
+        </p:nvSpPr>
+        <p:spPr>
+          <a:xfrm>
+            <a:off x="731520" y="5669279"/>
+            <a:ext cx="10515600" cy="548640"/>
+          </a:xfrm>
+          <a:prstGeom prst="rect">
+            <a:avLst/>
+          </a:prstGeom>
+          <a:noFill/>
+        </p:spPr>
+        <p:txBody>
+          <a:bodyPr wrap="none">
+            <a:spAutoFit/>
+          </a:bodyPr>
+          <a:lstStyle/>
           <a:p>
             <a:pPr>
-              <a:spcBef>
-                <a:spcPts val="400"/>
-              </a:spcBef>
-              <a:defRPr sz="1800">
+              <a:defRPr sz="2000">
                 <a:solidFill>
                   <a:srgbClr val="000000"/>
                 </a:solidFill>
@@ -5801,7 +6836,7 @@
               </a:defRPr>
             </a:pPr>
             <a:r>
-              <a:t>  標準とフィードバック：本部の標準オペレーション提示と、現場からのFBを両輪で回す</a:t>
+              <a:t>本部の標準オペレーション提示と、現場からのFBを両輪で回す</a:t>
             </a:r>
           </a:p>
         </p:txBody>
@@ -5832,8 +6867,8 @@
         </p:nvSpPr>
         <p:spPr>
           <a:xfrm>
-            <a:off x="9601200" y="274320"/>
-            <a:ext cx="2286000" cy="457200"/>
+            <a:off x="9418320" y="182880"/>
+            <a:ext cx="2560320" cy="457200"/>
           </a:xfrm>
           <a:prstGeom prst="rect">
             <a:avLst/>
@@ -5848,78 +6883,33 @@
           <a:p>
             <a:pPr algn="r"/>
             <a:r>
-              <a:rPr sz="1800" b="1">
-                <a:solidFill>
-                  <a:srgbClr val="E60012"/>
+              <a:rPr sz="2000" b="1">
+                <a:solidFill>
+                  <a:srgbClr val="C81E1E"/>
                 </a:solidFill>
                 <a:latin typeface="Arial"/>
               </a:rPr>
-              <a:t>Re</a:t>
-            </a:r>
-            <a:r>
-              <a:rPr sz="1800" b="1">
-                <a:solidFill>
-                  <a:srgbClr val="E60012"/>
-                </a:solidFill>
-                <a:latin typeface="Arial"/>
-              </a:rPr>
-              <a:t> RENAISSANCE</a:t>
-            </a:r>
-          </a:p>
-        </p:txBody>
-      </p:sp>
-      <p:sp>
-        <p:nvSpPr>
-          <p:cNvPr id="3" name="TextBox 2"/>
-          <p:cNvSpPr txBox="1"/>
-          <p:nvPr/>
-        </p:nvSpPr>
-        <p:spPr>
-          <a:xfrm>
-            <a:off x="457200" y="457200"/>
-            <a:ext cx="9144000" cy="640080"/>
-          </a:xfrm>
-          <a:prstGeom prst="rect">
-            <a:avLst/>
-          </a:prstGeom>
-          <a:noFill/>
-        </p:spPr>
-        <p:txBody>
-          <a:bodyPr wrap="none">
-            <a:spAutoFit/>
-          </a:bodyPr>
-          <a:lstStyle/>
-          <a:p>
-            <a:pPr>
-              <a:defRPr sz="2800" b="1">
-                <a:solidFill>
-                  <a:srgbClr val="000000"/>
-                </a:solidFill>
-                <a:latin typeface="Meiryo"/>
-              </a:defRPr>
-            </a:pPr>
-            <a:r>
-              <a:t>まとめ・次回アクション</a:t>
-            </a:r>
-          </a:p>
-        </p:txBody>
-      </p:sp>
-      <p:sp>
-        <p:nvSpPr>
-          <p:cNvPr id="4" name="Rectangle 3"/>
+              <a:t>RENAISSANCE</a:t>
+            </a:r>
+          </a:p>
+        </p:txBody>
+      </p:sp>
+      <p:sp>
+        <p:nvSpPr>
+          <p:cNvPr id="3" name="Rectangle 2"/>
           <p:cNvSpPr/>
           <p:nvPr/>
         </p:nvSpPr>
         <p:spPr>
           <a:xfrm>
-            <a:off x="457200" y="1051560"/>
-            <a:ext cx="11247120" cy="38100"/>
+            <a:off x="0" y="685800"/>
+            <a:ext cx="12191695" cy="50800"/>
           </a:xfrm>
           <a:prstGeom prst="rect">
             <a:avLst/>
           </a:prstGeom>
           <a:solidFill>
-            <a:srgbClr val="E60012"/>
+            <a:srgbClr val="C81E1E"/>
           </a:solidFill>
           <a:ln>
             <a:noFill/>
@@ -5949,14 +6939,93 @@
       </p:sp>
       <p:sp>
         <p:nvSpPr>
-          <p:cNvPr id="5" name="TextBox 4"/>
-          <p:cNvSpPr txBox="1"/>
-          <p:nvPr/>
-        </p:nvSpPr>
-        <p:spPr>
-          <a:xfrm>
-            <a:off x="640080" y="1371600"/>
-            <a:ext cx="10972800" cy="5029200"/>
+          <p:cNvPr id="4" name="TextBox 3"/>
+          <p:cNvSpPr txBox="1"/>
+          <p:nvPr/>
+        </p:nvSpPr>
+        <p:spPr>
+          <a:xfrm>
+            <a:off x="457200" y="137160"/>
+            <a:ext cx="8686800" cy="548640"/>
+          </a:xfrm>
+          <a:prstGeom prst="rect">
+            <a:avLst/>
+          </a:prstGeom>
+          <a:noFill/>
+        </p:spPr>
+        <p:txBody>
+          <a:bodyPr wrap="none">
+            <a:spAutoFit/>
+          </a:bodyPr>
+          <a:lstStyle/>
+          <a:p>
+            <a:pPr>
+              <a:defRPr sz="3200" b="1">
+                <a:solidFill>
+                  <a:srgbClr val="C81E1E"/>
+                </a:solidFill>
+                <a:latin typeface="Meiryo"/>
+              </a:defRPr>
+            </a:pPr>
+            <a:r>
+              <a:t>まとめ・次回アクション</a:t>
+            </a:r>
+          </a:p>
+        </p:txBody>
+      </p:sp>
+      <p:sp>
+        <p:nvSpPr>
+          <p:cNvPr id="5" name="Rounded Rectangle 4"/>
+          <p:cNvSpPr/>
+          <p:nvPr/>
+        </p:nvSpPr>
+        <p:spPr>
+          <a:xfrm>
+            <a:off x="914400" y="1371600"/>
+            <a:ext cx="10332720" cy="2011680"/>
+          </a:xfrm>
+          <a:prstGeom prst="roundRect">
+            <a:avLst/>
+          </a:prstGeom>
+          <a:solidFill>
+            <a:srgbClr val="C81E1E"/>
+          </a:solidFill>
+          <a:ln>
+            <a:noFill/>
+          </a:ln>
+        </p:spPr>
+        <p:style>
+          <a:lnRef idx="1">
+            <a:schemeClr val="accent1"/>
+          </a:lnRef>
+          <a:fillRef idx="3">
+            <a:schemeClr val="accent1"/>
+          </a:fillRef>
+          <a:effectRef idx="2">
+            <a:schemeClr val="accent1"/>
+          </a:effectRef>
+          <a:fontRef idx="minor">
+            <a:schemeClr val="lt1"/>
+          </a:fontRef>
+        </p:style>
+        <p:txBody>
+          <a:bodyPr rtlCol="0" anchor="ctr"/>
+          <a:lstStyle/>
+          <a:p>
+            <a:pPr algn="ctr"/>
+          </a:p>
+        </p:txBody>
+      </p:sp>
+      <p:sp>
+        <p:nvSpPr>
+          <p:cNvPr id="6" name="TextBox 5"/>
+          <p:cNvSpPr txBox="1"/>
+          <p:nvPr/>
+        </p:nvSpPr>
+        <p:spPr>
+          <a:xfrm>
+            <a:off x="1188720" y="1828800"/>
+            <a:ext cx="9784080" cy="1371600"/>
           </a:xfrm>
           <a:prstGeom prst="rect">
             <a:avLst/>
@@ -5969,99 +7038,124 @@
           </a:bodyPr>
           <a:lstStyle/>
           <a:p>
+            <a:pPr algn="ctr">
+              <a:defRPr sz="2800" b="1">
+                <a:solidFill>
+                  <a:srgbClr val="FFFFFF"/>
+                </a:solidFill>
+                <a:latin typeface="Meiryo"/>
+              </a:defRPr>
+            </a:pPr>
+            <a:r>
+              <a:t>本日の決定事項を確認し、次回までに実行</a:t>
+            </a:r>
+          </a:p>
+        </p:txBody>
+      </p:sp>
+      <p:sp>
+        <p:nvSpPr>
+          <p:cNvPr id="7" name="TextBox 6"/>
+          <p:cNvSpPr txBox="1"/>
+          <p:nvPr/>
+        </p:nvSpPr>
+        <p:spPr>
+          <a:xfrm>
+            <a:off x="1371600" y="3657600"/>
+            <a:ext cx="9418320" cy="640080"/>
+          </a:xfrm>
+          <a:prstGeom prst="rect">
+            <a:avLst/>
+          </a:prstGeom>
+          <a:noFill/>
+        </p:spPr>
+        <p:txBody>
+          <a:bodyPr wrap="none">
+            <a:spAutoFit/>
+          </a:bodyPr>
+          <a:lstStyle/>
+          <a:p>
             <a:pPr>
-              <a:spcBef>
-                <a:spcPts val="800"/>
-              </a:spcBef>
-              <a:defRPr sz="1800" b="0">
-                <a:solidFill>
-                  <a:srgbClr val="000000"/>
+              <a:defRPr sz="2200">
+                <a:solidFill>
+                  <a:srgbClr val="505050"/>
                 </a:solidFill>
                 <a:latin typeface="Meiryo"/>
               </a:defRPr>
             </a:pPr>
             <a:r>
-              <a:t>• 本日の決定事項の振り返り</a:t>
-            </a:r>
-          </a:p>
+              <a:t>✓ シフト修正：2月シフトより反映</a:t>
+            </a:r>
+          </a:p>
+        </p:txBody>
+      </p:sp>
+      <p:sp>
+        <p:nvSpPr>
+          <p:cNvPr id="8" name="TextBox 7"/>
+          <p:cNvSpPr txBox="1"/>
+          <p:nvPr/>
+        </p:nvSpPr>
+        <p:spPr>
+          <a:xfrm>
+            <a:off x="1371600" y="4389120"/>
+            <a:ext cx="9418320" cy="640080"/>
+          </a:xfrm>
+          <a:prstGeom prst="rect">
+            <a:avLst/>
+          </a:prstGeom>
+          <a:noFill/>
+        </p:spPr>
+        <p:txBody>
+          <a:bodyPr wrap="none">
+            <a:spAutoFit/>
+          </a:bodyPr>
+          <a:lstStyle/>
           <a:p>
             <a:pPr>
-              <a:spcBef>
-                <a:spcPts val="800"/>
-              </a:spcBef>
-              <a:defRPr sz="1800" b="0">
-                <a:solidFill>
-                  <a:srgbClr val="000000"/>
+              <a:defRPr sz="2200">
+                <a:solidFill>
+                  <a:srgbClr val="505050"/>
                 </a:solidFill>
                 <a:latin typeface="Meiryo"/>
               </a:defRPr>
             </a:pPr>
             <a:r>
-              <a:t>• 次回までのToDo確認</a:t>
-            </a:r>
-          </a:p>
+              <a:t>✓ メンテナンス期限：1月末まで</a:t>
+            </a:r>
+          </a:p>
+        </p:txBody>
+      </p:sp>
+      <p:sp>
+        <p:nvSpPr>
+          <p:cNvPr id="9" name="TextBox 8"/>
+          <p:cNvSpPr txBox="1"/>
+          <p:nvPr/>
+        </p:nvSpPr>
+        <p:spPr>
+          <a:xfrm>
+            <a:off x="1371600" y="5120640"/>
+            <a:ext cx="9418320" cy="640080"/>
+          </a:xfrm>
+          <a:prstGeom prst="rect">
+            <a:avLst/>
+          </a:prstGeom>
+          <a:noFill/>
+        </p:spPr>
+        <p:txBody>
+          <a:bodyPr wrap="none">
+            <a:spAutoFit/>
+          </a:bodyPr>
+          <a:lstStyle/>
           <a:p>
             <a:pPr>
-              <a:spcBef>
-                <a:spcPts val="1200"/>
-              </a:spcBef>
-              <a:defRPr sz="2000" b="1">
-                <a:solidFill>
-                  <a:srgbClr val="E60012"/>
+              <a:defRPr sz="2200">
+                <a:solidFill>
+                  <a:srgbClr val="505050"/>
                 </a:solidFill>
                 <a:latin typeface="Meiryo"/>
               </a:defRPr>
             </a:pPr>
             <a:r>
-              <a:t>特に重要な期限</a:t>
-            </a:r>
-          </a:p>
-          <a:p>
-            <a:pPr lvl="1">
-              <a:spcBef>
-                <a:spcPts val="600"/>
-              </a:spcBef>
-              <a:defRPr sz="1800">
-                <a:solidFill>
-                  <a:srgbClr val="000000"/>
-                </a:solidFill>
-                <a:latin typeface="Meiryo"/>
-              </a:defRPr>
-            </a:pPr>
-            <a:r>
-              <a:t>• シフト修正：2月シフトより反映</a:t>
-            </a:r>
-          </a:p>
-          <a:p>
-            <a:pPr lvl="1">
-              <a:spcBef>
-                <a:spcPts val="600"/>
-              </a:spcBef>
-              <a:defRPr sz="1800">
-                <a:solidFill>
-                  <a:srgbClr val="000000"/>
-                </a:solidFill>
-                <a:latin typeface="Meiryo"/>
-              </a:defRPr>
-            </a:pPr>
-            <a:r>
-              <a:t>• メンテナンス期限：1月末まで</a:t>
-            </a:r>
-          </a:p>
-          <a:p>
-            <a:pPr lvl="1">
-              <a:spcBef>
-                <a:spcPts val="600"/>
-              </a:spcBef>
-              <a:defRPr sz="1800">
-                <a:solidFill>
-                  <a:srgbClr val="000000"/>
-                </a:solidFill>
-                <a:latin typeface="Meiryo"/>
-              </a:defRPr>
-            </a:pPr>
-            <a:r>
-              <a:t>• 帳票格納：毎月15日</a:t>
+              <a:t>✓ 帳票格納：毎月15日</a:t>
             </a:r>
           </a:p>
         </p:txBody>
@@ -6092,8 +7186,8 @@
         </p:nvSpPr>
         <p:spPr>
           <a:xfrm>
-            <a:off x="9601200" y="274320"/>
-            <a:ext cx="2286000" cy="457200"/>
+            <a:off x="9418320" y="182880"/>
+            <a:ext cx="2560320" cy="457200"/>
           </a:xfrm>
           <a:prstGeom prst="rect">
             <a:avLst/>
@@ -6108,78 +7202,33 @@
           <a:p>
             <a:pPr algn="r"/>
             <a:r>
-              <a:rPr sz="1800" b="1">
-                <a:solidFill>
-                  <a:srgbClr val="E60012"/>
+              <a:rPr sz="2000" b="1">
+                <a:solidFill>
+                  <a:srgbClr val="C81E1E"/>
                 </a:solidFill>
                 <a:latin typeface="Arial"/>
               </a:rPr>
-              <a:t>Re</a:t>
-            </a:r>
-            <a:r>
-              <a:rPr sz="1800" b="1">
-                <a:solidFill>
-                  <a:srgbClr val="E60012"/>
-                </a:solidFill>
-                <a:latin typeface="Arial"/>
-              </a:rPr>
-              <a:t> RENAISSANCE</a:t>
-            </a:r>
-          </a:p>
-        </p:txBody>
-      </p:sp>
-      <p:sp>
-        <p:nvSpPr>
-          <p:cNvPr id="3" name="TextBox 2"/>
-          <p:cNvSpPr txBox="1"/>
-          <p:nvPr/>
-        </p:nvSpPr>
-        <p:spPr>
-          <a:xfrm>
-            <a:off x="457200" y="457200"/>
-            <a:ext cx="9144000" cy="640080"/>
-          </a:xfrm>
-          <a:prstGeom prst="rect">
-            <a:avLst/>
-          </a:prstGeom>
-          <a:noFill/>
-        </p:spPr>
-        <p:txBody>
-          <a:bodyPr wrap="none">
-            <a:spAutoFit/>
-          </a:bodyPr>
-          <a:lstStyle/>
-          <a:p>
-            <a:pPr>
-              <a:defRPr sz="2800" b="1">
-                <a:solidFill>
-                  <a:srgbClr val="000000"/>
-                </a:solidFill>
-                <a:latin typeface="Meiryo"/>
-              </a:defRPr>
-            </a:pPr>
-            <a:r>
-              <a:t>2. 本日のゴール（終了時の状態）</a:t>
-            </a:r>
-          </a:p>
-        </p:txBody>
-      </p:sp>
-      <p:sp>
-        <p:nvSpPr>
-          <p:cNvPr id="4" name="Rectangle 3"/>
+              <a:t>RENAISSANCE</a:t>
+            </a:r>
+          </a:p>
+        </p:txBody>
+      </p:sp>
+      <p:sp>
+        <p:nvSpPr>
+          <p:cNvPr id="3" name="Rectangle 2"/>
           <p:cNvSpPr/>
           <p:nvPr/>
         </p:nvSpPr>
         <p:spPr>
           <a:xfrm>
-            <a:off x="457200" y="1051560"/>
-            <a:ext cx="11247120" cy="38100"/>
+            <a:off x="0" y="685800"/>
+            <a:ext cx="12191695" cy="50800"/>
           </a:xfrm>
           <a:prstGeom prst="rect">
             <a:avLst/>
           </a:prstGeom>
           <a:solidFill>
-            <a:srgbClr val="E60012"/>
+            <a:srgbClr val="C81E1E"/>
           </a:solidFill>
           <a:ln>
             <a:noFill/>
@@ -6209,14 +7258,93 @@
       </p:sp>
       <p:sp>
         <p:nvSpPr>
-          <p:cNvPr id="5" name="TextBox 4"/>
-          <p:cNvSpPr txBox="1"/>
-          <p:nvPr/>
-        </p:nvSpPr>
-        <p:spPr>
-          <a:xfrm>
-            <a:off x="640080" y="1371600"/>
-            <a:ext cx="10972800" cy="5029200"/>
+          <p:cNvPr id="4" name="TextBox 3"/>
+          <p:cNvSpPr txBox="1"/>
+          <p:nvPr/>
+        </p:nvSpPr>
+        <p:spPr>
+          <a:xfrm>
+            <a:off x="457200" y="137160"/>
+            <a:ext cx="8686800" cy="548640"/>
+          </a:xfrm>
+          <a:prstGeom prst="rect">
+            <a:avLst/>
+          </a:prstGeom>
+          <a:noFill/>
+        </p:spPr>
+        <p:txBody>
+          <a:bodyPr wrap="none">
+            <a:spAutoFit/>
+          </a:bodyPr>
+          <a:lstStyle/>
+          <a:p>
+            <a:pPr>
+              <a:defRPr sz="3200" b="1">
+                <a:solidFill>
+                  <a:srgbClr val="C81E1E"/>
+                </a:solidFill>
+                <a:latin typeface="Meiryo"/>
+              </a:defRPr>
+            </a:pPr>
+            <a:r>
+              <a:t>2. 本日のゴール（終了時の状態）</a:t>
+            </a:r>
+          </a:p>
+        </p:txBody>
+      </p:sp>
+      <p:sp>
+        <p:nvSpPr>
+          <p:cNvPr id="5" name="Rounded Rectangle 4"/>
+          <p:cNvSpPr/>
+          <p:nvPr/>
+        </p:nvSpPr>
+        <p:spPr>
+          <a:xfrm>
+            <a:off x="914400" y="1371600"/>
+            <a:ext cx="10332720" cy="2011680"/>
+          </a:xfrm>
+          <a:prstGeom prst="roundRect">
+            <a:avLst/>
+          </a:prstGeom>
+          <a:solidFill>
+            <a:srgbClr val="C81E1E"/>
+          </a:solidFill>
+          <a:ln>
+            <a:noFill/>
+          </a:ln>
+        </p:spPr>
+        <p:style>
+          <a:lnRef idx="1">
+            <a:schemeClr val="accent1"/>
+          </a:lnRef>
+          <a:fillRef idx="3">
+            <a:schemeClr val="accent1"/>
+          </a:fillRef>
+          <a:effectRef idx="2">
+            <a:schemeClr val="accent1"/>
+          </a:effectRef>
+          <a:fontRef idx="minor">
+            <a:schemeClr val="lt1"/>
+          </a:fontRef>
+        </p:style>
+        <p:txBody>
+          <a:bodyPr rtlCol="0" anchor="ctr"/>
+          <a:lstStyle/>
+          <a:p>
+            <a:pPr algn="ctr"/>
+          </a:p>
+        </p:txBody>
+      </p:sp>
+      <p:sp>
+        <p:nvSpPr>
+          <p:cNvPr id="6" name="TextBox 5"/>
+          <p:cNvSpPr txBox="1"/>
+          <p:nvPr/>
+        </p:nvSpPr>
+        <p:spPr>
+          <a:xfrm>
+            <a:off x="1188720" y="1828800"/>
+            <a:ext cx="9784080" cy="1371600"/>
           </a:xfrm>
           <a:prstGeom prst="rect">
             <a:avLst/>
@@ -6229,111 +7357,92 @@
           </a:bodyPr>
           <a:lstStyle/>
           <a:p>
+            <a:pPr algn="ctr">
+              <a:defRPr sz="2800" b="1">
+                <a:solidFill>
+                  <a:srgbClr val="FFFFFF"/>
+                </a:solidFill>
+                <a:latin typeface="Meiryo"/>
+              </a:defRPr>
+            </a:pPr>
+            <a:r>
+              <a:t>「2月の行動計画（シフト修正案含む）」が提出され、</a:t>
+            </a:r>
+            <a:br/>
+            <a:r>
+              <a:t>コミットメントが得られている状態</a:t>
+            </a:r>
+          </a:p>
+        </p:txBody>
+      </p:sp>
+      <p:sp>
+        <p:nvSpPr>
+          <p:cNvPr id="7" name="TextBox 6"/>
+          <p:cNvSpPr txBox="1"/>
+          <p:nvPr/>
+        </p:nvSpPr>
+        <p:spPr>
+          <a:xfrm>
+            <a:off x="1371600" y="3657600"/>
+            <a:ext cx="9418320" cy="640080"/>
+          </a:xfrm>
+          <a:prstGeom prst="rect">
+            <a:avLst/>
+          </a:prstGeom>
+          <a:noFill/>
+        </p:spPr>
+        <p:txBody>
+          <a:bodyPr wrap="none">
+            <a:spAutoFit/>
+          </a:bodyPr>
+          <a:lstStyle/>
+          <a:p>
             <a:pPr>
-              <a:spcBef>
-                <a:spcPts val="0"/>
-              </a:spcBef>
-              <a:defRPr sz="2000" b="1">
-                <a:solidFill>
-                  <a:srgbClr val="E60012"/>
+              <a:defRPr sz="2200">
+                <a:solidFill>
+                  <a:srgbClr val="505050"/>
                 </a:solidFill>
                 <a:latin typeface="Meiryo"/>
               </a:defRPr>
             </a:pPr>
             <a:r>
-              <a:t>■ 決定事項のコミット</a:t>
-            </a:r>
-          </a:p>
+              <a:t>✓ シフト適正化の履行：「適正シフト」の定義を理解し、次月以降の作成フロー変更を合意</a:t>
+            </a:r>
+          </a:p>
+        </p:txBody>
+      </p:sp>
+      <p:sp>
+        <p:nvSpPr>
+          <p:cNvPr id="8" name="TextBox 7"/>
+          <p:cNvSpPr txBox="1"/>
+          <p:nvPr/>
+        </p:nvSpPr>
+        <p:spPr>
+          <a:xfrm>
+            <a:off x="1371600" y="4389120"/>
+            <a:ext cx="9418320" cy="640080"/>
+          </a:xfrm>
+          <a:prstGeom prst="rect">
+            <a:avLst/>
+          </a:prstGeom>
+          <a:noFill/>
+        </p:spPr>
+        <p:txBody>
+          <a:bodyPr wrap="none">
+            <a:spAutoFit/>
+          </a:bodyPr>
+          <a:lstStyle/>
           <a:p>
             <a:pPr>
-              <a:spcBef>
-                <a:spcPts val="400"/>
-              </a:spcBef>
-              <a:defRPr sz="1800">
-                <a:solidFill>
-                  <a:srgbClr val="000000"/>
+              <a:defRPr sz="2200">
+                <a:solidFill>
+                  <a:srgbClr val="505050"/>
                 </a:solidFill>
                 <a:latin typeface="Meiryo"/>
               </a:defRPr>
             </a:pPr>
             <a:r>
-              <a:t>  決定事項に基づき、「2月の行動計画（シフト修正案含む）」が提出され、</a:t>
-            </a:r>
-            <a:br/>
-            <a:r>
-              <a:t>コミットメントが得られている状態を目指す</a:t>
-            </a:r>
-          </a:p>
-          <a:p>
-            <a:pPr>
-              <a:spcBef>
-                <a:spcPts val="1600"/>
-              </a:spcBef>
-              <a:defRPr sz="2000" b="1">
-                <a:solidFill>
-                  <a:srgbClr val="E60012"/>
-                </a:solidFill>
-                <a:latin typeface="Meiryo"/>
-              </a:defRPr>
-            </a:pPr>
-            <a:r>
-              <a:t>■ 実施目的①</a:t>
-            </a:r>
-          </a:p>
-          <a:p>
-            <a:pPr>
-              <a:spcBef>
-                <a:spcPts val="400"/>
-              </a:spcBef>
-              <a:defRPr sz="1800">
-                <a:solidFill>
-                  <a:srgbClr val="000000"/>
-                </a:solidFill>
-                <a:latin typeface="Meiryo"/>
-              </a:defRPr>
-            </a:pPr>
-            <a:r>
-              <a:t>  シフト適正化の履行：「適正シフト」の定義を理解し、</a:t>
-            </a:r>
-            <a:br/>
-            <a:r>
-              <a:t>次月以降の作成フロー変更を合意する</a:t>
-            </a:r>
-          </a:p>
-          <a:p>
-            <a:pPr>
-              <a:spcBef>
-                <a:spcPts val="1600"/>
-              </a:spcBef>
-              <a:defRPr sz="2000" b="1">
-                <a:solidFill>
-                  <a:srgbClr val="E60012"/>
-                </a:solidFill>
-                <a:latin typeface="Meiryo"/>
-              </a:defRPr>
-            </a:pPr>
-            <a:r>
-              <a:t>■ 実施目的②</a:t>
-            </a:r>
-          </a:p>
-          <a:p>
-            <a:pPr>
-              <a:spcBef>
-                <a:spcPts val="400"/>
-              </a:spcBef>
-              <a:defRPr sz="1800">
-                <a:solidFill>
-                  <a:srgbClr val="000000"/>
-                </a:solidFill>
-                <a:latin typeface="Meiryo"/>
-              </a:defRPr>
-            </a:pPr>
-            <a:r>
-              <a:t>  標準ルールの適用：統一ルール（1/15決定事項）の</a:t>
-            </a:r>
-            <a:br/>
-            <a:r>
-              <a:t>認識ズレ（自己流）を解消する</a:t>
+              <a:t>✓ 標準ルールの適用：統一ルール（1/15決定事項）の認識ズレを解消</a:t>
             </a:r>
           </a:p>
         </p:txBody>
@@ -6364,8 +7473,8 @@
         </p:nvSpPr>
         <p:spPr>
           <a:xfrm>
-            <a:off x="9601200" y="274320"/>
-            <a:ext cx="2286000" cy="457200"/>
+            <a:off x="9418320" y="182880"/>
+            <a:ext cx="2560320" cy="457200"/>
           </a:xfrm>
           <a:prstGeom prst="rect">
             <a:avLst/>
@@ -6380,78 +7489,33 @@
           <a:p>
             <a:pPr algn="r"/>
             <a:r>
-              <a:rPr sz="1800" b="1">
-                <a:solidFill>
-                  <a:srgbClr val="E60012"/>
+              <a:rPr sz="2000" b="1">
+                <a:solidFill>
+                  <a:srgbClr val="C81E1E"/>
                 </a:solidFill>
                 <a:latin typeface="Arial"/>
               </a:rPr>
-              <a:t>Re</a:t>
-            </a:r>
-            <a:r>
-              <a:rPr sz="1800" b="1">
-                <a:solidFill>
-                  <a:srgbClr val="E60012"/>
-                </a:solidFill>
-                <a:latin typeface="Arial"/>
-              </a:rPr>
-              <a:t> RENAISSANCE</a:t>
-            </a:r>
-          </a:p>
-        </p:txBody>
-      </p:sp>
-      <p:sp>
-        <p:nvSpPr>
-          <p:cNvPr id="3" name="TextBox 2"/>
-          <p:cNvSpPr txBox="1"/>
-          <p:nvPr/>
-        </p:nvSpPr>
-        <p:spPr>
-          <a:xfrm>
-            <a:off x="457200" y="457200"/>
-            <a:ext cx="9144000" cy="640080"/>
-          </a:xfrm>
-          <a:prstGeom prst="rect">
-            <a:avLst/>
-          </a:prstGeom>
-          <a:noFill/>
-        </p:spPr>
-        <p:txBody>
-          <a:bodyPr wrap="none">
-            <a:spAutoFit/>
-          </a:bodyPr>
-          <a:lstStyle/>
-          <a:p>
-            <a:pPr>
-              <a:defRPr sz="2800" b="1">
-                <a:solidFill>
-                  <a:srgbClr val="000000"/>
-                </a:solidFill>
-                <a:latin typeface="Meiryo"/>
-              </a:defRPr>
-            </a:pPr>
-            <a:r>
-              <a:t>3. アジェンダ</a:t>
-            </a:r>
-          </a:p>
-        </p:txBody>
-      </p:sp>
-      <p:sp>
-        <p:nvSpPr>
-          <p:cNvPr id="4" name="Rectangle 3"/>
+              <a:t>RENAISSANCE</a:t>
+            </a:r>
+          </a:p>
+        </p:txBody>
+      </p:sp>
+      <p:sp>
+        <p:nvSpPr>
+          <p:cNvPr id="3" name="Rectangle 2"/>
           <p:cNvSpPr/>
           <p:nvPr/>
         </p:nvSpPr>
         <p:spPr>
           <a:xfrm>
-            <a:off x="457200" y="1051560"/>
-            <a:ext cx="11247120" cy="38100"/>
+            <a:off x="0" y="685800"/>
+            <a:ext cx="12191695" cy="50800"/>
           </a:xfrm>
           <a:prstGeom prst="rect">
             <a:avLst/>
           </a:prstGeom>
           <a:solidFill>
-            <a:srgbClr val="E60012"/>
+            <a:srgbClr val="C81E1E"/>
           </a:solidFill>
           <a:ln>
             <a:noFill/>
@@ -6481,20 +7545,56 @@
       </p:sp>
       <p:sp>
         <p:nvSpPr>
+          <p:cNvPr id="4" name="TextBox 3"/>
+          <p:cNvSpPr txBox="1"/>
+          <p:nvPr/>
+        </p:nvSpPr>
+        <p:spPr>
+          <a:xfrm>
+            <a:off x="457200" y="137160"/>
+            <a:ext cx="8686800" cy="548640"/>
+          </a:xfrm>
+          <a:prstGeom prst="rect">
+            <a:avLst/>
+          </a:prstGeom>
+          <a:noFill/>
+        </p:spPr>
+        <p:txBody>
+          <a:bodyPr wrap="none">
+            <a:spAutoFit/>
+          </a:bodyPr>
+          <a:lstStyle/>
+          <a:p>
+            <a:pPr>
+              <a:defRPr sz="3200" b="1">
+                <a:solidFill>
+                  <a:srgbClr val="C81E1E"/>
+                </a:solidFill>
+                <a:latin typeface="Meiryo"/>
+              </a:defRPr>
+            </a:pPr>
+            <a:r>
+              <a:t>3. アジェンダ</a:t>
+            </a:r>
+          </a:p>
+        </p:txBody>
+      </p:sp>
+      <p:sp>
+        <p:nvSpPr>
           <p:cNvPr id="5" name="Oval 4"/>
           <p:cNvSpPr/>
           <p:nvPr/>
         </p:nvSpPr>
         <p:spPr>
           <a:xfrm>
-            <a:off x="731520" y="1371600"/>
-            <a:ext cx="457200" cy="457200"/>
+            <a:off x="548640" y="1097280"/>
+            <a:ext cx="548640" cy="548640"/>
           </a:xfrm>
           <a:prstGeom prst="ellipse">
             <a:avLst/>
           </a:prstGeom>
           <a:solidFill>
-            <a:srgbClr val="E60012"/>
+            <a:srgbClr val="C81E1E"/>
           </a:solidFill>
           <a:ln>
             <a:noFill/>
@@ -6530,8 +7630,8 @@
         </p:nvSpPr>
         <p:spPr>
           <a:xfrm>
-            <a:off x="731520" y="1417320"/>
-            <a:ext cx="457200" cy="365760"/>
+            <a:off x="548640" y="1170432"/>
+            <a:ext cx="548640" cy="457200"/>
           </a:xfrm>
           <a:prstGeom prst="rect">
             <a:avLst/>
@@ -6545,7 +7645,7 @@
           <a:lstStyle/>
           <a:p>
             <a:pPr algn="ctr">
-              <a:defRPr sz="1800" b="1">
+              <a:defRPr sz="2200" b="1">
                 <a:solidFill>
                   <a:srgbClr val="FFFFFF"/>
                 </a:solidFill>
@@ -6566,8 +7666,8 @@
         </p:nvSpPr>
         <p:spPr>
           <a:xfrm>
-            <a:off x="1371600" y="1417320"/>
-            <a:ext cx="9144000" cy="457200"/>
+            <a:off x="1280160" y="1143000"/>
+            <a:ext cx="10058400" cy="548640"/>
           </a:xfrm>
           <a:prstGeom prst="rect">
             <a:avLst/>
@@ -6581,7 +7681,7 @@
           <a:lstStyle/>
           <a:p>
             <a:pPr>
-              <a:defRPr sz="2000">
+              <a:defRPr sz="2400">
                 <a:solidFill>
                   <a:srgbClr val="000000"/>
                 </a:solidFill>
@@ -6602,14 +7702,14 @@
         </p:nvSpPr>
         <p:spPr>
           <a:xfrm>
-            <a:off x="731520" y="2103120"/>
-            <a:ext cx="457200" cy="457200"/>
+            <a:off x="548640" y="2011680"/>
+            <a:ext cx="548640" cy="548640"/>
           </a:xfrm>
           <a:prstGeom prst="ellipse">
             <a:avLst/>
           </a:prstGeom>
           <a:solidFill>
-            <a:srgbClr val="E60012"/>
+            <a:srgbClr val="C81E1E"/>
           </a:solidFill>
           <a:ln>
             <a:noFill/>
@@ -6645,8 +7745,8 @@
         </p:nvSpPr>
         <p:spPr>
           <a:xfrm>
-            <a:off x="731520" y="2148839"/>
-            <a:ext cx="457200" cy="365760"/>
+            <a:off x="548640" y="2084832"/>
+            <a:ext cx="548640" cy="457200"/>
           </a:xfrm>
           <a:prstGeom prst="rect">
             <a:avLst/>
@@ -6660,7 +7760,7 @@
           <a:lstStyle/>
           <a:p>
             <a:pPr algn="ctr">
-              <a:defRPr sz="1800" b="1">
+              <a:defRPr sz="2200" b="1">
                 <a:solidFill>
                   <a:srgbClr val="FFFFFF"/>
                 </a:solidFill>
@@ -6681,8 +7781,8 @@
         </p:nvSpPr>
         <p:spPr>
           <a:xfrm>
-            <a:off x="1371600" y="2148839"/>
-            <a:ext cx="9144000" cy="457200"/>
+            <a:off x="1280160" y="2057400"/>
+            <a:ext cx="10058400" cy="548640"/>
           </a:xfrm>
           <a:prstGeom prst="rect">
             <a:avLst/>
@@ -6696,7 +7796,7 @@
           <a:lstStyle/>
           <a:p>
             <a:pPr>
-              <a:defRPr sz="2000">
+              <a:defRPr sz="2400">
                 <a:solidFill>
                   <a:srgbClr val="000000"/>
                 </a:solidFill>
@@ -6717,14 +7817,14 @@
         </p:nvSpPr>
         <p:spPr>
           <a:xfrm>
-            <a:off x="731520" y="2834640"/>
-            <a:ext cx="457200" cy="457200"/>
+            <a:off x="548640" y="2926080"/>
+            <a:ext cx="548640" cy="548640"/>
           </a:xfrm>
           <a:prstGeom prst="ellipse">
             <a:avLst/>
           </a:prstGeom>
           <a:solidFill>
-            <a:srgbClr val="E60012"/>
+            <a:srgbClr val="C81E1E"/>
           </a:solidFill>
           <a:ln>
             <a:noFill/>
@@ -6760,8 +7860,8 @@
         </p:nvSpPr>
         <p:spPr>
           <a:xfrm>
-            <a:off x="731520" y="2880360"/>
-            <a:ext cx="457200" cy="365760"/>
+            <a:off x="548640" y="2999232"/>
+            <a:ext cx="548640" cy="457200"/>
           </a:xfrm>
           <a:prstGeom prst="rect">
             <a:avLst/>
@@ -6775,7 +7875,7 @@
           <a:lstStyle/>
           <a:p>
             <a:pPr algn="ctr">
-              <a:defRPr sz="1800" b="1">
+              <a:defRPr sz="2200" b="1">
                 <a:solidFill>
                   <a:srgbClr val="FFFFFF"/>
                 </a:solidFill>
@@ -6796,8 +7896,8 @@
         </p:nvSpPr>
         <p:spPr>
           <a:xfrm>
-            <a:off x="1371600" y="2880360"/>
-            <a:ext cx="9144000" cy="457200"/>
+            <a:off x="1280160" y="2971800"/>
+            <a:ext cx="10058400" cy="548640"/>
           </a:xfrm>
           <a:prstGeom prst="rect">
             <a:avLst/>
@@ -6811,7 +7911,7 @@
           <a:lstStyle/>
           <a:p>
             <a:pPr>
-              <a:defRPr sz="2000">
+              <a:defRPr sz="2400">
                 <a:solidFill>
                   <a:srgbClr val="000000"/>
                 </a:solidFill>
@@ -6832,14 +7932,14 @@
         </p:nvSpPr>
         <p:spPr>
           <a:xfrm>
-            <a:off x="731520" y="3566160"/>
-            <a:ext cx="457200" cy="457200"/>
+            <a:off x="548640" y="3840480"/>
+            <a:ext cx="548640" cy="548640"/>
           </a:xfrm>
           <a:prstGeom prst="ellipse">
             <a:avLst/>
           </a:prstGeom>
           <a:solidFill>
-            <a:srgbClr val="E60012"/>
+            <a:srgbClr val="C81E1E"/>
           </a:solidFill>
           <a:ln>
             <a:noFill/>
@@ -6875,8 +7975,8 @@
         </p:nvSpPr>
         <p:spPr>
           <a:xfrm>
-            <a:off x="731520" y="3611880"/>
-            <a:ext cx="457200" cy="365760"/>
+            <a:off x="548640" y="3913632"/>
+            <a:ext cx="548640" cy="457200"/>
           </a:xfrm>
           <a:prstGeom prst="rect">
             <a:avLst/>
@@ -6890,7 +7990,7 @@
           <a:lstStyle/>
           <a:p>
             <a:pPr algn="ctr">
-              <a:defRPr sz="1800" b="1">
+              <a:defRPr sz="2200" b="1">
                 <a:solidFill>
                   <a:srgbClr val="FFFFFF"/>
                 </a:solidFill>
@@ -6911,8 +8011,8 @@
         </p:nvSpPr>
         <p:spPr>
           <a:xfrm>
-            <a:off x="1371600" y="3611880"/>
-            <a:ext cx="9144000" cy="457200"/>
+            <a:off x="1280160" y="3886200"/>
+            <a:ext cx="10058400" cy="548640"/>
           </a:xfrm>
           <a:prstGeom prst="rect">
             <a:avLst/>
@@ -6926,7 +8026,7 @@
           <a:lstStyle/>
           <a:p>
             <a:pPr>
-              <a:defRPr sz="2000">
+              <a:defRPr sz="2400">
                 <a:solidFill>
                   <a:srgbClr val="000000"/>
                 </a:solidFill>
@@ -6947,14 +8047,14 @@
         </p:nvSpPr>
         <p:spPr>
           <a:xfrm>
-            <a:off x="731520" y="4297680"/>
-            <a:ext cx="457200" cy="457200"/>
+            <a:off x="548640" y="4754880"/>
+            <a:ext cx="548640" cy="548640"/>
           </a:xfrm>
           <a:prstGeom prst="ellipse">
             <a:avLst/>
           </a:prstGeom>
           <a:solidFill>
-            <a:srgbClr val="E60012"/>
+            <a:srgbClr val="C81E1E"/>
           </a:solidFill>
           <a:ln>
             <a:noFill/>
@@ -6990,8 +8090,8 @@
         </p:nvSpPr>
         <p:spPr>
           <a:xfrm>
-            <a:off x="731520" y="4343400"/>
-            <a:ext cx="457200" cy="365760"/>
+            <a:off x="548640" y="4828032"/>
+            <a:ext cx="548640" cy="457200"/>
           </a:xfrm>
           <a:prstGeom prst="rect">
             <a:avLst/>
@@ -7005,7 +8105,7 @@
           <a:lstStyle/>
           <a:p>
             <a:pPr algn="ctr">
-              <a:defRPr sz="1800" b="1">
+              <a:defRPr sz="2200" b="1">
                 <a:solidFill>
                   <a:srgbClr val="FFFFFF"/>
                 </a:solidFill>
@@ -7026,8 +8126,8 @@
         </p:nvSpPr>
         <p:spPr>
           <a:xfrm>
-            <a:off x="1371600" y="4343400"/>
-            <a:ext cx="9144000" cy="457200"/>
+            <a:off x="1280160" y="4800600"/>
+            <a:ext cx="10058400" cy="548640"/>
           </a:xfrm>
           <a:prstGeom prst="rect">
             <a:avLst/>
@@ -7041,7 +8141,7 @@
           <a:lstStyle/>
           <a:p>
             <a:pPr>
-              <a:defRPr sz="2000">
+              <a:defRPr sz="2400">
                 <a:solidFill>
                   <a:srgbClr val="000000"/>
                 </a:solidFill>
@@ -7080,8 +8180,8 @@
         </p:nvSpPr>
         <p:spPr>
           <a:xfrm>
-            <a:off x="9601200" y="274320"/>
-            <a:ext cx="2286000" cy="457200"/>
+            <a:off x="9418320" y="182880"/>
+            <a:ext cx="2560320" cy="457200"/>
           </a:xfrm>
           <a:prstGeom prst="rect">
             <a:avLst/>
@@ -7096,42 +8196,33 @@
           <a:p>
             <a:pPr algn="r"/>
             <a:r>
-              <a:rPr sz="1800" b="1">
-                <a:solidFill>
-                  <a:srgbClr val="E60012"/>
+              <a:rPr sz="2000" b="1">
+                <a:solidFill>
+                  <a:srgbClr val="C81E1E"/>
                 </a:solidFill>
                 <a:latin typeface="Arial"/>
               </a:rPr>
-              <a:t>Re</a:t>
-            </a:r>
-            <a:r>
-              <a:rPr sz="1800" b="1">
-                <a:solidFill>
-                  <a:srgbClr val="E60012"/>
-                </a:solidFill>
-                <a:latin typeface="Arial"/>
-              </a:rPr>
-              <a:t> RENAISSANCE</a:t>
-            </a:r>
-          </a:p>
-        </p:txBody>
-      </p:sp>
-      <p:sp>
-        <p:nvSpPr>
-          <p:cNvPr id="3" name="Rectangle 2"/>
+              <a:t>RENAISSANCE</a:t>
+            </a:r>
+          </a:p>
+        </p:txBody>
+      </p:sp>
+      <p:sp>
+        <p:nvSpPr>
+          <p:cNvPr id="3" name="Oval 2"/>
           <p:cNvSpPr/>
           <p:nvPr/>
         </p:nvSpPr>
         <p:spPr>
           <a:xfrm>
-            <a:off x="1371600" y="2743200"/>
-            <a:ext cx="9418320" cy="1371600"/>
-          </a:xfrm>
-          <a:prstGeom prst="rect">
+            <a:off x="1371600" y="2011680"/>
+            <a:ext cx="2286000" cy="2286000"/>
+          </a:xfrm>
+          <a:prstGeom prst="ellipse">
             <a:avLst/>
           </a:prstGeom>
           <a:solidFill>
-            <a:srgbClr val="D9D9D9"/>
+            <a:srgbClr val="C81E1E"/>
           </a:solidFill>
           <a:ln>
             <a:noFill/>
@@ -7167,8 +8258,8 @@
         </p:nvSpPr>
         <p:spPr>
           <a:xfrm>
-            <a:off x="1371600" y="2880360"/>
-            <a:ext cx="9418320" cy="1097280"/>
+            <a:off x="1371600" y="2286000"/>
+            <a:ext cx="2286000" cy="1828800"/>
           </a:xfrm>
           <a:prstGeom prst="rect">
             <a:avLst/>
@@ -7182,7 +8273,43 @@
           <a:lstStyle/>
           <a:p>
             <a:pPr algn="ctr">
-              <a:defRPr sz="3200" b="1">
+              <a:defRPr sz="7200" b="1">
+                <a:solidFill>
+                  <a:srgbClr val="FFFFFF"/>
+                </a:solidFill>
+                <a:latin typeface="Arial"/>
+              </a:defRPr>
+            </a:pPr>
+            <a:r>
+              <a:t>1</a:t>
+            </a:r>
+          </a:p>
+        </p:txBody>
+      </p:sp>
+      <p:sp>
+        <p:nvSpPr>
+          <p:cNvPr id="5" name="TextBox 4"/>
+          <p:cNvSpPr txBox="1"/>
+          <p:nvPr/>
+        </p:nvSpPr>
+        <p:spPr>
+          <a:xfrm>
+            <a:off x="4114800" y="2560320"/>
+            <a:ext cx="7315200" cy="1645920"/>
+          </a:xfrm>
+          <a:prstGeom prst="rect">
+            <a:avLst/>
+          </a:prstGeom>
+          <a:noFill/>
+        </p:spPr>
+        <p:txBody>
+          <a:bodyPr wrap="square">
+            <a:spAutoFit/>
+          </a:bodyPr>
+          <a:lstStyle/>
+          <a:p>
+            <a:pPr>
+              <a:defRPr sz="4000" b="1">
                 <a:solidFill>
                   <a:srgbClr val="000000"/>
                 </a:solidFill>
@@ -7190,7 +8317,11 @@
               </a:defRPr>
             </a:pPr>
             <a:r>
-              <a:t>【1】RURA導入ステップ（STEP0）の確認</a:t>
+              <a:t>RURA導入ステップ</a:t>
+            </a:r>
+            <a:br/>
+            <a:r>
+              <a:t>（STEP0）の確認</a:t>
             </a:r>
           </a:p>
         </p:txBody>
@@ -7221,8 +8352,8 @@
         </p:nvSpPr>
         <p:spPr>
           <a:xfrm>
-            <a:off x="9601200" y="274320"/>
-            <a:ext cx="2286000" cy="457200"/>
+            <a:off x="9418320" y="182880"/>
+            <a:ext cx="2560320" cy="457200"/>
           </a:xfrm>
           <a:prstGeom prst="rect">
             <a:avLst/>
@@ -7237,78 +8368,33 @@
           <a:p>
             <a:pPr algn="r"/>
             <a:r>
-              <a:rPr sz="1800" b="1">
-                <a:solidFill>
-                  <a:srgbClr val="E60012"/>
+              <a:rPr sz="2000" b="1">
+                <a:solidFill>
+                  <a:srgbClr val="C81E1E"/>
                 </a:solidFill>
                 <a:latin typeface="Arial"/>
               </a:rPr>
-              <a:t>Re</a:t>
-            </a:r>
-            <a:r>
-              <a:rPr sz="1800" b="1">
-                <a:solidFill>
-                  <a:srgbClr val="E60012"/>
-                </a:solidFill>
-                <a:latin typeface="Arial"/>
-              </a:rPr>
-              <a:t> RENAISSANCE</a:t>
-            </a:r>
-          </a:p>
-        </p:txBody>
-      </p:sp>
-      <p:sp>
-        <p:nvSpPr>
-          <p:cNvPr id="3" name="TextBox 2"/>
-          <p:cNvSpPr txBox="1"/>
-          <p:nvPr/>
-        </p:nvSpPr>
-        <p:spPr>
-          <a:xfrm>
-            <a:off x="457200" y="457200"/>
-            <a:ext cx="9144000" cy="640080"/>
-          </a:xfrm>
-          <a:prstGeom prst="rect">
-            <a:avLst/>
-          </a:prstGeom>
-          <a:noFill/>
-        </p:spPr>
-        <p:txBody>
-          <a:bodyPr wrap="none">
-            <a:spAutoFit/>
-          </a:bodyPr>
-          <a:lstStyle/>
-          <a:p>
-            <a:pPr>
-              <a:defRPr sz="2800" b="1">
-                <a:solidFill>
-                  <a:srgbClr val="000000"/>
-                </a:solidFill>
-                <a:latin typeface="Meiryo"/>
-              </a:defRPr>
-            </a:pPr>
-            <a:r>
-              <a:t>【1】RURA導入ステップ（STEP0）の確認</a:t>
-            </a:r>
-          </a:p>
-        </p:txBody>
-      </p:sp>
-      <p:sp>
-        <p:nvSpPr>
-          <p:cNvPr id="4" name="Rectangle 3"/>
+              <a:t>RENAISSANCE</a:t>
+            </a:r>
+          </a:p>
+        </p:txBody>
+      </p:sp>
+      <p:sp>
+        <p:nvSpPr>
+          <p:cNvPr id="3" name="Rectangle 2"/>
           <p:cNvSpPr/>
           <p:nvPr/>
         </p:nvSpPr>
         <p:spPr>
           <a:xfrm>
-            <a:off x="457200" y="1051560"/>
-            <a:ext cx="11247120" cy="38100"/>
+            <a:off x="0" y="685800"/>
+            <a:ext cx="12191695" cy="50800"/>
           </a:xfrm>
           <a:prstGeom prst="rect">
             <a:avLst/>
           </a:prstGeom>
           <a:solidFill>
-            <a:srgbClr val="E60012"/>
+            <a:srgbClr val="C81E1E"/>
           </a:solidFill>
           <a:ln>
             <a:noFill/>
@@ -7338,47 +8424,145 @@
       </p:sp>
       <p:sp>
         <p:nvSpPr>
-          <p:cNvPr id="5" name="TextBox 4"/>
-          <p:cNvSpPr txBox="1"/>
-          <p:nvPr/>
-        </p:nvSpPr>
-        <p:spPr>
-          <a:xfrm>
-            <a:off x="640080" y="1371600"/>
-            <a:ext cx="10972800" cy="5029200"/>
-          </a:xfrm>
-          <a:prstGeom prst="rect">
-            <a:avLst/>
-          </a:prstGeom>
-          <a:noFill/>
-        </p:spPr>
-        <p:txBody>
-          <a:bodyPr wrap="square">
+          <p:cNvPr id="4" name="TextBox 3"/>
+          <p:cNvSpPr txBox="1"/>
+          <p:nvPr/>
+        </p:nvSpPr>
+        <p:spPr>
+          <a:xfrm>
+            <a:off x="457200" y="137160"/>
+            <a:ext cx="8686800" cy="548640"/>
+          </a:xfrm>
+          <a:prstGeom prst="rect">
+            <a:avLst/>
+          </a:prstGeom>
+          <a:noFill/>
+        </p:spPr>
+        <p:txBody>
+          <a:bodyPr wrap="none">
             <a:spAutoFit/>
           </a:bodyPr>
           <a:lstStyle/>
           <a:p>
             <a:pPr>
-              <a:spcBef>
-                <a:spcPts val="0"/>
-              </a:spcBef>
-              <a:defRPr sz="2000" b="1">
-                <a:solidFill>
-                  <a:srgbClr val="E60012"/>
+              <a:defRPr sz="3200" b="1">
+                <a:solidFill>
+                  <a:srgbClr val="C81E1E"/>
                 </a:solidFill>
                 <a:latin typeface="Meiryo"/>
               </a:defRPr>
             </a:pPr>
             <a:r>
-              <a:t>■ テーマ</a:t>
-            </a:r>
-          </a:p>
+              <a:t>【1】RURA導入ステップ（STEP0）の確認</a:t>
+            </a:r>
+          </a:p>
+        </p:txBody>
+      </p:sp>
+      <p:sp>
+        <p:nvSpPr>
+          <p:cNvPr id="5" name="Rounded Rectangle 4"/>
+          <p:cNvSpPr/>
+          <p:nvPr/>
+        </p:nvSpPr>
+        <p:spPr>
+          <a:xfrm>
+            <a:off x="457200" y="1005840"/>
+            <a:ext cx="11247120" cy="1188720"/>
+          </a:xfrm>
+          <a:prstGeom prst="roundRect">
+            <a:avLst/>
+          </a:prstGeom>
+          <a:solidFill>
+            <a:srgbClr val="F0F0F0"/>
+          </a:solidFill>
+          <a:ln>
+            <a:solidFill>
+              <a:srgbClr val="C8C8C8"/>
+            </a:solidFill>
+          </a:ln>
+        </p:spPr>
+        <p:style>
+          <a:lnRef idx="1">
+            <a:schemeClr val="accent1"/>
+          </a:lnRef>
+          <a:fillRef idx="3">
+            <a:schemeClr val="accent1"/>
+          </a:fillRef>
+          <a:effectRef idx="2">
+            <a:schemeClr val="accent1"/>
+          </a:effectRef>
+          <a:fontRef idx="minor">
+            <a:schemeClr val="lt1"/>
+          </a:fontRef>
+        </p:style>
+        <p:txBody>
+          <a:bodyPr rtlCol="0" anchor="ctr"/>
+          <a:lstStyle/>
+          <a:p>
+            <a:pPr algn="ctr"/>
+          </a:p>
+        </p:txBody>
+      </p:sp>
+      <p:sp>
+        <p:nvSpPr>
+          <p:cNvPr id="6" name="TextBox 5"/>
+          <p:cNvSpPr txBox="1"/>
+          <p:nvPr/>
+        </p:nvSpPr>
+        <p:spPr>
+          <a:xfrm>
+            <a:off x="731520" y="1143000"/>
+            <a:ext cx="10515600" cy="457200"/>
+          </a:xfrm>
+          <a:prstGeom prst="rect">
+            <a:avLst/>
+          </a:prstGeom>
+          <a:noFill/>
+        </p:spPr>
+        <p:txBody>
+          <a:bodyPr wrap="none">
+            <a:spAutoFit/>
+          </a:bodyPr>
+          <a:lstStyle/>
           <a:p>
             <a:pPr>
-              <a:spcBef>
-                <a:spcPts val="400"/>
-              </a:spcBef>
-              <a:defRPr sz="1800">
+              <a:defRPr sz="2200" b="1">
+                <a:solidFill>
+                  <a:srgbClr val="C81E1E"/>
+                </a:solidFill>
+                <a:latin typeface="Meiryo"/>
+              </a:defRPr>
+            </a:pPr>
+            <a:r>
+              <a:t>テーマ</a:t>
+            </a:r>
+          </a:p>
+        </p:txBody>
+      </p:sp>
+      <p:sp>
+        <p:nvSpPr>
+          <p:cNvPr id="7" name="TextBox 6"/>
+          <p:cNvSpPr txBox="1"/>
+          <p:nvPr/>
+        </p:nvSpPr>
+        <p:spPr>
+          <a:xfrm>
+            <a:off x="731520" y="1554480"/>
+            <a:ext cx="10515600" cy="548640"/>
+          </a:xfrm>
+          <a:prstGeom prst="rect">
+            <a:avLst/>
+          </a:prstGeom>
+          <a:noFill/>
+        </p:spPr>
+        <p:txBody>
+          <a:bodyPr wrap="none">
+            <a:spAutoFit/>
+          </a:bodyPr>
+          <a:lstStyle/>
+          <a:p>
+            <a:pPr>
+              <a:defRPr sz="2000">
                 <a:solidFill>
                   <a:srgbClr val="000000"/>
                 </a:solidFill>
@@ -7386,31 +8570,116 @@
               </a:defRPr>
             </a:pPr>
             <a:r>
-              <a:t>  運用の土台となる「誘導」と「時間の使い方」についての認識合わせ</a:t>
-            </a:r>
-          </a:p>
+              <a:t>運用の土台となる「誘導」と「時間の使い方」についての認識合わせ</a:t>
+            </a:r>
+          </a:p>
+        </p:txBody>
+      </p:sp>
+      <p:sp>
+        <p:nvSpPr>
+          <p:cNvPr id="8" name="Rounded Rectangle 7"/>
+          <p:cNvSpPr/>
+          <p:nvPr/>
+        </p:nvSpPr>
+        <p:spPr>
+          <a:xfrm>
+            <a:off x="457200" y="2377440"/>
+            <a:ext cx="11247120" cy="1188720"/>
+          </a:xfrm>
+          <a:prstGeom prst="roundRect">
+            <a:avLst/>
+          </a:prstGeom>
+          <a:solidFill>
+            <a:srgbClr val="FFE6E6"/>
+          </a:solidFill>
+          <a:ln>
+            <a:solidFill>
+              <a:srgbClr val="C81E1E"/>
+            </a:solidFill>
+          </a:ln>
+        </p:spPr>
+        <p:style>
+          <a:lnRef idx="1">
+            <a:schemeClr val="accent1"/>
+          </a:lnRef>
+          <a:fillRef idx="3">
+            <a:schemeClr val="accent1"/>
+          </a:fillRef>
+          <a:effectRef idx="2">
+            <a:schemeClr val="accent1"/>
+          </a:effectRef>
+          <a:fontRef idx="minor">
+            <a:schemeClr val="lt1"/>
+          </a:fontRef>
+        </p:style>
+        <p:txBody>
+          <a:bodyPr rtlCol="0" anchor="ctr"/>
+          <a:lstStyle/>
+          <a:p>
+            <a:pPr algn="ctr"/>
+          </a:p>
+        </p:txBody>
+      </p:sp>
+      <p:sp>
+        <p:nvSpPr>
+          <p:cNvPr id="9" name="TextBox 8"/>
+          <p:cNvSpPr txBox="1"/>
+          <p:nvPr/>
+        </p:nvSpPr>
+        <p:spPr>
+          <a:xfrm>
+            <a:off x="731520" y="2514600"/>
+            <a:ext cx="10515600" cy="457200"/>
+          </a:xfrm>
+          <a:prstGeom prst="rect">
+            <a:avLst/>
+          </a:prstGeom>
+          <a:noFill/>
+        </p:spPr>
+        <p:txBody>
+          <a:bodyPr wrap="none">
+            <a:spAutoFit/>
+          </a:bodyPr>
+          <a:lstStyle/>
           <a:p>
             <a:pPr>
-              <a:spcBef>
-                <a:spcPts val="1600"/>
-              </a:spcBef>
-              <a:defRPr sz="2000" b="1">
-                <a:solidFill>
-                  <a:srgbClr val="E60012"/>
+              <a:defRPr sz="2200" b="1">
+                <a:solidFill>
+                  <a:srgbClr val="C81E1E"/>
                 </a:solidFill>
                 <a:latin typeface="Meiryo"/>
               </a:defRPr>
             </a:pPr>
             <a:r>
-              <a:t>■ ポイント</a:t>
-            </a:r>
-          </a:p>
+              <a:t>ポイント</a:t>
+            </a:r>
+          </a:p>
+        </p:txBody>
+      </p:sp>
+      <p:sp>
+        <p:nvSpPr>
+          <p:cNvPr id="10" name="TextBox 9"/>
+          <p:cNvSpPr txBox="1"/>
+          <p:nvPr/>
+        </p:nvSpPr>
+        <p:spPr>
+          <a:xfrm>
+            <a:off x="731520" y="2926080"/>
+            <a:ext cx="10515600" cy="548640"/>
+          </a:xfrm>
+          <a:prstGeom prst="rect">
+            <a:avLst/>
+          </a:prstGeom>
+          <a:noFill/>
+        </p:spPr>
+        <p:txBody>
+          <a:bodyPr wrap="none">
+            <a:spAutoFit/>
+          </a:bodyPr>
+          <a:lstStyle/>
           <a:p>
             <a:pPr>
-              <a:spcBef>
-                <a:spcPts val="400"/>
-              </a:spcBef>
-              <a:defRPr sz="1800">
+              <a:defRPr sz="2000">
                 <a:solidFill>
                   <a:srgbClr val="000000"/>
                 </a:solidFill>
@@ -7418,7 +8687,7 @@
               </a:defRPr>
             </a:pPr>
             <a:r>
-              <a:t>  キックオフ時のSTEP0をより解像度を上げて確認します</a:t>
+              <a:t>キックオフ時のSTEP0をより解像度を上げて確認します</a:t>
             </a:r>
           </a:p>
         </p:txBody>
@@ -7449,8 +8718,8 @@
         </p:nvSpPr>
         <p:spPr>
           <a:xfrm>
-            <a:off x="9601200" y="274320"/>
-            <a:ext cx="2286000" cy="457200"/>
+            <a:off x="9418320" y="182880"/>
+            <a:ext cx="2560320" cy="457200"/>
           </a:xfrm>
           <a:prstGeom prst="rect">
             <a:avLst/>
@@ -7465,78 +8734,33 @@
           <a:p>
             <a:pPr algn="r"/>
             <a:r>
-              <a:rPr sz="1800" b="1">
-                <a:solidFill>
-                  <a:srgbClr val="E60012"/>
+              <a:rPr sz="2000" b="1">
+                <a:solidFill>
+                  <a:srgbClr val="C81E1E"/>
                 </a:solidFill>
                 <a:latin typeface="Arial"/>
               </a:rPr>
-              <a:t>Re</a:t>
-            </a:r>
-            <a:r>
-              <a:rPr sz="1800" b="1">
-                <a:solidFill>
-                  <a:srgbClr val="E60012"/>
-                </a:solidFill>
-                <a:latin typeface="Arial"/>
-              </a:rPr>
-              <a:t> RENAISSANCE</a:t>
-            </a:r>
-          </a:p>
-        </p:txBody>
-      </p:sp>
-      <p:sp>
-        <p:nvSpPr>
-          <p:cNvPr id="3" name="TextBox 2"/>
-          <p:cNvSpPr txBox="1"/>
-          <p:nvPr/>
-        </p:nvSpPr>
-        <p:spPr>
-          <a:xfrm>
-            <a:off x="457200" y="457200"/>
-            <a:ext cx="9144000" cy="640080"/>
-          </a:xfrm>
-          <a:prstGeom prst="rect">
-            <a:avLst/>
-          </a:prstGeom>
-          <a:noFill/>
-        </p:spPr>
-        <p:txBody>
-          <a:bodyPr wrap="none">
-            <a:spAutoFit/>
-          </a:bodyPr>
-          <a:lstStyle/>
-          <a:p>
-            <a:pPr>
-              <a:defRPr sz="2800" b="1">
-                <a:solidFill>
-                  <a:srgbClr val="000000"/>
-                </a:solidFill>
-                <a:latin typeface="Meiryo"/>
-              </a:defRPr>
-            </a:pPr>
-            <a:r>
-              <a:t>1-1. 誘導率の振り返り</a:t>
-            </a:r>
-          </a:p>
-        </p:txBody>
-      </p:sp>
-      <p:sp>
-        <p:nvSpPr>
-          <p:cNvPr id="4" name="Rectangle 3"/>
+              <a:t>RENAISSANCE</a:t>
+            </a:r>
+          </a:p>
+        </p:txBody>
+      </p:sp>
+      <p:sp>
+        <p:nvSpPr>
+          <p:cNvPr id="3" name="Rectangle 2"/>
           <p:cNvSpPr/>
           <p:nvPr/>
         </p:nvSpPr>
         <p:spPr>
           <a:xfrm>
-            <a:off x="457200" y="1051560"/>
-            <a:ext cx="11247120" cy="38100"/>
+            <a:off x="0" y="685800"/>
+            <a:ext cx="12191695" cy="50800"/>
           </a:xfrm>
           <a:prstGeom prst="rect">
             <a:avLst/>
           </a:prstGeom>
           <a:solidFill>
-            <a:srgbClr val="E60012"/>
+            <a:srgbClr val="C81E1E"/>
           </a:solidFill>
           <a:ln>
             <a:noFill/>
@@ -7566,47 +8790,145 @@
       </p:sp>
       <p:sp>
         <p:nvSpPr>
-          <p:cNvPr id="5" name="TextBox 4"/>
-          <p:cNvSpPr txBox="1"/>
-          <p:nvPr/>
-        </p:nvSpPr>
-        <p:spPr>
-          <a:xfrm>
-            <a:off x="640080" y="1371600"/>
-            <a:ext cx="10972800" cy="5029200"/>
-          </a:xfrm>
-          <a:prstGeom prst="rect">
-            <a:avLst/>
-          </a:prstGeom>
-          <a:noFill/>
-        </p:spPr>
-        <p:txBody>
-          <a:bodyPr wrap="square">
+          <p:cNvPr id="4" name="TextBox 3"/>
+          <p:cNvSpPr txBox="1"/>
+          <p:nvPr/>
+        </p:nvSpPr>
+        <p:spPr>
+          <a:xfrm>
+            <a:off x="457200" y="137160"/>
+            <a:ext cx="8686800" cy="548640"/>
+          </a:xfrm>
+          <a:prstGeom prst="rect">
+            <a:avLst/>
+          </a:prstGeom>
+          <a:noFill/>
+        </p:spPr>
+        <p:txBody>
+          <a:bodyPr wrap="none">
             <a:spAutoFit/>
           </a:bodyPr>
           <a:lstStyle/>
           <a:p>
             <a:pPr>
-              <a:spcBef>
-                <a:spcPts val="0"/>
-              </a:spcBef>
-              <a:defRPr sz="2000" b="1">
-                <a:solidFill>
-                  <a:srgbClr val="E60012"/>
+              <a:defRPr sz="3200" b="1">
+                <a:solidFill>
+                  <a:srgbClr val="C81E1E"/>
                 </a:solidFill>
                 <a:latin typeface="Meiryo"/>
               </a:defRPr>
             </a:pPr>
             <a:r>
-              <a:t>■ 現状共有</a:t>
-            </a:r>
-          </a:p>
+              <a:t>1-1. 誘導率の振り返り</a:t>
+            </a:r>
+          </a:p>
+        </p:txBody>
+      </p:sp>
+      <p:sp>
+        <p:nvSpPr>
+          <p:cNvPr id="5" name="Rounded Rectangle 4"/>
+          <p:cNvSpPr/>
+          <p:nvPr/>
+        </p:nvSpPr>
+        <p:spPr>
+          <a:xfrm>
+            <a:off x="457200" y="1005840"/>
+            <a:ext cx="5486400" cy="5303520"/>
+          </a:xfrm>
+          <a:prstGeom prst="roundRect">
+            <a:avLst/>
+          </a:prstGeom>
+          <a:solidFill>
+            <a:srgbClr val="F0F0F0"/>
+          </a:solidFill>
+          <a:ln>
+            <a:solidFill>
+              <a:srgbClr val="C8C8C8"/>
+            </a:solidFill>
+          </a:ln>
+        </p:spPr>
+        <p:style>
+          <a:lnRef idx="1">
+            <a:schemeClr val="accent1"/>
+          </a:lnRef>
+          <a:fillRef idx="3">
+            <a:schemeClr val="accent1"/>
+          </a:fillRef>
+          <a:effectRef idx="2">
+            <a:schemeClr val="accent1"/>
+          </a:effectRef>
+          <a:fontRef idx="minor">
+            <a:schemeClr val="lt1"/>
+          </a:fontRef>
+        </p:style>
+        <p:txBody>
+          <a:bodyPr rtlCol="0" anchor="ctr"/>
+          <a:lstStyle/>
+          <a:p>
+            <a:pPr algn="ctr"/>
+          </a:p>
+        </p:txBody>
+      </p:sp>
+      <p:sp>
+        <p:nvSpPr>
+          <p:cNvPr id="6" name="TextBox 5"/>
+          <p:cNvSpPr txBox="1"/>
+          <p:nvPr/>
+        </p:nvSpPr>
+        <p:spPr>
+          <a:xfrm>
+            <a:off x="731520" y="1188720"/>
+            <a:ext cx="4937760" cy="457200"/>
+          </a:xfrm>
+          <a:prstGeom prst="rect">
+            <a:avLst/>
+          </a:prstGeom>
+          <a:noFill/>
+        </p:spPr>
+        <p:txBody>
+          <a:bodyPr wrap="none">
+            <a:spAutoFit/>
+          </a:bodyPr>
+          <a:lstStyle/>
           <a:p>
             <a:pPr>
-              <a:spcBef>
-                <a:spcPts val="400"/>
-              </a:spcBef>
-              <a:defRPr sz="1800">
+              <a:defRPr sz="2400" b="1">
+                <a:solidFill>
+                  <a:srgbClr val="C81E1E"/>
+                </a:solidFill>
+                <a:latin typeface="Meiryo"/>
+              </a:defRPr>
+            </a:pPr>
+            <a:r>
+              <a:t>現状共有</a:t>
+            </a:r>
+          </a:p>
+        </p:txBody>
+      </p:sp>
+      <p:sp>
+        <p:nvSpPr>
+          <p:cNvPr id="7" name="TextBox 6"/>
+          <p:cNvSpPr txBox="1"/>
+          <p:nvPr/>
+        </p:nvSpPr>
+        <p:spPr>
+          <a:xfrm>
+            <a:off x="731520" y="1828800"/>
+            <a:ext cx="4937760" cy="548640"/>
+          </a:xfrm>
+          <a:prstGeom prst="rect">
+            <a:avLst/>
+          </a:prstGeom>
+          <a:noFill/>
+        </p:spPr>
+        <p:txBody>
+          <a:bodyPr wrap="none">
+            <a:spAutoFit/>
+          </a:bodyPr>
+          <a:lstStyle/>
+          <a:p>
+            <a:pPr>
+              <a:defRPr sz="2000">
                 <a:solidFill>
                   <a:srgbClr val="000000"/>
                 </a:solidFill>
@@ -7614,28 +8936,152 @@
               </a:defRPr>
             </a:pPr>
             <a:r>
-              <a:t>  </a:t>
-            </a:r>
-          </a:p>
+              <a:t>• 12月誘導率の実績</a:t>
+            </a:r>
+          </a:p>
+        </p:txBody>
+      </p:sp>
+      <p:sp>
+        <p:nvSpPr>
+          <p:cNvPr id="8" name="TextBox 7"/>
+          <p:cNvSpPr txBox="1"/>
+          <p:nvPr/>
+        </p:nvSpPr>
+        <p:spPr>
+          <a:xfrm>
+            <a:off x="731520" y="2468880"/>
+            <a:ext cx="4937760" cy="548640"/>
+          </a:xfrm>
+          <a:prstGeom prst="rect">
+            <a:avLst/>
+          </a:prstGeom>
+          <a:noFill/>
+        </p:spPr>
+        <p:txBody>
+          <a:bodyPr wrap="none">
+            <a:spAutoFit/>
+          </a:bodyPr>
+          <a:lstStyle/>
           <a:p>
             <a:pPr>
-              <a:spcBef>
-                <a:spcPts val="1200"/>
-              </a:spcBef>
-              <a:defRPr sz="2000" b="1">
+              <a:defRPr sz="2000">
                 <a:solidFill>
                   <a:srgbClr val="000000"/>
                 </a:solidFill>
                 <a:latin typeface="Meiryo"/>
               </a:defRPr>
             </a:pPr>
-          </a:p>
-          <a:p>
-            <a:pPr lvl="1">
-              <a:spcBef>
-                <a:spcPts val="600"/>
-              </a:spcBef>
-              <a:defRPr sz="1800">
+            <a:r>
+              <a:t>• 1月誘導率の進捗</a:t>
+            </a:r>
+          </a:p>
+        </p:txBody>
+      </p:sp>
+      <p:sp>
+        <p:nvSpPr>
+          <p:cNvPr id="9" name="Rounded Rectangle 8"/>
+          <p:cNvSpPr/>
+          <p:nvPr/>
+        </p:nvSpPr>
+        <p:spPr>
+          <a:xfrm>
+            <a:off x="6217920" y="1005840"/>
+            <a:ext cx="5486400" cy="5303520"/>
+          </a:xfrm>
+          <a:prstGeom prst="roundRect">
+            <a:avLst/>
+          </a:prstGeom>
+          <a:solidFill>
+            <a:srgbClr val="E6F0FA"/>
+          </a:solidFill>
+          <a:ln>
+            <a:solidFill>
+              <a:srgbClr val="2962A4"/>
+            </a:solidFill>
+          </a:ln>
+        </p:spPr>
+        <p:style>
+          <a:lnRef idx="1">
+            <a:schemeClr val="accent1"/>
+          </a:lnRef>
+          <a:fillRef idx="3">
+            <a:schemeClr val="accent1"/>
+          </a:fillRef>
+          <a:effectRef idx="2">
+            <a:schemeClr val="accent1"/>
+          </a:effectRef>
+          <a:fontRef idx="minor">
+            <a:schemeClr val="lt1"/>
+          </a:fontRef>
+        </p:style>
+        <p:txBody>
+          <a:bodyPr rtlCol="0" anchor="ctr"/>
+          <a:lstStyle/>
+          <a:p>
+            <a:pPr algn="ctr"/>
+          </a:p>
+        </p:txBody>
+      </p:sp>
+      <p:sp>
+        <p:nvSpPr>
+          <p:cNvPr id="10" name="TextBox 9"/>
+          <p:cNvSpPr txBox="1"/>
+          <p:nvPr/>
+        </p:nvSpPr>
+        <p:spPr>
+          <a:xfrm>
+            <a:off x="6492240" y="1188720"/>
+            <a:ext cx="4937760" cy="457200"/>
+          </a:xfrm>
+          <a:prstGeom prst="rect">
+            <a:avLst/>
+          </a:prstGeom>
+          <a:noFill/>
+        </p:spPr>
+        <p:txBody>
+          <a:bodyPr wrap="none">
+            <a:spAutoFit/>
+          </a:bodyPr>
+          <a:lstStyle/>
+          <a:p>
+            <a:pPr>
+              <a:defRPr sz="2400" b="1">
+                <a:solidFill>
+                  <a:srgbClr val="2962A4"/>
+                </a:solidFill>
+                <a:latin typeface="Meiryo"/>
+              </a:defRPr>
+            </a:pPr>
+            <a:r>
+              <a:t>メッセージ</a:t>
+            </a:r>
+          </a:p>
+        </p:txBody>
+      </p:sp>
+      <p:sp>
+        <p:nvSpPr>
+          <p:cNvPr id="11" name="TextBox 10"/>
+          <p:cNvSpPr txBox="1"/>
+          <p:nvPr/>
+        </p:nvSpPr>
+        <p:spPr>
+          <a:xfrm>
+            <a:off x="6492240" y="1828800"/>
+            <a:ext cx="4937760" cy="548640"/>
+          </a:xfrm>
+          <a:prstGeom prst="rect">
+            <a:avLst/>
+          </a:prstGeom>
+          <a:noFill/>
+        </p:spPr>
+        <p:txBody>
+          <a:bodyPr wrap="none">
+            <a:spAutoFit/>
+          </a:bodyPr>
+          <a:lstStyle/>
+          <a:p>
+            <a:pPr>
+              <a:defRPr sz="2000">
                 <a:solidFill>
                   <a:srgbClr val="000000"/>
                 </a:solidFill>
@@ -7643,15 +9089,35 @@
               </a:defRPr>
             </a:pPr>
             <a:r>
-              <a:t>• 12月誘導率の実績</a:t>
-            </a:r>
-          </a:p>
-          <a:p>
-            <a:pPr lvl="1">
-              <a:spcBef>
-                <a:spcPts val="600"/>
-              </a:spcBef>
-              <a:defRPr sz="1800">
+              <a:t>• 数値に基づいた現状把握</a:t>
+            </a:r>
+          </a:p>
+        </p:txBody>
+      </p:sp>
+      <p:sp>
+        <p:nvSpPr>
+          <p:cNvPr id="12" name="TextBox 11"/>
+          <p:cNvSpPr txBox="1"/>
+          <p:nvPr/>
+        </p:nvSpPr>
+        <p:spPr>
+          <a:xfrm>
+            <a:off x="6492240" y="2468880"/>
+            <a:ext cx="4937760" cy="548640"/>
+          </a:xfrm>
+          <a:prstGeom prst="rect">
+            <a:avLst/>
+          </a:prstGeom>
+          <a:noFill/>
+        </p:spPr>
+        <p:txBody>
+          <a:bodyPr wrap="none">
+            <a:spAutoFit/>
+          </a:bodyPr>
+          <a:lstStyle/>
+          <a:p>
+            <a:pPr>
+              <a:defRPr sz="2000">
                 <a:solidFill>
                   <a:srgbClr val="000000"/>
                 </a:solidFill>
@@ -7659,39 +9125,7 @@
               </a:defRPr>
             </a:pPr>
             <a:r>
-              <a:t>• 1月誘導率の進捗</a:t>
-            </a:r>
-          </a:p>
-          <a:p>
-            <a:pPr>
-              <a:spcBef>
-                <a:spcPts val="1600"/>
-              </a:spcBef>
-              <a:defRPr sz="2000" b="1">
-                <a:solidFill>
-                  <a:srgbClr val="E60012"/>
-                </a:solidFill>
-                <a:latin typeface="Meiryo"/>
-              </a:defRPr>
-            </a:pPr>
-            <a:r>
-              <a:t>■ メッセージ</a:t>
-            </a:r>
-          </a:p>
-          <a:p>
-            <a:pPr>
-              <a:spcBef>
-                <a:spcPts val="400"/>
-              </a:spcBef>
-              <a:defRPr sz="1800">
-                <a:solidFill>
-                  <a:srgbClr val="000000"/>
-                </a:solidFill>
-                <a:latin typeface="Meiryo"/>
-              </a:defRPr>
-            </a:pPr>
-            <a:r>
-              <a:t>  数値に基づいた現状把握</a:t>
+              <a:t>• 改善ポイントの特定</a:t>
             </a:r>
           </a:p>
         </p:txBody>
@@ -7722,8 +9156,8 @@
         </p:nvSpPr>
         <p:spPr>
           <a:xfrm>
-            <a:off x="9601200" y="274320"/>
-            <a:ext cx="2286000" cy="457200"/>
+            <a:off x="9418320" y="182880"/>
+            <a:ext cx="2560320" cy="457200"/>
           </a:xfrm>
           <a:prstGeom prst="rect">
             <a:avLst/>
@@ -7738,78 +9172,33 @@
           <a:p>
             <a:pPr algn="r"/>
             <a:r>
-              <a:rPr sz="1800" b="1">
-                <a:solidFill>
-                  <a:srgbClr val="E60012"/>
+              <a:rPr sz="2000" b="1">
+                <a:solidFill>
+                  <a:srgbClr val="C81E1E"/>
                 </a:solidFill>
                 <a:latin typeface="Arial"/>
               </a:rPr>
-              <a:t>Re</a:t>
-            </a:r>
-            <a:r>
-              <a:rPr sz="1800" b="1">
-                <a:solidFill>
-                  <a:srgbClr val="E60012"/>
-                </a:solidFill>
-                <a:latin typeface="Arial"/>
-              </a:rPr>
-              <a:t> RENAISSANCE</a:t>
-            </a:r>
-          </a:p>
-        </p:txBody>
-      </p:sp>
-      <p:sp>
-        <p:nvSpPr>
-          <p:cNvPr id="3" name="TextBox 2"/>
-          <p:cNvSpPr txBox="1"/>
-          <p:nvPr/>
-        </p:nvSpPr>
-        <p:spPr>
-          <a:xfrm>
-            <a:off x="457200" y="457200"/>
-            <a:ext cx="9144000" cy="640080"/>
-          </a:xfrm>
-          <a:prstGeom prst="rect">
-            <a:avLst/>
-          </a:prstGeom>
-          <a:noFill/>
-        </p:spPr>
-        <p:txBody>
-          <a:bodyPr wrap="none">
-            <a:spAutoFit/>
-          </a:bodyPr>
-          <a:lstStyle/>
-          <a:p>
-            <a:pPr>
-              <a:defRPr sz="2800" b="1">
-                <a:solidFill>
-                  <a:srgbClr val="000000"/>
-                </a:solidFill>
-                <a:latin typeface="Meiryo"/>
-              </a:defRPr>
-            </a:pPr>
-            <a:r>
-              <a:t>1-2. 適正シフトの考え方（STEP0再確認）</a:t>
-            </a:r>
-          </a:p>
-        </p:txBody>
-      </p:sp>
-      <p:sp>
-        <p:nvSpPr>
-          <p:cNvPr id="4" name="Rectangle 3"/>
+              <a:t>RENAISSANCE</a:t>
+            </a:r>
+          </a:p>
+        </p:txBody>
+      </p:sp>
+      <p:sp>
+        <p:nvSpPr>
+          <p:cNvPr id="3" name="Rectangle 2"/>
           <p:cNvSpPr/>
           <p:nvPr/>
         </p:nvSpPr>
         <p:spPr>
           <a:xfrm>
-            <a:off x="457200" y="1051560"/>
-            <a:ext cx="11247120" cy="38100"/>
+            <a:off x="0" y="685800"/>
+            <a:ext cx="12191695" cy="50800"/>
           </a:xfrm>
           <a:prstGeom prst="rect">
             <a:avLst/>
           </a:prstGeom>
           <a:solidFill>
-            <a:srgbClr val="E60012"/>
+            <a:srgbClr val="C81E1E"/>
           </a:solidFill>
           <a:ln>
             <a:noFill/>
@@ -7839,47 +9228,145 @@
       </p:sp>
       <p:sp>
         <p:nvSpPr>
-          <p:cNvPr id="5" name="TextBox 4"/>
-          <p:cNvSpPr txBox="1"/>
-          <p:nvPr/>
-        </p:nvSpPr>
-        <p:spPr>
-          <a:xfrm>
-            <a:off x="640080" y="1371600"/>
-            <a:ext cx="10972800" cy="5029200"/>
-          </a:xfrm>
-          <a:prstGeom prst="rect">
-            <a:avLst/>
-          </a:prstGeom>
-          <a:noFill/>
-        </p:spPr>
-        <p:txBody>
-          <a:bodyPr wrap="square">
+          <p:cNvPr id="4" name="TextBox 3"/>
+          <p:cNvSpPr txBox="1"/>
+          <p:nvPr/>
+        </p:nvSpPr>
+        <p:spPr>
+          <a:xfrm>
+            <a:off x="457200" y="137160"/>
+            <a:ext cx="8686800" cy="548640"/>
+          </a:xfrm>
+          <a:prstGeom prst="rect">
+            <a:avLst/>
+          </a:prstGeom>
+          <a:noFill/>
+        </p:spPr>
+        <p:txBody>
+          <a:bodyPr wrap="none">
             <a:spAutoFit/>
           </a:bodyPr>
           <a:lstStyle/>
           <a:p>
             <a:pPr>
-              <a:spcBef>
-                <a:spcPts val="0"/>
-              </a:spcBef>
-              <a:defRPr sz="2000" b="1">
-                <a:solidFill>
-                  <a:srgbClr val="E60012"/>
+              <a:defRPr sz="3200" b="1">
+                <a:solidFill>
+                  <a:srgbClr val="C81E1E"/>
                 </a:solidFill>
                 <a:latin typeface="Meiryo"/>
               </a:defRPr>
             </a:pPr>
             <a:r>
-              <a:t>■ 定義の確認</a:t>
-            </a:r>
-          </a:p>
+              <a:t>1-2. 適正シフトの考え方（STEP0再確認）</a:t>
+            </a:r>
+          </a:p>
+        </p:txBody>
+      </p:sp>
+      <p:sp>
+        <p:nvSpPr>
+          <p:cNvPr id="5" name="Rounded Rectangle 4"/>
+          <p:cNvSpPr/>
+          <p:nvPr/>
+        </p:nvSpPr>
+        <p:spPr>
+          <a:xfrm>
+            <a:off x="457200" y="1005840"/>
+            <a:ext cx="11247120" cy="1188720"/>
+          </a:xfrm>
+          <a:prstGeom prst="roundRect">
+            <a:avLst/>
+          </a:prstGeom>
+          <a:solidFill>
+            <a:srgbClr val="F0F0F0"/>
+          </a:solidFill>
+          <a:ln>
+            <a:solidFill>
+              <a:srgbClr val="C8C8C8"/>
+            </a:solidFill>
+          </a:ln>
+        </p:spPr>
+        <p:style>
+          <a:lnRef idx="1">
+            <a:schemeClr val="accent1"/>
+          </a:lnRef>
+          <a:fillRef idx="3">
+            <a:schemeClr val="accent1"/>
+          </a:fillRef>
+          <a:effectRef idx="2">
+            <a:schemeClr val="accent1"/>
+          </a:effectRef>
+          <a:fontRef idx="minor">
+            <a:schemeClr val="lt1"/>
+          </a:fontRef>
+        </p:style>
+        <p:txBody>
+          <a:bodyPr rtlCol="0" anchor="ctr"/>
+          <a:lstStyle/>
+          <a:p>
+            <a:pPr algn="ctr"/>
+          </a:p>
+        </p:txBody>
+      </p:sp>
+      <p:sp>
+        <p:nvSpPr>
+          <p:cNvPr id="6" name="TextBox 5"/>
+          <p:cNvSpPr txBox="1"/>
+          <p:nvPr/>
+        </p:nvSpPr>
+        <p:spPr>
+          <a:xfrm>
+            <a:off x="731520" y="1143000"/>
+            <a:ext cx="10515600" cy="457200"/>
+          </a:xfrm>
+          <a:prstGeom prst="rect">
+            <a:avLst/>
+          </a:prstGeom>
+          <a:noFill/>
+        </p:spPr>
+        <p:txBody>
+          <a:bodyPr wrap="none">
+            <a:spAutoFit/>
+          </a:bodyPr>
+          <a:lstStyle/>
           <a:p>
             <a:pPr>
-              <a:spcBef>
-                <a:spcPts val="400"/>
-              </a:spcBef>
-              <a:defRPr sz="1800">
+              <a:defRPr sz="2200" b="1">
+                <a:solidFill>
+                  <a:srgbClr val="C81E1E"/>
+                </a:solidFill>
+                <a:latin typeface="Meiryo"/>
+              </a:defRPr>
+            </a:pPr>
+            <a:r>
+              <a:t>定義の確認</a:t>
+            </a:r>
+          </a:p>
+        </p:txBody>
+      </p:sp>
+      <p:sp>
+        <p:nvSpPr>
+          <p:cNvPr id="7" name="TextBox 6"/>
+          <p:cNvSpPr txBox="1"/>
+          <p:nvPr/>
+        </p:nvSpPr>
+        <p:spPr>
+          <a:xfrm>
+            <a:off x="731520" y="1554480"/>
+            <a:ext cx="10515600" cy="548640"/>
+          </a:xfrm>
+          <a:prstGeom prst="rect">
+            <a:avLst/>
+          </a:prstGeom>
+          <a:noFill/>
+        </p:spPr>
+        <p:txBody>
+          <a:bodyPr wrap="none">
+            <a:spAutoFit/>
+          </a:bodyPr>
+          <a:lstStyle/>
+          <a:p>
+            <a:pPr>
+              <a:defRPr sz="2000">
                 <a:solidFill>
                   <a:srgbClr val="000000"/>
                 </a:solidFill>
@@ -7887,31 +9374,116 @@
               </a:defRPr>
             </a:pPr>
             <a:r>
-              <a:t>  「顧客接点時間」と「非顧客接点時間」の明確化</a:t>
-            </a:r>
-          </a:p>
+              <a:t>「顧客接点時間」と「非顧客接点時間」の明確化</a:t>
+            </a:r>
+          </a:p>
+        </p:txBody>
+      </p:sp>
+      <p:sp>
+        <p:nvSpPr>
+          <p:cNvPr id="8" name="Rounded Rectangle 7"/>
+          <p:cNvSpPr/>
+          <p:nvPr/>
+        </p:nvSpPr>
+        <p:spPr>
+          <a:xfrm>
+            <a:off x="457200" y="2377440"/>
+            <a:ext cx="11247120" cy="1188720"/>
+          </a:xfrm>
+          <a:prstGeom prst="roundRect">
+            <a:avLst/>
+          </a:prstGeom>
+          <a:solidFill>
+            <a:srgbClr val="FFE6E6"/>
+          </a:solidFill>
+          <a:ln>
+            <a:solidFill>
+              <a:srgbClr val="C81E1E"/>
+            </a:solidFill>
+          </a:ln>
+        </p:spPr>
+        <p:style>
+          <a:lnRef idx="1">
+            <a:schemeClr val="accent1"/>
+          </a:lnRef>
+          <a:fillRef idx="3">
+            <a:schemeClr val="accent1"/>
+          </a:fillRef>
+          <a:effectRef idx="2">
+            <a:schemeClr val="accent1"/>
+          </a:effectRef>
+          <a:fontRef idx="minor">
+            <a:schemeClr val="lt1"/>
+          </a:fontRef>
+        </p:style>
+        <p:txBody>
+          <a:bodyPr rtlCol="0" anchor="ctr"/>
+          <a:lstStyle/>
+          <a:p>
+            <a:pPr algn="ctr"/>
+          </a:p>
+        </p:txBody>
+      </p:sp>
+      <p:sp>
+        <p:nvSpPr>
+          <p:cNvPr id="9" name="TextBox 8"/>
+          <p:cNvSpPr txBox="1"/>
+          <p:nvPr/>
+        </p:nvSpPr>
+        <p:spPr>
+          <a:xfrm>
+            <a:off x="731520" y="2514600"/>
+            <a:ext cx="10515600" cy="457200"/>
+          </a:xfrm>
+          <a:prstGeom prst="rect">
+            <a:avLst/>
+          </a:prstGeom>
+          <a:noFill/>
+        </p:spPr>
+        <p:txBody>
+          <a:bodyPr wrap="none">
+            <a:spAutoFit/>
+          </a:bodyPr>
+          <a:lstStyle/>
           <a:p>
             <a:pPr>
-              <a:spcBef>
-                <a:spcPts val="1600"/>
-              </a:spcBef>
-              <a:defRPr sz="2000" b="1">
-                <a:solidFill>
-                  <a:srgbClr val="E60012"/>
+              <a:defRPr sz="2200" b="1">
+                <a:solidFill>
+                  <a:srgbClr val="C81E1E"/>
                 </a:solidFill>
                 <a:latin typeface="Meiryo"/>
               </a:defRPr>
             </a:pPr>
             <a:r>
-              <a:t>■ シフト作成ガイドラインの活用</a:t>
-            </a:r>
-          </a:p>
+              <a:t>シフト作成ガイドライン</a:t>
+            </a:r>
+          </a:p>
+        </p:txBody>
+      </p:sp>
+      <p:sp>
+        <p:nvSpPr>
+          <p:cNvPr id="10" name="TextBox 9"/>
+          <p:cNvSpPr txBox="1"/>
+          <p:nvPr/>
+        </p:nvSpPr>
+        <p:spPr>
+          <a:xfrm>
+            <a:off x="731520" y="2926080"/>
+            <a:ext cx="10515600" cy="548640"/>
+          </a:xfrm>
+          <a:prstGeom prst="rect">
+            <a:avLst/>
+          </a:prstGeom>
+          <a:noFill/>
+        </p:spPr>
+        <p:txBody>
+          <a:bodyPr wrap="none">
+            <a:spAutoFit/>
+          </a:bodyPr>
+          <a:lstStyle/>
           <a:p>
             <a:pPr>
-              <a:spcBef>
-                <a:spcPts val="400"/>
-              </a:spcBef>
-              <a:defRPr sz="1800">
+              <a:defRPr sz="2000">
                 <a:solidFill>
                   <a:srgbClr val="000000"/>
                 </a:solidFill>
@@ -7919,7 +9491,7 @@
               </a:defRPr>
             </a:pPr>
             <a:r>
-              <a:t>  ガイドラインに沿ったシフト組みができているか？</a:t>
+              <a:t>ガイドラインに沿ったシフト組みができているか？</a:t>
             </a:r>
           </a:p>
         </p:txBody>
@@ -7950,8 +9522,8 @@
         </p:nvSpPr>
         <p:spPr>
           <a:xfrm>
-            <a:off x="9601200" y="274320"/>
-            <a:ext cx="2286000" cy="457200"/>
+            <a:off x="9418320" y="182880"/>
+            <a:ext cx="2560320" cy="457200"/>
           </a:xfrm>
           <a:prstGeom prst="rect">
             <a:avLst/>
@@ -7966,78 +9538,33 @@
           <a:p>
             <a:pPr algn="r"/>
             <a:r>
-              <a:rPr sz="1800" b="1">
-                <a:solidFill>
-                  <a:srgbClr val="E60012"/>
+              <a:rPr sz="2000" b="1">
+                <a:solidFill>
+                  <a:srgbClr val="C81E1E"/>
                 </a:solidFill>
                 <a:latin typeface="Arial"/>
               </a:rPr>
-              <a:t>Re</a:t>
-            </a:r>
-            <a:r>
-              <a:rPr sz="1800" b="1">
-                <a:solidFill>
-                  <a:srgbClr val="E60012"/>
-                </a:solidFill>
-                <a:latin typeface="Arial"/>
-              </a:rPr>
-              <a:t> RENAISSANCE</a:t>
-            </a:r>
-          </a:p>
-        </p:txBody>
-      </p:sp>
-      <p:sp>
-        <p:nvSpPr>
-          <p:cNvPr id="3" name="TextBox 2"/>
-          <p:cNvSpPr txBox="1"/>
-          <p:nvPr/>
-        </p:nvSpPr>
-        <p:spPr>
-          <a:xfrm>
-            <a:off x="457200" y="457200"/>
-            <a:ext cx="9144000" cy="640080"/>
-          </a:xfrm>
-          <a:prstGeom prst="rect">
-            <a:avLst/>
-          </a:prstGeom>
-          <a:noFill/>
-        </p:spPr>
-        <p:txBody>
-          <a:bodyPr wrap="none">
-            <a:spAutoFit/>
-          </a:bodyPr>
-          <a:lstStyle/>
-          <a:p>
-            <a:pPr>
-              <a:defRPr sz="2800" b="1">
-                <a:solidFill>
-                  <a:srgbClr val="000000"/>
-                </a:solidFill>
-                <a:latin typeface="Meiryo"/>
-              </a:defRPr>
-            </a:pPr>
-            <a:r>
-              <a:t>1-3. 具体的運用基準（シフト）</a:t>
-            </a:r>
-          </a:p>
-        </p:txBody>
-      </p:sp>
-      <p:sp>
-        <p:nvSpPr>
-          <p:cNvPr id="4" name="Rectangle 3"/>
+              <a:t>RENAISSANCE</a:t>
+            </a:r>
+          </a:p>
+        </p:txBody>
+      </p:sp>
+      <p:sp>
+        <p:nvSpPr>
+          <p:cNvPr id="3" name="Rectangle 2"/>
           <p:cNvSpPr/>
           <p:nvPr/>
         </p:nvSpPr>
         <p:spPr>
           <a:xfrm>
-            <a:off x="457200" y="1051560"/>
-            <a:ext cx="11247120" cy="38100"/>
+            <a:off x="0" y="685800"/>
+            <a:ext cx="12191695" cy="50800"/>
           </a:xfrm>
           <a:prstGeom prst="rect">
             <a:avLst/>
           </a:prstGeom>
           <a:solidFill>
-            <a:srgbClr val="E60012"/>
+            <a:srgbClr val="C81E1E"/>
           </a:solidFill>
           <a:ln>
             <a:noFill/>
@@ -8067,14 +9594,93 @@
       </p:sp>
       <p:sp>
         <p:nvSpPr>
-          <p:cNvPr id="5" name="TextBox 4"/>
-          <p:cNvSpPr txBox="1"/>
-          <p:nvPr/>
-        </p:nvSpPr>
-        <p:spPr>
-          <a:xfrm>
-            <a:off x="640080" y="1371600"/>
-            <a:ext cx="10972800" cy="5029200"/>
+          <p:cNvPr id="4" name="TextBox 3"/>
+          <p:cNvSpPr txBox="1"/>
+          <p:nvPr/>
+        </p:nvSpPr>
+        <p:spPr>
+          <a:xfrm>
+            <a:off x="457200" y="137160"/>
+            <a:ext cx="8686800" cy="548640"/>
+          </a:xfrm>
+          <a:prstGeom prst="rect">
+            <a:avLst/>
+          </a:prstGeom>
+          <a:noFill/>
+        </p:spPr>
+        <p:txBody>
+          <a:bodyPr wrap="none">
+            <a:spAutoFit/>
+          </a:bodyPr>
+          <a:lstStyle/>
+          <a:p>
+            <a:pPr>
+              <a:defRPr sz="3200" b="1">
+                <a:solidFill>
+                  <a:srgbClr val="C81E1E"/>
+                </a:solidFill>
+                <a:latin typeface="Meiryo"/>
+              </a:defRPr>
+            </a:pPr>
+            <a:r>
+              <a:t>1-3. 具体的運用基準（シフト）</a:t>
+            </a:r>
+          </a:p>
+        </p:txBody>
+      </p:sp>
+      <p:sp>
+        <p:nvSpPr>
+          <p:cNvPr id="5" name="Rounded Rectangle 4"/>
+          <p:cNvSpPr/>
+          <p:nvPr/>
+        </p:nvSpPr>
+        <p:spPr>
+          <a:xfrm>
+            <a:off x="914400" y="1371600"/>
+            <a:ext cx="10332720" cy="2011680"/>
+          </a:xfrm>
+          <a:prstGeom prst="roundRect">
+            <a:avLst/>
+          </a:prstGeom>
+          <a:solidFill>
+            <a:srgbClr val="C81E1E"/>
+          </a:solidFill>
+          <a:ln>
+            <a:noFill/>
+          </a:ln>
+        </p:spPr>
+        <p:style>
+          <a:lnRef idx="1">
+            <a:schemeClr val="accent1"/>
+          </a:lnRef>
+          <a:fillRef idx="3">
+            <a:schemeClr val="accent1"/>
+          </a:fillRef>
+          <a:effectRef idx="2">
+            <a:schemeClr val="accent1"/>
+          </a:effectRef>
+          <a:fontRef idx="minor">
+            <a:schemeClr val="lt1"/>
+          </a:fontRef>
+        </p:style>
+        <p:txBody>
+          <a:bodyPr rtlCol="0" anchor="ctr"/>
+          <a:lstStyle/>
+          <a:p>
+            <a:pPr algn="ctr"/>
+          </a:p>
+        </p:txBody>
+      </p:sp>
+      <p:sp>
+        <p:nvSpPr>
+          <p:cNvPr id="6" name="TextBox 5"/>
+          <p:cNvSpPr txBox="1"/>
+          <p:nvPr/>
+        </p:nvSpPr>
+        <p:spPr>
+          <a:xfrm>
+            <a:off x="1188720" y="1828800"/>
+            <a:ext cx="9784080" cy="1371600"/>
           </a:xfrm>
           <a:prstGeom prst="rect">
             <a:avLst/>
@@ -8087,103 +9693,124 @@
           </a:bodyPr>
           <a:lstStyle/>
           <a:p>
+            <a:pPr algn="ctr">
+              <a:defRPr sz="2800" b="1">
+                <a:solidFill>
+                  <a:srgbClr val="FFFFFF"/>
+                </a:solidFill>
+                <a:latin typeface="Meiryo"/>
+              </a:defRPr>
+            </a:pPr>
+            <a:r>
+              <a:t>在籍5,500名までのクラブは「受」１ライン体制</a:t>
+            </a:r>
+          </a:p>
+        </p:txBody>
+      </p:sp>
+      <p:sp>
+        <p:nvSpPr>
+          <p:cNvPr id="7" name="TextBox 6"/>
+          <p:cNvSpPr txBox="1"/>
+          <p:nvPr/>
+        </p:nvSpPr>
+        <p:spPr>
+          <a:xfrm>
+            <a:off x="1371600" y="3657600"/>
+            <a:ext cx="9418320" cy="640080"/>
+          </a:xfrm>
+          <a:prstGeom prst="rect">
+            <a:avLst/>
+          </a:prstGeom>
+          <a:noFill/>
+        </p:spPr>
+        <p:txBody>
+          <a:bodyPr wrap="none">
+            <a:spAutoFit/>
+          </a:bodyPr>
+          <a:lstStyle/>
+          <a:p>
             <a:pPr>
-              <a:spcBef>
-                <a:spcPts val="0"/>
-              </a:spcBef>
-              <a:defRPr sz="2000" b="1">
-                <a:solidFill>
-                  <a:srgbClr val="E60012"/>
+              <a:defRPr sz="2200">
+                <a:solidFill>
+                  <a:srgbClr val="505050"/>
                 </a:solidFill>
                 <a:latin typeface="Meiryo"/>
               </a:defRPr>
             </a:pPr>
             <a:r>
-              <a:t>■ 基準</a:t>
-            </a:r>
-          </a:p>
+              <a:t>✓ 現場から「厳しい」等の声がある場合 → セーフィー社による再調査を実施</a:t>
+            </a:r>
+          </a:p>
+        </p:txBody>
+      </p:sp>
+      <p:sp>
+        <p:nvSpPr>
+          <p:cNvPr id="8" name="TextBox 7"/>
+          <p:cNvSpPr txBox="1"/>
+          <p:nvPr/>
+        </p:nvSpPr>
+        <p:spPr>
+          <a:xfrm>
+            <a:off x="1371600" y="4389120"/>
+            <a:ext cx="9418320" cy="640080"/>
+          </a:xfrm>
+          <a:prstGeom prst="rect">
+            <a:avLst/>
+          </a:prstGeom>
+          <a:noFill/>
+        </p:spPr>
+        <p:txBody>
+          <a:bodyPr wrap="none">
+            <a:spAutoFit/>
+          </a:bodyPr>
+          <a:lstStyle/>
           <a:p>
             <a:pPr>
-              <a:spcBef>
-                <a:spcPts val="400"/>
-              </a:spcBef>
-              <a:defRPr sz="1800">
-                <a:solidFill>
-                  <a:srgbClr val="000000"/>
+              <a:defRPr sz="2200">
+                <a:solidFill>
+                  <a:srgbClr val="505050"/>
                 </a:solidFill>
                 <a:latin typeface="Meiryo"/>
               </a:defRPr>
             </a:pPr>
             <a:r>
-              <a:t>  在籍5,500名までのクラブは、「受」１ライン体制</a:t>
-            </a:r>
-          </a:p>
+              <a:t>✓ 7月調査結果も参照可能</a:t>
+            </a:r>
+          </a:p>
+        </p:txBody>
+      </p:sp>
+      <p:sp>
+        <p:nvSpPr>
+          <p:cNvPr id="9" name="TextBox 8"/>
+          <p:cNvSpPr txBox="1"/>
+          <p:nvPr/>
+        </p:nvSpPr>
+        <p:spPr>
+          <a:xfrm>
+            <a:off x="1371600" y="5120640"/>
+            <a:ext cx="9418320" cy="640080"/>
+          </a:xfrm>
+          <a:prstGeom prst="rect">
+            <a:avLst/>
+          </a:prstGeom>
+          <a:noFill/>
+        </p:spPr>
+        <p:txBody>
+          <a:bodyPr wrap="none">
+            <a:spAutoFit/>
+          </a:bodyPr>
+          <a:lstStyle/>
           <a:p>
             <a:pPr>
-              <a:spcBef>
-                <a:spcPts val="1600"/>
-              </a:spcBef>
-              <a:defRPr sz="2000" b="1">
-                <a:solidFill>
-                  <a:srgbClr val="E60012"/>
+              <a:defRPr sz="2200">
+                <a:solidFill>
+                  <a:srgbClr val="505050"/>
                 </a:solidFill>
                 <a:latin typeface="Meiryo"/>
               </a:defRPr>
             </a:pPr>
             <a:r>
-              <a:t>■ 対応</a:t>
-            </a:r>
-          </a:p>
-          <a:p>
-            <a:pPr>
-              <a:spcBef>
-                <a:spcPts val="400"/>
-              </a:spcBef>
-              <a:defRPr sz="1800">
-                <a:solidFill>
-                  <a:srgbClr val="000000"/>
-                </a:solidFill>
-                <a:latin typeface="Meiryo"/>
-              </a:defRPr>
-            </a:pPr>
-            <a:r>
-              <a:t>  現場から「厳しい」等の声がある場合は、</a:t>
-            </a:r>
-            <a:br/>
-            <a:r>
-              <a:t>セーフィー社による再調査を実施（7月調査結果も参照可）</a:t>
-            </a:r>
-          </a:p>
-          <a:p>
-            <a:pPr>
-              <a:spcBef>
-                <a:spcPts val="1600"/>
-              </a:spcBef>
-              <a:defRPr sz="2000" b="1">
-                <a:solidFill>
-                  <a:srgbClr val="E60012"/>
-                </a:solidFill>
-                <a:latin typeface="Meiryo"/>
-              </a:defRPr>
-            </a:pPr>
-            <a:r>
-              <a:t>■ アクション</a:t>
-            </a:r>
-          </a:p>
-          <a:p>
-            <a:pPr>
-              <a:spcBef>
-                <a:spcPts val="400"/>
-              </a:spcBef>
-              <a:defRPr sz="1800">
-                <a:solidFill>
-                  <a:srgbClr val="000000"/>
-                </a:solidFill>
-                <a:latin typeface="Meiryo"/>
-              </a:defRPr>
-            </a:pPr>
-            <a:r>
-              <a:t>  【重要】2月シフトより上記基準を反映してください</a:t>
+              <a:t>✓ 【重要】2月シフトより上記基準を反映してください</a:t>
             </a:r>
           </a:p>
         </p:txBody>
